--- a/docs/curso/slides/m03-modelos-de-negocio.pptx
+++ b/docs/curso/slides/m03-modelos-de-negocio.pptx
@@ -3594,6 +3594,54 @@
           <a:chExt cx="0" cy="0"/>
         </a:xfrm>
       </p:grpSpPr>
+      <p:sp>
+        <p:nvSpPr>
+          <p:cNvPr id="25" name="Slide Number Placeholder 0"/>
+          <p:cNvSpPr>
+            <a:spLocks noGrp="1"/>
+          </p:cNvSpPr>
+          <p:nvPr>
+            <p:ph type="sldNum" sz="quarter" idx="4294967295"/>
+          </p:nvPr>
+        </p:nvSpPr>
+        <p:spPr>
+          <a:xfrm>
+            <a:off x="11292840" y="6556248"/>
+            <a:ext cx="548640" cy="256032"/>
+          </a:xfrm>
+          <a:prstGeom prst="rect">
+            <a:avLst/>
+          </a:prstGeom>
+          <a:extLst>
+            <a:ext uri="{C572A759-6A51-4108-AA02-DFA0A04FC94B}">
+              <ma14:wrappingTextBoxFlag xmlns:ma14="http://schemas.microsoft.com/office/mac/drawingml/2011/main" val="0"/>
+            </a:ext>
+          </a:extLst>
+        </p:spPr>
+        <p:txBody>
+          <a:bodyPr/>
+          <a:lstStyle>
+            <a:lvl1pPr>
+              <a:defRPr sz="900">
+                <a:solidFill>
+                  <a:srgbClr val="1B3A6B"/>
+                </a:solidFill>
+                <a:latin typeface="Arial"/>
+                <a:ea typeface="Arial"/>
+                <a:cs typeface="Arial"/>
+              </a:defRPr>
+            </a:lvl1pPr>
+          </a:lstStyle>
+          <a:p>
+            <a:pPr algn="r"/>
+            <a:fld id="{F7021451-1387-4CA6-816F-3879F97B5CBC}" type="slidenum">
+              <a:rPr b="1" lang="en-US"/>
+              <a:t>1000</a:t>
+            </a:fld>
+            <a:endParaRPr lang="en-US"/>
+          </a:p>
+        </p:txBody>
+      </p:sp>
     </p:spTree>
   </p:cSld>
   <p:clrMapOvr>
@@ -3619,6 +3667,54 @@
           <a:chExt cx="0" cy="0"/>
         </a:xfrm>
       </p:grpSpPr>
+      <p:sp>
+        <p:nvSpPr>
+          <p:cNvPr id="25" name="Slide Number Placeholder 0"/>
+          <p:cNvSpPr>
+            <a:spLocks noGrp="1"/>
+          </p:cNvSpPr>
+          <p:nvPr>
+            <p:ph type="sldNum" sz="quarter" idx="4294967295"/>
+          </p:nvPr>
+        </p:nvSpPr>
+        <p:spPr>
+          <a:xfrm>
+            <a:off x="11292840" y="6556248"/>
+            <a:ext cx="548640" cy="256032"/>
+          </a:xfrm>
+          <a:prstGeom prst="rect">
+            <a:avLst/>
+          </a:prstGeom>
+          <a:extLst>
+            <a:ext uri="{C572A759-6A51-4108-AA02-DFA0A04FC94B}">
+              <ma14:wrappingTextBoxFlag xmlns:ma14="http://schemas.microsoft.com/office/mac/drawingml/2011/main" val="0"/>
+            </a:ext>
+          </a:extLst>
+        </p:spPr>
+        <p:txBody>
+          <a:bodyPr/>
+          <a:lstStyle>
+            <a:lvl1pPr>
+              <a:defRPr sz="900">
+                <a:solidFill>
+                  <a:srgbClr val="1B3A6B"/>
+                </a:solidFill>
+                <a:latin typeface="Arial"/>
+                <a:ea typeface="Arial"/>
+                <a:cs typeface="Arial"/>
+              </a:defRPr>
+            </a:lvl1pPr>
+          </a:lstStyle>
+          <a:p>
+            <a:pPr algn="r"/>
+            <a:fld id="{F7021451-1387-4CA6-816F-3879F97B5CBC}" type="slidenum">
+              <a:rPr b="1" lang="en-US"/>
+              <a:t>null</a:t>
+            </a:fld>
+            <a:endParaRPr lang="en-US"/>
+          </a:p>
+        </p:txBody>
+      </p:sp>
     </p:spTree>
   </p:cSld>
   <p:clrMap bg1="lt1" tx1="dk1" bg2="lt2" tx2="dk2" accent1="accent1" accent2="accent2" accent3="accent3" accent4="accent4" accent5="accent5" accent6="accent6" hlink="hlink" folHlink="folHlink"/>
@@ -4452,7 +4548,7 @@
         </p:blipFill>
         <p:spPr>
           <a:xfrm>
-            <a:off x="411480" y="6547104"/>
+            <a:off x="548640" y="6547104"/>
             <a:ext cx="274320" cy="274320"/>
           </a:xfrm>
           <a:prstGeom prst="rect">
@@ -4468,7 +4564,7 @@
         </p:nvSpPr>
         <p:spPr>
           <a:xfrm>
-            <a:off x="749808" y="6528816"/>
+            <a:off x="886968" y="6528816"/>
             <a:ext cx="6400800" cy="310896"/>
           </a:xfrm>
           <a:prstGeom prst="rect">
@@ -4508,7 +4604,7 @@
         <p:spPr>
           <a:xfrm>
             <a:off x="7132320" y="6528816"/>
-            <a:ext cx="4663440" cy="310896"/>
+            <a:ext cx="4023360" cy="310896"/>
           </a:xfrm>
           <a:prstGeom prst="rect">
             <a:avLst/>
@@ -4546,7 +4642,7 @@
         </p:nvSpPr>
         <p:spPr>
           <a:xfrm>
-            <a:off x="411480" y="384048"/>
+            <a:off x="548640" y="384048"/>
             <a:ext cx="82296" cy="658368"/>
           </a:xfrm>
           <a:prstGeom prst="rect">
@@ -4566,7 +4662,7 @@
         </p:nvSpPr>
         <p:spPr>
           <a:xfrm>
-            <a:off x="640080" y="292608"/>
+            <a:off x="777240" y="292608"/>
             <a:ext cx="10972800" cy="274320"/>
           </a:xfrm>
           <a:prstGeom prst="rect">
@@ -4605,8 +4701,8 @@
         </p:nvSpPr>
         <p:spPr>
           <a:xfrm>
-            <a:off x="640080" y="530352"/>
-            <a:ext cx="11155680" cy="566928"/>
+            <a:off x="777240" y="530352"/>
+            <a:ext cx="10881360" cy="566928"/>
           </a:xfrm>
           <a:prstGeom prst="rect">
             <a:avLst/>
@@ -4646,12 +4742,12 @@
         </p:nvSpPr>
         <p:spPr>
           <a:xfrm>
-            <a:off x="411480" y="1325880"/>
-            <a:ext cx="3642360" cy="4892040"/>
+            <a:off x="548640" y="1325880"/>
+            <a:ext cx="3544824" cy="4892040"/>
           </a:xfrm>
           <a:prstGeom prst="roundRect">
             <a:avLst>
-              <a:gd name="adj" fmla="val 2008"/>
+              <a:gd name="adj" fmla="val 2064"/>
             </a:avLst>
           </a:prstGeom>
           <a:solidFill>
@@ -4680,7 +4776,7 @@
         </p:nvSpPr>
         <p:spPr>
           <a:xfrm>
-            <a:off x="594360" y="1508760"/>
+            <a:off x="731520" y="1508760"/>
             <a:ext cx="457200" cy="457200"/>
           </a:xfrm>
           <a:prstGeom prst="ellipse">
@@ -4700,7 +4796,7 @@
         </p:nvSpPr>
         <p:spPr>
           <a:xfrm>
-            <a:off x="594360" y="1508760"/>
+            <a:off x="731520" y="1508760"/>
             <a:ext cx="457200" cy="457200"/>
           </a:xfrm>
           <a:prstGeom prst="rect">
@@ -4739,8 +4835,8 @@
         </p:nvSpPr>
         <p:spPr>
           <a:xfrm>
-            <a:off x="1188720" y="1435608"/>
-            <a:ext cx="2727960" cy="4672584"/>
+            <a:off x="1325880" y="1435608"/>
+            <a:ext cx="2630424" cy="4672584"/>
           </a:xfrm>
           <a:prstGeom prst="rect">
             <a:avLst/>
@@ -4780,12 +4876,12 @@
         </p:nvSpPr>
         <p:spPr>
           <a:xfrm>
-            <a:off x="4282440" y="1325880"/>
-            <a:ext cx="3642360" cy="4892040"/>
+            <a:off x="4322064" y="1325880"/>
+            <a:ext cx="3544824" cy="4892040"/>
           </a:xfrm>
           <a:prstGeom prst="roundRect">
             <a:avLst>
-              <a:gd name="adj" fmla="val 2008"/>
+              <a:gd name="adj" fmla="val 2064"/>
             </a:avLst>
           </a:prstGeom>
           <a:solidFill>
@@ -4814,7 +4910,7 @@
         </p:nvSpPr>
         <p:spPr>
           <a:xfrm>
-            <a:off x="4465320" y="1508760"/>
+            <a:off x="4504944" y="1508760"/>
             <a:ext cx="457200" cy="457200"/>
           </a:xfrm>
           <a:prstGeom prst="ellipse">
@@ -4834,7 +4930,7 @@
         </p:nvSpPr>
         <p:spPr>
           <a:xfrm>
-            <a:off x="4465320" y="1508760"/>
+            <a:off x="4504944" y="1508760"/>
             <a:ext cx="457200" cy="457200"/>
           </a:xfrm>
           <a:prstGeom prst="rect">
@@ -4873,8 +4969,8 @@
         </p:nvSpPr>
         <p:spPr>
           <a:xfrm>
-            <a:off x="5059680" y="1435608"/>
-            <a:ext cx="2727960" cy="4672584"/>
+            <a:off x="5099304" y="1435608"/>
+            <a:ext cx="2630424" cy="4672584"/>
           </a:xfrm>
           <a:prstGeom prst="rect">
             <a:avLst/>
@@ -4914,12 +5010,12 @@
         </p:nvSpPr>
         <p:spPr>
           <a:xfrm>
-            <a:off x="8153400" y="1325880"/>
-            <a:ext cx="3642360" cy="4892040"/>
+            <a:off x="8095488" y="1325880"/>
+            <a:ext cx="3544824" cy="4892040"/>
           </a:xfrm>
           <a:prstGeom prst="roundRect">
             <a:avLst>
-              <a:gd name="adj" fmla="val 2008"/>
+              <a:gd name="adj" fmla="val 2064"/>
             </a:avLst>
           </a:prstGeom>
           <a:solidFill>
@@ -4948,7 +5044,7 @@
         </p:nvSpPr>
         <p:spPr>
           <a:xfrm>
-            <a:off x="8336280" y="1508760"/>
+            <a:off x="8278368" y="1508760"/>
             <a:ext cx="457200" cy="457200"/>
           </a:xfrm>
           <a:prstGeom prst="ellipse">
@@ -4968,7 +5064,7 @@
         </p:nvSpPr>
         <p:spPr>
           <a:xfrm>
-            <a:off x="8336280" y="1508760"/>
+            <a:off x="8278368" y="1508760"/>
             <a:ext cx="457200" cy="457200"/>
           </a:xfrm>
           <a:prstGeom prst="rect">
@@ -5007,8 +5103,8 @@
         </p:nvSpPr>
         <p:spPr>
           <a:xfrm>
-            <a:off x="8930640" y="1435608"/>
-            <a:ext cx="2727960" cy="4672584"/>
+            <a:off x="8872728" y="1435608"/>
+            <a:ext cx="2630424" cy="4672584"/>
           </a:xfrm>
           <a:prstGeom prst="rect">
             <a:avLst/>
@@ -5037,6 +5133,54 @@
               <a:t>Valide com advogado</a:t>
             </a:r>
             <a:endParaRPr lang="en-US" sz="1800" dirty="0"/>
+          </a:p>
+        </p:txBody>
+      </p:sp>
+      <p:sp>
+        <p:nvSpPr>
+          <p:cNvPr id="25" name="Slide Number Placeholder 0"/>
+          <p:cNvSpPr>
+            <a:spLocks noGrp="1"/>
+          </p:cNvSpPr>
+          <p:nvPr>
+            <p:ph type="sldNum" sz="quarter" idx="4294967295"/>
+          </p:nvPr>
+        </p:nvSpPr>
+        <p:spPr>
+          <a:xfrm>
+            <a:off x="11292840" y="6556248"/>
+            <a:ext cx="548640" cy="256032"/>
+          </a:xfrm>
+          <a:prstGeom prst="rect">
+            <a:avLst/>
+          </a:prstGeom>
+          <a:extLst>
+            <a:ext uri="{C572A759-6A51-4108-AA02-DFA0A04FC94B}">
+              <ma14:wrappingTextBoxFlag xmlns:ma14="http://schemas.microsoft.com/office/mac/drawingml/2011/main" val="0"/>
+            </a:ext>
+          </a:extLst>
+        </p:spPr>
+        <p:txBody>
+          <a:bodyPr/>
+          <a:lstStyle>
+            <a:lvl1pPr>
+              <a:defRPr sz="900">
+                <a:solidFill>
+                  <a:srgbClr val="1B3A6B"/>
+                </a:solidFill>
+                <a:latin typeface="Arial"/>
+                <a:ea typeface="Arial"/>
+                <a:cs typeface="Arial"/>
+              </a:defRPr>
+            </a:lvl1pPr>
+          </a:lstStyle>
+          <a:p>
+            <a:pPr algn="r"/>
+            <a:fld id="{F7021451-1387-4CA6-816F-3879F97B5CBC}" type="slidenum">
+              <a:rPr b="1" lang="en-US"/>
+              <a:t>10</a:t>
+            </a:fld>
+            <a:endParaRPr lang="en-US"/>
           </a:p>
         </p:txBody>
       </p:sp>
@@ -5100,6 +5244,45 @@
         </p:nvSpPr>
         <p:spPr>
           <a:xfrm>
+            <a:off x="457200" y="548640"/>
+            <a:ext cx="3474720" cy="1737360"/>
+          </a:xfrm>
+          <a:prstGeom prst="rect">
+            <a:avLst/>
+          </a:prstGeom>
+          <a:noFill/>
+          <a:ln/>
+        </p:spPr>
+        <p:txBody>
+          <a:bodyPr wrap="square" rtlCol="0" anchor="ctr"/>
+          <a:lstStyle/>
+          <a:p>
+            <a:pPr indent="0" marL="0">
+              <a:buNone/>
+            </a:pPr>
+            <a:r>
+              <a:rPr lang="en-US" sz="11000" b="1" dirty="0">
+                <a:solidFill>
+                  <a:srgbClr val="11396F"/>
+                </a:solidFill>
+                <a:latin typeface="Arial" pitchFamily="34" charset="0"/>
+                <a:ea typeface="Arial" pitchFamily="34" charset="-122"/>
+                <a:cs typeface="Arial" pitchFamily="34" charset="-120"/>
+              </a:rPr>
+              <a:t>03</a:t>
+            </a:r>
+            <a:endParaRPr lang="en-US" sz="11000" dirty="0"/>
+          </a:p>
+        </p:txBody>
+      </p:sp>
+      <p:sp>
+        <p:nvSpPr>
+          <p:cNvPr id="4" name="Text 2"/>
+          <p:cNvSpPr/>
+          <p:nvPr/>
+        </p:nvSpPr>
+        <p:spPr>
+          <a:xfrm>
             <a:off x="548640" y="2194560"/>
             <a:ext cx="3291840" cy="548640"/>
           </a:xfrm>
@@ -5133,7 +5316,46 @@
       </p:sp>
       <p:sp>
         <p:nvSpPr>
-          <p:cNvPr id="4" name="Text 2"/>
+          <p:cNvPr id="5" name="Text 3"/>
+          <p:cNvSpPr/>
+          <p:nvPr/>
+        </p:nvSpPr>
+        <p:spPr>
+          <a:xfrm>
+            <a:off x="548640" y="3200400"/>
+            <a:ext cx="3383280" cy="457200"/>
+          </a:xfrm>
+          <a:prstGeom prst="rect">
+            <a:avLst/>
+          </a:prstGeom>
+          <a:noFill/>
+          <a:ln/>
+        </p:spPr>
+        <p:txBody>
+          <a:bodyPr wrap="square" rtlCol="0" anchor="ctr"/>
+          <a:lstStyle/>
+          <a:p>
+            <a:pPr indent="0" marL="0">
+              <a:buNone/>
+            </a:pPr>
+            <a:r>
+              <a:rPr lang="en-US" sz="1100" dirty="0">
+                <a:solidFill>
+                  <a:srgbClr val="C7D2E3"/>
+                </a:solidFill>
+                <a:latin typeface="Arial" pitchFamily="34" charset="0"/>
+                <a:ea typeface="Arial" pitchFamily="34" charset="-122"/>
+                <a:cs typeface="Arial" pitchFamily="34" charset="-120"/>
+              </a:rPr>
+              <a:t>M3 · Etapa 2 · Regulação e negócio</a:t>
+            </a:r>
+            <a:endParaRPr lang="en-US" sz="1100" dirty="0"/>
+          </a:p>
+        </p:txBody>
+      </p:sp>
+      <p:sp>
+        <p:nvSpPr>
+          <p:cNvPr id="6" name="Text 4"/>
           <p:cNvSpPr/>
           <p:nvPr/>
         </p:nvSpPr>
@@ -5172,7 +5394,7 @@
       </p:sp>
       <p:pic>
         <p:nvPicPr>
-          <p:cNvPr id="5" name="Image 0" descr="/www/wwwroot/rexar/gdsolar/docs/curso/slides/assets/logo-gdsolar.png">    </p:cNvPr>
+          <p:cNvPr id="7" name="Image 0" descr="/www/wwwroot/rexar/gdsolar/docs/curso/slides/assets/logo-gdsolar.png">    </p:cNvPr>
           <p:cNvPicPr>
             <a:picLocks noChangeAspect="1"/>
           </p:cNvPicPr>
@@ -5196,7 +5418,7 @@
       </p:pic>
       <p:sp>
         <p:nvSpPr>
-          <p:cNvPr id="6" name="Text 3"/>
+          <p:cNvPr id="8" name="Text 5"/>
           <p:cNvSpPr/>
           <p:nvPr/>
         </p:nvSpPr>
@@ -5237,7 +5459,7 @@
       </p:sp>
       <p:sp>
         <p:nvSpPr>
-          <p:cNvPr id="7" name="Text 4"/>
+          <p:cNvPr id="9" name="Text 6"/>
           <p:cNvSpPr/>
           <p:nvPr/>
         </p:nvSpPr>
@@ -5278,7 +5500,7 @@
       </p:sp>
       <p:sp>
         <p:nvSpPr>
-          <p:cNvPr id="8" name="Text 5"/>
+          <p:cNvPr id="10" name="Text 7"/>
           <p:cNvSpPr/>
           <p:nvPr/>
         </p:nvSpPr>
@@ -5457,7 +5679,7 @@
         </p:blipFill>
         <p:spPr>
           <a:xfrm>
-            <a:off x="411480" y="6547104"/>
+            <a:off x="548640" y="6547104"/>
             <a:ext cx="274320" cy="274320"/>
           </a:xfrm>
           <a:prstGeom prst="rect">
@@ -5473,7 +5695,7 @@
         </p:nvSpPr>
         <p:spPr>
           <a:xfrm>
-            <a:off x="749808" y="6528816"/>
+            <a:off x="886968" y="6528816"/>
             <a:ext cx="6400800" cy="310896"/>
           </a:xfrm>
           <a:prstGeom prst="rect">
@@ -5513,7 +5735,7 @@
         <p:spPr>
           <a:xfrm>
             <a:off x="7132320" y="6528816"/>
-            <a:ext cx="4663440" cy="310896"/>
+            <a:ext cx="4023360" cy="310896"/>
           </a:xfrm>
           <a:prstGeom prst="rect">
             <a:avLst/>
@@ -5551,7 +5773,7 @@
         </p:nvSpPr>
         <p:spPr>
           <a:xfrm>
-            <a:off x="411480" y="384048"/>
+            <a:off x="548640" y="384048"/>
             <a:ext cx="82296" cy="658368"/>
           </a:xfrm>
           <a:prstGeom prst="rect">
@@ -5571,7 +5793,7 @@
         </p:nvSpPr>
         <p:spPr>
           <a:xfrm>
-            <a:off x="640080" y="292608"/>
+            <a:off x="777240" y="292608"/>
             <a:ext cx="10972800" cy="274320"/>
           </a:xfrm>
           <a:prstGeom prst="rect">
@@ -5610,8 +5832,8 @@
         </p:nvSpPr>
         <p:spPr>
           <a:xfrm>
-            <a:off x="640080" y="530352"/>
-            <a:ext cx="11155680" cy="566928"/>
+            <a:off x="777240" y="530352"/>
+            <a:ext cx="10881360" cy="566928"/>
           </a:xfrm>
           <a:prstGeom prst="rect">
             <a:avLst/>
@@ -5651,12 +5873,12 @@
         </p:nvSpPr>
         <p:spPr>
           <a:xfrm>
-            <a:off x="411480" y="1325880"/>
-            <a:ext cx="3611880" cy="4937760"/>
+            <a:off x="548640" y="1325880"/>
+            <a:ext cx="3514344" cy="4937760"/>
           </a:xfrm>
           <a:prstGeom prst="roundRect">
             <a:avLst>
-              <a:gd name="adj" fmla="val 2025"/>
+              <a:gd name="adj" fmla="val 2082"/>
             </a:avLst>
           </a:prstGeom>
           <a:solidFill>
@@ -5685,8 +5907,8 @@
         </p:nvSpPr>
         <p:spPr>
           <a:xfrm>
-            <a:off x="411480" y="1325880"/>
-            <a:ext cx="3611880" cy="109728"/>
+            <a:off x="548640" y="1325880"/>
+            <a:ext cx="3514344" cy="109728"/>
           </a:xfrm>
           <a:prstGeom prst="rect">
             <a:avLst/>
@@ -5705,8 +5927,8 @@
         </p:nvSpPr>
         <p:spPr>
           <a:xfrm>
-            <a:off x="685800" y="1554480"/>
-            <a:ext cx="3063240" cy="685800"/>
+            <a:off x="822960" y="1554480"/>
+            <a:ext cx="2965704" cy="685800"/>
           </a:xfrm>
           <a:prstGeom prst="rect">
             <a:avLst/>
@@ -5746,8 +5968,8 @@
         </p:nvSpPr>
         <p:spPr>
           <a:xfrm>
-            <a:off x="685800" y="2286000"/>
-            <a:ext cx="3063240" cy="3749040"/>
+            <a:off x="822960" y="2286000"/>
+            <a:ext cx="2965704" cy="3749040"/>
           </a:xfrm>
           <a:prstGeom prst="rect">
             <a:avLst/>
@@ -5850,12 +6072,12 @@
         </p:nvSpPr>
         <p:spPr>
           <a:xfrm>
-            <a:off x="4297680" y="1325880"/>
-            <a:ext cx="3611880" cy="4937760"/>
+            <a:off x="4337304" y="1325880"/>
+            <a:ext cx="3514344" cy="4937760"/>
           </a:xfrm>
           <a:prstGeom prst="roundRect">
             <a:avLst>
-              <a:gd name="adj" fmla="val 2025"/>
+              <a:gd name="adj" fmla="val 2082"/>
             </a:avLst>
           </a:prstGeom>
           <a:solidFill>
@@ -5884,8 +6106,8 @@
         </p:nvSpPr>
         <p:spPr>
           <a:xfrm>
-            <a:off x="4297680" y="1325880"/>
-            <a:ext cx="3611880" cy="109728"/>
+            <a:off x="4337304" y="1325880"/>
+            <a:ext cx="3514344" cy="109728"/>
           </a:xfrm>
           <a:prstGeom prst="rect">
             <a:avLst/>
@@ -5904,8 +6126,8 @@
         </p:nvSpPr>
         <p:spPr>
           <a:xfrm>
-            <a:off x="4572000" y="1554480"/>
-            <a:ext cx="3063240" cy="685800"/>
+            <a:off x="4611624" y="1554480"/>
+            <a:ext cx="2965704" cy="685800"/>
           </a:xfrm>
           <a:prstGeom prst="rect">
             <a:avLst/>
@@ -5945,8 +6167,8 @@
         </p:nvSpPr>
         <p:spPr>
           <a:xfrm>
-            <a:off x="4572000" y="2286000"/>
-            <a:ext cx="3063240" cy="3749040"/>
+            <a:off x="4611624" y="2286000"/>
+            <a:ext cx="2965704" cy="3749040"/>
           </a:xfrm>
           <a:prstGeom prst="rect">
             <a:avLst/>
@@ -5968,7 +6190,7 @@
               <a:buChar char="●"/>
             </a:pPr>
             <a:r>
-              <a:rPr lang="en-US" sz="1300" dirty="0">
+              <a:rPr lang="en-US" sz="1700" dirty="0">
                 <a:solidFill>
                   <a:srgbClr val="1F2937"/>
                 </a:solidFill>
@@ -5978,7 +6200,7 @@
               </a:rPr>
               <a:t>✗ Vender créditos ou 'energia' ao cliente</a:t>
             </a:r>
-            <a:endParaRPr lang="en-US" sz="1300" dirty="0"/>
+            <a:endParaRPr lang="en-US" sz="1700" dirty="0"/>
           </a:p>
           <a:p>
             <a:pPr marL="342900" indent="-342900">
@@ -5989,7 +6211,7 @@
               <a:buChar char="●"/>
             </a:pPr>
             <a:r>
-              <a:rPr lang="en-US" sz="1300" dirty="0">
+              <a:rPr lang="en-US" sz="1700" dirty="0">
                 <a:solidFill>
                   <a:srgbClr val="1F2937"/>
                 </a:solidFill>
@@ -5999,7 +6221,7 @@
               </a:rPr>
               <a:t>✗ Prometer economia que depende de regra que pode mudar, sem ressalva</a:t>
             </a:r>
-            <a:endParaRPr lang="en-US" sz="1300" dirty="0"/>
+            <a:endParaRPr lang="en-US" sz="1700" dirty="0"/>
           </a:p>
           <a:p>
             <a:pPr marL="342900" indent="-342900">
@@ -6010,7 +6232,7 @@
               <a:buChar char="●"/>
             </a:pPr>
             <a:r>
-              <a:rPr lang="en-US" sz="1300" dirty="0">
+              <a:rPr lang="en-US" sz="1700" dirty="0">
                 <a:solidFill>
                   <a:srgbClr val="1F2937"/>
                 </a:solidFill>
@@ -6020,7 +6242,7 @@
               </a:rPr>
               <a:t>✗ Incluir cliente na usina sem participação na entidade</a:t>
             </a:r>
-            <a:endParaRPr lang="en-US" sz="1300" dirty="0"/>
+            <a:endParaRPr lang="en-US" sz="1700" dirty="0"/>
           </a:p>
         </p:txBody>
       </p:sp>
@@ -6032,12 +6254,12 @@
         </p:nvSpPr>
         <p:spPr>
           <a:xfrm>
-            <a:off x="8183880" y="1325880"/>
-            <a:ext cx="3611880" cy="4937760"/>
+            <a:off x="8125968" y="1325880"/>
+            <a:ext cx="3514344" cy="4937760"/>
           </a:xfrm>
           <a:prstGeom prst="roundRect">
             <a:avLst>
-              <a:gd name="adj" fmla="val 2025"/>
+              <a:gd name="adj" fmla="val 2082"/>
             </a:avLst>
           </a:prstGeom>
           <a:solidFill>
@@ -6066,8 +6288,8 @@
         </p:nvSpPr>
         <p:spPr>
           <a:xfrm>
-            <a:off x="8183880" y="1325880"/>
-            <a:ext cx="3611880" cy="109728"/>
+            <a:off x="8125968" y="1325880"/>
+            <a:ext cx="3514344" cy="109728"/>
           </a:xfrm>
           <a:prstGeom prst="rect">
             <a:avLst/>
@@ -6086,8 +6308,8 @@
         </p:nvSpPr>
         <p:spPr>
           <a:xfrm>
-            <a:off x="8458200" y="1554480"/>
-            <a:ext cx="3063240" cy="685800"/>
+            <a:off x="8400288" y="1554480"/>
+            <a:ext cx="2965704" cy="685800"/>
           </a:xfrm>
           <a:prstGeom prst="rect">
             <a:avLst/>
@@ -6127,8 +6349,8 @@
         </p:nvSpPr>
         <p:spPr>
           <a:xfrm>
-            <a:off x="8458200" y="2286000"/>
-            <a:ext cx="3063240" cy="3749040"/>
+            <a:off x="8400288" y="2286000"/>
+            <a:ext cx="2965704" cy="3749040"/>
           </a:xfrm>
           <a:prstGeom prst="rect">
             <a:avLst/>
@@ -6224,6 +6446,54 @@
               <a:t>nada de letras miúdas</a:t>
             </a:r>
             <a:endParaRPr lang="en-US" sz="1700" dirty="0"/>
+          </a:p>
+        </p:txBody>
+      </p:sp>
+      <p:sp>
+        <p:nvSpPr>
+          <p:cNvPr id="25" name="Slide Number Placeholder 0"/>
+          <p:cNvSpPr>
+            <a:spLocks noGrp="1"/>
+          </p:cNvSpPr>
+          <p:nvPr>
+            <p:ph type="sldNum" sz="quarter" idx="4294967295"/>
+          </p:nvPr>
+        </p:nvSpPr>
+        <p:spPr>
+          <a:xfrm>
+            <a:off x="11292840" y="6556248"/>
+            <a:ext cx="548640" cy="256032"/>
+          </a:xfrm>
+          <a:prstGeom prst="rect">
+            <a:avLst/>
+          </a:prstGeom>
+          <a:extLst>
+            <a:ext uri="{C572A759-6A51-4108-AA02-DFA0A04FC94B}">
+              <ma14:wrappingTextBoxFlag xmlns:ma14="http://schemas.microsoft.com/office/mac/drawingml/2011/main" val="0"/>
+            </a:ext>
+          </a:extLst>
+        </p:spPr>
+        <p:txBody>
+          <a:bodyPr/>
+          <a:lstStyle>
+            <a:lvl1pPr>
+              <a:defRPr sz="900">
+                <a:solidFill>
+                  <a:srgbClr val="1B3A6B"/>
+                </a:solidFill>
+                <a:latin typeface="Arial"/>
+                <a:ea typeface="Arial"/>
+                <a:cs typeface="Arial"/>
+              </a:defRPr>
+            </a:lvl1pPr>
+          </a:lstStyle>
+          <a:p>
+            <a:pPr algn="r"/>
+            <a:fld id="{F7021451-1387-4CA6-816F-3879F97B5CBC}" type="slidenum">
+              <a:rPr b="1" lang="en-US"/>
+              <a:t>12</a:t>
+            </a:fld>
+            <a:endParaRPr lang="en-US"/>
           </a:p>
         </p:txBody>
       </p:sp>
@@ -6300,7 +6570,7 @@
         </p:blipFill>
         <p:spPr>
           <a:xfrm>
-            <a:off x="411480" y="6547104"/>
+            <a:off x="548640" y="6547104"/>
             <a:ext cx="274320" cy="274320"/>
           </a:xfrm>
           <a:prstGeom prst="rect">
@@ -6316,7 +6586,7 @@
         </p:nvSpPr>
         <p:spPr>
           <a:xfrm>
-            <a:off x="749808" y="6528816"/>
+            <a:off x="886968" y="6528816"/>
             <a:ext cx="6400800" cy="310896"/>
           </a:xfrm>
           <a:prstGeom prst="rect">
@@ -6356,7 +6626,7 @@
         <p:spPr>
           <a:xfrm>
             <a:off x="7132320" y="6528816"/>
-            <a:ext cx="4663440" cy="310896"/>
+            <a:ext cx="4023360" cy="310896"/>
           </a:xfrm>
           <a:prstGeom prst="rect">
             <a:avLst/>
@@ -6394,7 +6664,7 @@
         </p:nvSpPr>
         <p:spPr>
           <a:xfrm>
-            <a:off x="411480" y="384048"/>
+            <a:off x="548640" y="384048"/>
             <a:ext cx="82296" cy="658368"/>
           </a:xfrm>
           <a:prstGeom prst="rect">
@@ -6414,7 +6684,7 @@
         </p:nvSpPr>
         <p:spPr>
           <a:xfrm>
-            <a:off x="640080" y="292608"/>
+            <a:off x="777240" y="292608"/>
             <a:ext cx="10972800" cy="274320"/>
           </a:xfrm>
           <a:prstGeom prst="rect">
@@ -6453,8 +6723,8 @@
         </p:nvSpPr>
         <p:spPr>
           <a:xfrm>
-            <a:off x="640080" y="530352"/>
-            <a:ext cx="11155680" cy="566928"/>
+            <a:off x="777240" y="530352"/>
+            <a:ext cx="10881360" cy="566928"/>
           </a:xfrm>
           <a:prstGeom prst="rect">
             <a:avLst/>
@@ -6494,8 +6764,8 @@
         </p:nvSpPr>
         <p:spPr>
           <a:xfrm>
-            <a:off x="411480" y="2651760"/>
-            <a:ext cx="5779008" cy="1463040"/>
+            <a:off x="548640" y="2651760"/>
+            <a:ext cx="5596128" cy="1463040"/>
           </a:xfrm>
           <a:prstGeom prst="chevron">
             <a:avLst/>
@@ -6519,8 +6789,8 @@
         </p:nvSpPr>
         <p:spPr>
           <a:xfrm>
-            <a:off x="731520" y="2651760"/>
-            <a:ext cx="5257800" cy="1463040"/>
+            <a:off x="868680" y="2651760"/>
+            <a:ext cx="5074920" cy="1463040"/>
           </a:xfrm>
           <a:prstGeom prst="rect">
             <a:avLst/>
@@ -6560,8 +6830,8 @@
         </p:nvSpPr>
         <p:spPr>
           <a:xfrm>
-            <a:off x="6080760" y="2651760"/>
-            <a:ext cx="5779008" cy="1463040"/>
+            <a:off x="6035040" y="2651760"/>
+            <a:ext cx="5596128" cy="1463040"/>
           </a:xfrm>
           <a:prstGeom prst="chevron">
             <a:avLst/>
@@ -6585,8 +6855,8 @@
         </p:nvSpPr>
         <p:spPr>
           <a:xfrm>
-            <a:off x="6400800" y="2651760"/>
-            <a:ext cx="5257800" cy="1463040"/>
+            <a:off x="6355080" y="2651760"/>
+            <a:ext cx="5074920" cy="1463040"/>
           </a:xfrm>
           <a:prstGeom prst="rect">
             <a:avLst/>
@@ -6615,6 +6885,54 @@
               <a:t>repasse ao produtor + taxa de administração</a:t>
             </a:r>
             <a:endParaRPr lang="en-US" sz="1500" dirty="0"/>
+          </a:p>
+        </p:txBody>
+      </p:sp>
+      <p:sp>
+        <p:nvSpPr>
+          <p:cNvPr id="25" name="Slide Number Placeholder 0"/>
+          <p:cNvSpPr>
+            <a:spLocks noGrp="1"/>
+          </p:cNvSpPr>
+          <p:nvPr>
+            <p:ph type="sldNum" sz="quarter" idx="4294967295"/>
+          </p:nvPr>
+        </p:nvSpPr>
+        <p:spPr>
+          <a:xfrm>
+            <a:off x="11292840" y="6556248"/>
+            <a:ext cx="548640" cy="256032"/>
+          </a:xfrm>
+          <a:prstGeom prst="rect">
+            <a:avLst/>
+          </a:prstGeom>
+          <a:extLst>
+            <a:ext uri="{C572A759-6A51-4108-AA02-DFA0A04FC94B}">
+              <ma14:wrappingTextBoxFlag xmlns:ma14="http://schemas.microsoft.com/office/mac/drawingml/2011/main" val="0"/>
+            </a:ext>
+          </a:extLst>
+        </p:spPr>
+        <p:txBody>
+          <a:bodyPr/>
+          <a:lstStyle>
+            <a:lvl1pPr>
+              <a:defRPr sz="900">
+                <a:solidFill>
+                  <a:srgbClr val="1B3A6B"/>
+                </a:solidFill>
+                <a:latin typeface="Arial"/>
+                <a:ea typeface="Arial"/>
+                <a:cs typeface="Arial"/>
+              </a:defRPr>
+            </a:lvl1pPr>
+          </a:lstStyle>
+          <a:p>
+            <a:pPr algn="r"/>
+            <a:fld id="{F7021451-1387-4CA6-816F-3879F97B5CBC}" type="slidenum">
+              <a:rPr b="1" lang="en-US"/>
+              <a:t>13</a:t>
+            </a:fld>
+            <a:endParaRPr lang="en-US"/>
           </a:p>
         </p:txBody>
       </p:sp>
@@ -6691,7 +7009,7 @@
         </p:blipFill>
         <p:spPr>
           <a:xfrm>
-            <a:off x="411480" y="6547104"/>
+            <a:off x="548640" y="6547104"/>
             <a:ext cx="274320" cy="274320"/>
           </a:xfrm>
           <a:prstGeom prst="rect">
@@ -6707,7 +7025,7 @@
         </p:nvSpPr>
         <p:spPr>
           <a:xfrm>
-            <a:off x="749808" y="6528816"/>
+            <a:off x="886968" y="6528816"/>
             <a:ext cx="6400800" cy="310896"/>
           </a:xfrm>
           <a:prstGeom prst="rect">
@@ -6747,7 +7065,7 @@
         <p:spPr>
           <a:xfrm>
             <a:off x="7132320" y="6528816"/>
-            <a:ext cx="4663440" cy="310896"/>
+            <a:ext cx="4023360" cy="310896"/>
           </a:xfrm>
           <a:prstGeom prst="rect">
             <a:avLst/>
@@ -6785,7 +7103,7 @@
         </p:nvSpPr>
         <p:spPr>
           <a:xfrm>
-            <a:off x="411480" y="384048"/>
+            <a:off x="548640" y="384048"/>
             <a:ext cx="82296" cy="658368"/>
           </a:xfrm>
           <a:prstGeom prst="rect">
@@ -6805,7 +7123,7 @@
         </p:nvSpPr>
         <p:spPr>
           <a:xfrm>
-            <a:off x="640080" y="292608"/>
+            <a:off x="777240" y="292608"/>
             <a:ext cx="10972800" cy="274320"/>
           </a:xfrm>
           <a:prstGeom prst="rect">
@@ -6844,8 +7162,8 @@
         </p:nvSpPr>
         <p:spPr>
           <a:xfrm>
-            <a:off x="640080" y="530352"/>
-            <a:ext cx="11155680" cy="566928"/>
+            <a:off x="777240" y="530352"/>
+            <a:ext cx="10881360" cy="566928"/>
           </a:xfrm>
           <a:prstGeom prst="rect">
             <a:avLst/>
@@ -6885,8 +7203,8 @@
         </p:nvSpPr>
         <p:spPr>
           <a:xfrm>
-            <a:off x="411480" y="1325880"/>
-            <a:ext cx="5577840" cy="2331720"/>
+            <a:off x="548640" y="1325880"/>
+            <a:ext cx="5431536" cy="2331720"/>
           </a:xfrm>
           <a:prstGeom prst="roundRect">
             <a:avLst>
@@ -6919,7 +7237,7 @@
         </p:nvSpPr>
         <p:spPr>
           <a:xfrm>
-            <a:off x="594360" y="1508760"/>
+            <a:off x="731520" y="1508760"/>
             <a:ext cx="457200" cy="457200"/>
           </a:xfrm>
           <a:prstGeom prst="ellipse">
@@ -6939,7 +7257,7 @@
         </p:nvSpPr>
         <p:spPr>
           <a:xfrm>
-            <a:off x="594360" y="1508760"/>
+            <a:off x="731520" y="1508760"/>
             <a:ext cx="457200" cy="457200"/>
           </a:xfrm>
           <a:prstGeom prst="rect">
@@ -6978,8 +7296,8 @@
         </p:nvSpPr>
         <p:spPr>
           <a:xfrm>
-            <a:off x="1188720" y="1435608"/>
-            <a:ext cx="4663440" cy="2112264"/>
+            <a:off x="1325880" y="1435608"/>
+            <a:ext cx="4517136" cy="2112264"/>
           </a:xfrm>
           <a:prstGeom prst="rect">
             <a:avLst/>
@@ -7019,8 +7337,8 @@
         </p:nvSpPr>
         <p:spPr>
           <a:xfrm>
-            <a:off x="6217920" y="1325880"/>
-            <a:ext cx="5577840" cy="2331720"/>
+            <a:off x="6208776" y="1325880"/>
+            <a:ext cx="5431536" cy="2331720"/>
           </a:xfrm>
           <a:prstGeom prst="roundRect">
             <a:avLst>
@@ -7053,7 +7371,7 @@
         </p:nvSpPr>
         <p:spPr>
           <a:xfrm>
-            <a:off x="6400800" y="1508760"/>
+            <a:off x="6391656" y="1508760"/>
             <a:ext cx="457200" cy="457200"/>
           </a:xfrm>
           <a:prstGeom prst="ellipse">
@@ -7073,7 +7391,7 @@
         </p:nvSpPr>
         <p:spPr>
           <a:xfrm>
-            <a:off x="6400800" y="1508760"/>
+            <a:off x="6391656" y="1508760"/>
             <a:ext cx="457200" cy="457200"/>
           </a:xfrm>
           <a:prstGeom prst="rect">
@@ -7112,8 +7430,8 @@
         </p:nvSpPr>
         <p:spPr>
           <a:xfrm>
-            <a:off x="6995160" y="1435608"/>
-            <a:ext cx="4663440" cy="2112264"/>
+            <a:off x="6986016" y="1435608"/>
+            <a:ext cx="4517136" cy="2112264"/>
           </a:xfrm>
           <a:prstGeom prst="rect">
             <a:avLst/>
@@ -7153,8 +7471,8 @@
         </p:nvSpPr>
         <p:spPr>
           <a:xfrm>
-            <a:off x="411480" y="3886200"/>
-            <a:ext cx="5577840" cy="2331720"/>
+            <a:off x="548640" y="3886200"/>
+            <a:ext cx="5431536" cy="2331720"/>
           </a:xfrm>
           <a:prstGeom prst="roundRect">
             <a:avLst>
@@ -7187,7 +7505,7 @@
         </p:nvSpPr>
         <p:spPr>
           <a:xfrm>
-            <a:off x="594360" y="4069080"/>
+            <a:off x="731520" y="4069080"/>
             <a:ext cx="457200" cy="457200"/>
           </a:xfrm>
           <a:prstGeom prst="ellipse">
@@ -7207,7 +7525,7 @@
         </p:nvSpPr>
         <p:spPr>
           <a:xfrm>
-            <a:off x="594360" y="4069080"/>
+            <a:off x="731520" y="4069080"/>
             <a:ext cx="457200" cy="457200"/>
           </a:xfrm>
           <a:prstGeom prst="rect">
@@ -7246,8 +7564,8 @@
         </p:nvSpPr>
         <p:spPr>
           <a:xfrm>
-            <a:off x="1188720" y="3995928"/>
-            <a:ext cx="4663440" cy="2112264"/>
+            <a:off x="1325880" y="3995928"/>
+            <a:ext cx="4517136" cy="2112264"/>
           </a:xfrm>
           <a:prstGeom prst="rect">
             <a:avLst/>
@@ -7287,8 +7605,8 @@
         </p:nvSpPr>
         <p:spPr>
           <a:xfrm>
-            <a:off x="6217920" y="3886200"/>
-            <a:ext cx="5577840" cy="2331720"/>
+            <a:off x="6208776" y="3886200"/>
+            <a:ext cx="5431536" cy="2331720"/>
           </a:xfrm>
           <a:prstGeom prst="roundRect">
             <a:avLst>
@@ -7321,7 +7639,7 @@
         </p:nvSpPr>
         <p:spPr>
           <a:xfrm>
-            <a:off x="6400800" y="4069080"/>
+            <a:off x="6391656" y="4069080"/>
             <a:ext cx="457200" cy="457200"/>
           </a:xfrm>
           <a:prstGeom prst="ellipse">
@@ -7341,7 +7659,7 @@
         </p:nvSpPr>
         <p:spPr>
           <a:xfrm>
-            <a:off x="6400800" y="4069080"/>
+            <a:off x="6391656" y="4069080"/>
             <a:ext cx="457200" cy="457200"/>
           </a:xfrm>
           <a:prstGeom prst="rect">
@@ -7380,8 +7698,8 @@
         </p:nvSpPr>
         <p:spPr>
           <a:xfrm>
-            <a:off x="6995160" y="3995928"/>
-            <a:ext cx="4663440" cy="2112264"/>
+            <a:off x="6986016" y="3995928"/>
+            <a:ext cx="4517136" cy="2112264"/>
           </a:xfrm>
           <a:prstGeom prst="rect">
             <a:avLst/>
@@ -7410,6 +7728,54 @@
               <a:t>linguagem e contratos corretos</a:t>
             </a:r>
             <a:endParaRPr lang="en-US" sz="1800" dirty="0"/>
+          </a:p>
+        </p:txBody>
+      </p:sp>
+      <p:sp>
+        <p:nvSpPr>
+          <p:cNvPr id="25" name="Slide Number Placeholder 0"/>
+          <p:cNvSpPr>
+            <a:spLocks noGrp="1"/>
+          </p:cNvSpPr>
+          <p:nvPr>
+            <p:ph type="sldNum" sz="quarter" idx="4294967295"/>
+          </p:nvPr>
+        </p:nvSpPr>
+        <p:spPr>
+          <a:xfrm>
+            <a:off x="11292840" y="6556248"/>
+            <a:ext cx="548640" cy="256032"/>
+          </a:xfrm>
+          <a:prstGeom prst="rect">
+            <a:avLst/>
+          </a:prstGeom>
+          <a:extLst>
+            <a:ext uri="{C572A759-6A51-4108-AA02-DFA0A04FC94B}">
+              <ma14:wrappingTextBoxFlag xmlns:ma14="http://schemas.microsoft.com/office/mac/drawingml/2011/main" val="0"/>
+            </a:ext>
+          </a:extLst>
+        </p:spPr>
+        <p:txBody>
+          <a:bodyPr/>
+          <a:lstStyle>
+            <a:lvl1pPr>
+              <a:defRPr sz="900">
+                <a:solidFill>
+                  <a:srgbClr val="1B3A6B"/>
+                </a:solidFill>
+                <a:latin typeface="Arial"/>
+                <a:ea typeface="Arial"/>
+                <a:cs typeface="Arial"/>
+              </a:defRPr>
+            </a:lvl1pPr>
+          </a:lstStyle>
+          <a:p>
+            <a:pPr algn="r"/>
+            <a:fld id="{F7021451-1387-4CA6-816F-3879F97B5CBC}" type="slidenum">
+              <a:rPr b="1" lang="en-US"/>
+              <a:t>14</a:t>
+            </a:fld>
+            <a:endParaRPr lang="en-US"/>
           </a:p>
         </p:txBody>
       </p:sp>
@@ -7473,6 +7839,45 @@
         </p:nvSpPr>
         <p:spPr>
           <a:xfrm>
+            <a:off x="457200" y="548640"/>
+            <a:ext cx="3474720" cy="1737360"/>
+          </a:xfrm>
+          <a:prstGeom prst="rect">
+            <a:avLst/>
+          </a:prstGeom>
+          <a:noFill/>
+          <a:ln/>
+        </p:spPr>
+        <p:txBody>
+          <a:bodyPr wrap="square" rtlCol="0" anchor="ctr"/>
+          <a:lstStyle/>
+          <a:p>
+            <a:pPr indent="0" marL="0">
+              <a:buNone/>
+            </a:pPr>
+            <a:r>
+              <a:rPr lang="en-US" sz="11000" b="1" dirty="0">
+                <a:solidFill>
+                  <a:srgbClr val="11396F"/>
+                </a:solidFill>
+                <a:latin typeface="Arial" pitchFamily="34" charset="0"/>
+                <a:ea typeface="Arial" pitchFamily="34" charset="-122"/>
+                <a:cs typeface="Arial" pitchFamily="34" charset="-120"/>
+              </a:rPr>
+              <a:t>04</a:t>
+            </a:r>
+            <a:endParaRPr lang="en-US" sz="11000" dirty="0"/>
+          </a:p>
+        </p:txBody>
+      </p:sp>
+      <p:sp>
+        <p:nvSpPr>
+          <p:cNvPr id="4" name="Text 2"/>
+          <p:cNvSpPr/>
+          <p:nvPr/>
+        </p:nvSpPr>
+        <p:spPr>
+          <a:xfrm>
             <a:off x="548640" y="2194560"/>
             <a:ext cx="3291840" cy="548640"/>
           </a:xfrm>
@@ -7506,7 +7911,46 @@
       </p:sp>
       <p:sp>
         <p:nvSpPr>
-          <p:cNvPr id="4" name="Text 2"/>
+          <p:cNvPr id="5" name="Text 3"/>
+          <p:cNvSpPr/>
+          <p:nvPr/>
+        </p:nvSpPr>
+        <p:spPr>
+          <a:xfrm>
+            <a:off x="548640" y="3200400"/>
+            <a:ext cx="3383280" cy="457200"/>
+          </a:xfrm>
+          <a:prstGeom prst="rect">
+            <a:avLst/>
+          </a:prstGeom>
+          <a:noFill/>
+          <a:ln/>
+        </p:spPr>
+        <p:txBody>
+          <a:bodyPr wrap="square" rtlCol="0" anchor="ctr"/>
+          <a:lstStyle/>
+          <a:p>
+            <a:pPr indent="0" marL="0">
+              <a:buNone/>
+            </a:pPr>
+            <a:r>
+              <a:rPr lang="en-US" sz="1100" dirty="0">
+                <a:solidFill>
+                  <a:srgbClr val="C7D2E3"/>
+                </a:solidFill>
+                <a:latin typeface="Arial" pitchFamily="34" charset="0"/>
+                <a:ea typeface="Arial" pitchFamily="34" charset="-122"/>
+                <a:cs typeface="Arial" pitchFamily="34" charset="-120"/>
+              </a:rPr>
+              <a:t>M3 · Etapa 2 · Regulação e negócio</a:t>
+            </a:r>
+            <a:endParaRPr lang="en-US" sz="1100" dirty="0"/>
+          </a:p>
+        </p:txBody>
+      </p:sp>
+      <p:sp>
+        <p:nvSpPr>
+          <p:cNvPr id="6" name="Text 4"/>
           <p:cNvSpPr/>
           <p:nvPr/>
         </p:nvSpPr>
@@ -7545,7 +7989,7 @@
       </p:sp>
       <p:pic>
         <p:nvPicPr>
-          <p:cNvPr id="5" name="Image 0" descr="/www/wwwroot/rexar/gdsolar/docs/curso/slides/assets/logo-gdsolar.png">    </p:cNvPr>
+          <p:cNvPr id="7" name="Image 0" descr="/www/wwwroot/rexar/gdsolar/docs/curso/slides/assets/logo-gdsolar.png">    </p:cNvPr>
           <p:cNvPicPr>
             <a:picLocks noChangeAspect="1"/>
           </p:cNvPicPr>
@@ -7569,7 +8013,7 @@
       </p:pic>
       <p:sp>
         <p:nvSpPr>
-          <p:cNvPr id="6" name="Text 3"/>
+          <p:cNvPr id="8" name="Text 5"/>
           <p:cNvSpPr/>
           <p:nvPr/>
         </p:nvSpPr>
@@ -7610,7 +8054,7 @@
       </p:sp>
       <p:sp>
         <p:nvSpPr>
-          <p:cNvPr id="7" name="Text 4"/>
+          <p:cNvPr id="9" name="Text 6"/>
           <p:cNvSpPr/>
           <p:nvPr/>
         </p:nvSpPr>
@@ -7651,7 +8095,7 @@
       </p:sp>
       <p:sp>
         <p:nvSpPr>
-          <p:cNvPr id="8" name="Text 5"/>
+          <p:cNvPr id="10" name="Text 7"/>
           <p:cNvSpPr/>
           <p:nvPr/>
         </p:nvSpPr>
@@ -7893,7 +8337,7 @@
         </p:blipFill>
         <p:spPr>
           <a:xfrm>
-            <a:off x="411480" y="6547104"/>
+            <a:off x="548640" y="6547104"/>
             <a:ext cx="274320" cy="274320"/>
           </a:xfrm>
           <a:prstGeom prst="rect">
@@ -7909,7 +8353,7 @@
         </p:nvSpPr>
         <p:spPr>
           <a:xfrm>
-            <a:off x="749808" y="6528816"/>
+            <a:off x="886968" y="6528816"/>
             <a:ext cx="6400800" cy="310896"/>
           </a:xfrm>
           <a:prstGeom prst="rect">
@@ -7949,7 +8393,7 @@
         <p:spPr>
           <a:xfrm>
             <a:off x="7132320" y="6528816"/>
-            <a:ext cx="4663440" cy="310896"/>
+            <a:ext cx="4023360" cy="310896"/>
           </a:xfrm>
           <a:prstGeom prst="rect">
             <a:avLst/>
@@ -7987,7 +8431,7 @@
         </p:nvSpPr>
         <p:spPr>
           <a:xfrm>
-            <a:off x="411480" y="384048"/>
+            <a:off x="548640" y="384048"/>
             <a:ext cx="82296" cy="658368"/>
           </a:xfrm>
           <a:prstGeom prst="rect">
@@ -8007,7 +8451,7 @@
         </p:nvSpPr>
         <p:spPr>
           <a:xfrm>
-            <a:off x="640080" y="292608"/>
+            <a:off x="777240" y="292608"/>
             <a:ext cx="10972800" cy="274320"/>
           </a:xfrm>
           <a:prstGeom prst="rect">
@@ -8046,8 +8490,8 @@
         </p:nvSpPr>
         <p:spPr>
           <a:xfrm>
-            <a:off x="640080" y="530352"/>
-            <a:ext cx="11155680" cy="566928"/>
+            <a:off x="777240" y="530352"/>
+            <a:ext cx="10881360" cy="566928"/>
           </a:xfrm>
           <a:prstGeom prst="rect">
             <a:avLst/>
@@ -8087,8 +8531,8 @@
         </p:nvSpPr>
         <p:spPr>
           <a:xfrm>
-            <a:off x="411480" y="1325880"/>
-            <a:ext cx="5554980" cy="4937760"/>
+            <a:off x="548640" y="1325880"/>
+            <a:ext cx="5408676" cy="4937760"/>
           </a:xfrm>
           <a:prstGeom prst="roundRect">
             <a:avLst>
@@ -8121,8 +8565,8 @@
         </p:nvSpPr>
         <p:spPr>
           <a:xfrm>
-            <a:off x="411480" y="1325880"/>
-            <a:ext cx="5554980" cy="109728"/>
+            <a:off x="548640" y="1325880"/>
+            <a:ext cx="5408676" cy="109728"/>
           </a:xfrm>
           <a:prstGeom prst="rect">
             <a:avLst/>
@@ -8141,8 +8585,8 @@
         </p:nvSpPr>
         <p:spPr>
           <a:xfrm>
-            <a:off x="685800" y="1554480"/>
-            <a:ext cx="5006340" cy="685800"/>
+            <a:off x="822960" y="1554480"/>
+            <a:ext cx="4860036" cy="685800"/>
           </a:xfrm>
           <a:prstGeom prst="rect">
             <a:avLst/>
@@ -8182,8 +8626,8 @@
         </p:nvSpPr>
         <p:spPr>
           <a:xfrm>
-            <a:off x="685800" y="2286000"/>
-            <a:ext cx="5006340" cy="3749040"/>
+            <a:off x="822960" y="2286000"/>
+            <a:ext cx="4860036" cy="3749040"/>
           </a:xfrm>
           <a:prstGeom prst="rect">
             <a:avLst/>
@@ -8205,7 +8649,7 @@
               <a:buChar char="●"/>
             </a:pPr>
             <a:r>
-              <a:rPr lang="en-US" sz="1600" dirty="0">
+              <a:rPr lang="en-US" sz="1700" dirty="0">
                 <a:solidFill>
                   <a:srgbClr val="1F2937"/>
                 </a:solidFill>
@@ -8215,7 +8659,7 @@
               </a:rPr>
               <a:t>Valor do crédito (T): R$ 0,68/kWh (GD II, 2026, exemplo)</a:t>
             </a:r>
-            <a:endParaRPr lang="en-US" sz="1600" dirty="0"/>
+            <a:endParaRPr lang="en-US" sz="1700" dirty="0"/>
           </a:p>
           <a:p>
             <a:pPr marL="342900" indent="-342900">
@@ -8226,7 +8670,7 @@
               <a:buChar char="●"/>
             </a:pPr>
             <a:r>
-              <a:rPr lang="en-US" sz="1600" dirty="0">
+              <a:rPr lang="en-US" sz="1700" dirty="0">
                 <a:solidFill>
                   <a:srgbClr val="1F2937"/>
                 </a:solidFill>
@@ -8236,7 +8680,7 @@
               </a:rPr>
               <a:t>Desconto ao cliente (d): 20% de T</a:t>
             </a:r>
-            <a:endParaRPr lang="en-US" sz="1600" dirty="0"/>
+            <a:endParaRPr lang="en-US" sz="1700" dirty="0"/>
           </a:p>
           <a:p>
             <a:pPr marL="342900" indent="-342900">
@@ -8247,7 +8691,7 @@
               <a:buChar char="●"/>
             </a:pPr>
             <a:r>
-              <a:rPr lang="en-US" sz="1600" dirty="0">
+              <a:rPr lang="en-US" sz="1700" dirty="0">
                 <a:solidFill>
                   <a:srgbClr val="1F2937"/>
                 </a:solidFill>
@@ -8257,7 +8701,7 @@
               </a:rPr>
               <a:t>Taxa de administração (a): 15% de T</a:t>
             </a:r>
-            <a:endParaRPr lang="en-US" sz="1600" dirty="0"/>
+            <a:endParaRPr lang="en-US" sz="1700" dirty="0"/>
           </a:p>
         </p:txBody>
       </p:sp>
@@ -8269,8 +8713,8 @@
         </p:nvSpPr>
         <p:spPr>
           <a:xfrm>
-            <a:off x="6240780" y="1325880"/>
-            <a:ext cx="5554980" cy="4937760"/>
+            <a:off x="6231636" y="1325880"/>
+            <a:ext cx="5408676" cy="4937760"/>
           </a:xfrm>
           <a:prstGeom prst="roundRect">
             <a:avLst>
@@ -8303,8 +8747,8 @@
         </p:nvSpPr>
         <p:spPr>
           <a:xfrm>
-            <a:off x="6240780" y="1325880"/>
-            <a:ext cx="5554980" cy="109728"/>
+            <a:off x="6231636" y="1325880"/>
+            <a:ext cx="5408676" cy="109728"/>
           </a:xfrm>
           <a:prstGeom prst="rect">
             <a:avLst/>
@@ -8323,8 +8767,8 @@
         </p:nvSpPr>
         <p:spPr>
           <a:xfrm>
-            <a:off x="6515100" y="1554480"/>
-            <a:ext cx="5006340" cy="685800"/>
+            <a:off x="6505956" y="1554480"/>
+            <a:ext cx="4860036" cy="685800"/>
           </a:xfrm>
           <a:prstGeom prst="rect">
             <a:avLst/>
@@ -8364,8 +8808,8 @@
         </p:nvSpPr>
         <p:spPr>
           <a:xfrm>
-            <a:off x="6515100" y="2286000"/>
-            <a:ext cx="5006340" cy="3749040"/>
+            <a:off x="6505956" y="2286000"/>
+            <a:ext cx="4860036" cy="3749040"/>
           </a:xfrm>
           <a:prstGeom prst="rect">
             <a:avLst/>
@@ -8387,7 +8831,7 @@
               <a:buChar char="●"/>
             </a:pPr>
             <a:r>
-              <a:rPr lang="en-US" sz="1600" dirty="0">
+              <a:rPr lang="en-US" sz="1700" dirty="0">
                 <a:solidFill>
                   <a:srgbClr val="1F2937"/>
                 </a:solidFill>
@@ -8397,7 +8841,7 @@
               </a:rPr>
               <a:t>Cliente paga: 0,68 × (1 − 0,20) = R$ 0,544 → economiza R$ 0,136</a:t>
             </a:r>
-            <a:endParaRPr lang="en-US" sz="1600" dirty="0"/>
+            <a:endParaRPr lang="en-US" sz="1700" dirty="0"/>
           </a:p>
           <a:p>
             <a:pPr marL="342900" indent="-342900">
@@ -8408,7 +8852,7 @@
               <a:buChar char="●"/>
             </a:pPr>
             <a:r>
-              <a:rPr lang="en-US" sz="1600" dirty="0">
+              <a:rPr lang="en-US" sz="1700" dirty="0">
                 <a:solidFill>
                   <a:srgbClr val="1F2937"/>
                 </a:solidFill>
@@ -8418,7 +8862,7 @@
               </a:rPr>
               <a:t>Gestora: 0,68 × 0,15 = R$ 0,102</a:t>
             </a:r>
-            <a:endParaRPr lang="en-US" sz="1600" dirty="0"/>
+            <a:endParaRPr lang="en-US" sz="1700" dirty="0"/>
           </a:p>
           <a:p>
             <a:pPr marL="342900" indent="-342900">
@@ -8429,7 +8873,7 @@
               <a:buChar char="●"/>
             </a:pPr>
             <a:r>
-              <a:rPr lang="en-US" sz="1600" dirty="0">
+              <a:rPr lang="en-US" sz="1700" dirty="0">
                 <a:solidFill>
                   <a:srgbClr val="1F2937"/>
                 </a:solidFill>
@@ -8439,7 +8883,55 @@
               </a:rPr>
               <a:t>Produtor: 0,68 − 0,136 − 0,102 = R$ 0,442</a:t>
             </a:r>
-            <a:endParaRPr lang="en-US" sz="1600" dirty="0"/>
+            <a:endParaRPr lang="en-US" sz="1700" dirty="0"/>
+          </a:p>
+        </p:txBody>
+      </p:sp>
+      <p:sp>
+        <p:nvSpPr>
+          <p:cNvPr id="25" name="Slide Number Placeholder 0"/>
+          <p:cNvSpPr>
+            <a:spLocks noGrp="1"/>
+          </p:cNvSpPr>
+          <p:nvPr>
+            <p:ph type="sldNum" sz="quarter" idx="4294967295"/>
+          </p:nvPr>
+        </p:nvSpPr>
+        <p:spPr>
+          <a:xfrm>
+            <a:off x="11292840" y="6556248"/>
+            <a:ext cx="548640" cy="256032"/>
+          </a:xfrm>
+          <a:prstGeom prst="rect">
+            <a:avLst/>
+          </a:prstGeom>
+          <a:extLst>
+            <a:ext uri="{C572A759-6A51-4108-AA02-DFA0A04FC94B}">
+              <ma14:wrappingTextBoxFlag xmlns:ma14="http://schemas.microsoft.com/office/mac/drawingml/2011/main" val="0"/>
+            </a:ext>
+          </a:extLst>
+        </p:spPr>
+        <p:txBody>
+          <a:bodyPr/>
+          <a:lstStyle>
+            <a:lvl1pPr>
+              <a:defRPr sz="900">
+                <a:solidFill>
+                  <a:srgbClr val="1B3A6B"/>
+                </a:solidFill>
+                <a:latin typeface="Arial"/>
+                <a:ea typeface="Arial"/>
+                <a:cs typeface="Arial"/>
+              </a:defRPr>
+            </a:lvl1pPr>
+          </a:lstStyle>
+          <a:p>
+            <a:pPr algn="r"/>
+            <a:fld id="{F7021451-1387-4CA6-816F-3879F97B5CBC}" type="slidenum">
+              <a:rPr b="1" lang="en-US"/>
+              <a:t>16</a:t>
+            </a:fld>
+            <a:endParaRPr lang="en-US"/>
           </a:p>
         </p:txBody>
       </p:sp>
@@ -8516,7 +9008,7 @@
         </p:blipFill>
         <p:spPr>
           <a:xfrm>
-            <a:off x="411480" y="6547104"/>
+            <a:off x="548640" y="6547104"/>
             <a:ext cx="274320" cy="274320"/>
           </a:xfrm>
           <a:prstGeom prst="rect">
@@ -8532,7 +9024,7 @@
         </p:nvSpPr>
         <p:spPr>
           <a:xfrm>
-            <a:off x="749808" y="6528816"/>
+            <a:off x="886968" y="6528816"/>
             <a:ext cx="6400800" cy="310896"/>
           </a:xfrm>
           <a:prstGeom prst="rect">
@@ -8572,7 +9064,7 @@
         <p:spPr>
           <a:xfrm>
             <a:off x="7132320" y="6528816"/>
-            <a:ext cx="4663440" cy="310896"/>
+            <a:ext cx="4023360" cy="310896"/>
           </a:xfrm>
           <a:prstGeom prst="rect">
             <a:avLst/>
@@ -8610,7 +9102,7 @@
         </p:nvSpPr>
         <p:spPr>
           <a:xfrm>
-            <a:off x="411480" y="384048"/>
+            <a:off x="548640" y="384048"/>
             <a:ext cx="82296" cy="658368"/>
           </a:xfrm>
           <a:prstGeom prst="rect">
@@ -8630,7 +9122,7 @@
         </p:nvSpPr>
         <p:spPr>
           <a:xfrm>
-            <a:off x="640080" y="292608"/>
+            <a:off x="777240" y="292608"/>
             <a:ext cx="10972800" cy="274320"/>
           </a:xfrm>
           <a:prstGeom prst="rect">
@@ -8669,8 +9161,8 @@
         </p:nvSpPr>
         <p:spPr>
           <a:xfrm>
-            <a:off x="640080" y="530352"/>
-            <a:ext cx="11155680" cy="566928"/>
+            <a:off x="777240" y="530352"/>
+            <a:ext cx="10881360" cy="566928"/>
           </a:xfrm>
           <a:prstGeom prst="rect">
             <a:avLst/>
@@ -8710,8 +9202,8 @@
         </p:nvSpPr>
         <p:spPr>
           <a:xfrm>
-            <a:off x="411480" y="1325880"/>
-            <a:ext cx="11384280" cy="4937760"/>
+            <a:off x="548640" y="1325880"/>
+            <a:ext cx="11091672" cy="4937760"/>
           </a:xfrm>
           <a:prstGeom prst="roundRect">
             <a:avLst>
@@ -8732,8 +9224,8 @@
         </p:nvSpPr>
         <p:spPr>
           <a:xfrm>
-            <a:off x="777240" y="1554480"/>
-            <a:ext cx="10652760" cy="4480560"/>
+            <a:off x="914400" y="1554480"/>
+            <a:ext cx="10360152" cy="4480560"/>
           </a:xfrm>
           <a:prstGeom prst="rect">
             <a:avLst/>
@@ -8754,7 +9246,7 @@
               <a:buNone/>
             </a:pPr>
             <a:r>
-              <a:rPr lang="en-US" sz="1800" b="1" dirty="0">
+              <a:rPr lang="en-US" sz="2400" b="1" dirty="0">
                 <a:solidFill>
                   <a:srgbClr val="FFFFFF"/>
                 </a:solidFill>
@@ -8764,7 +9256,7 @@
               </a:rPr>
               <a:t>UFV Sol Nascente I: 60.000 kWh/mês</a:t>
             </a:r>
-            <a:endParaRPr lang="en-US" sz="1800" dirty="0"/>
+            <a:endParaRPr lang="en-US" sz="2400" dirty="0"/>
           </a:p>
           <a:p>
             <a:pPr indent="0" marL="0">
@@ -8774,7 +9266,7 @@
               <a:buNone/>
             </a:pPr>
             <a:r>
-              <a:rPr lang="en-US" sz="1800" dirty="0">
+              <a:rPr lang="en-US" sz="2400" dirty="0">
                 <a:solidFill>
                   <a:srgbClr val="FFFFFF"/>
                 </a:solidFill>
@@ -8784,7 +9276,7 @@
               </a:rPr>
               <a:t>Clientes pagam: 60.000 × 0,544 = R$ 32.640/mês</a:t>
             </a:r>
-            <a:endParaRPr lang="en-US" sz="1800" dirty="0"/>
+            <a:endParaRPr lang="en-US" sz="2400" dirty="0"/>
           </a:p>
           <a:p>
             <a:pPr indent="0" marL="0">
@@ -8794,7 +9286,7 @@
               <a:buNone/>
             </a:pPr>
             <a:r>
-              <a:rPr lang="en-US" sz="1800" dirty="0">
+              <a:rPr lang="en-US" sz="2400" dirty="0">
                 <a:solidFill>
                   <a:srgbClr val="FFFFFF"/>
                 </a:solidFill>
@@ -8804,7 +9296,7 @@
               </a:rPr>
               <a:t>Economia dos clientes: R$ 8.160/mês</a:t>
             </a:r>
-            <a:endParaRPr lang="en-US" sz="1800" dirty="0"/>
+            <a:endParaRPr lang="en-US" sz="2400" dirty="0"/>
           </a:p>
           <a:p>
             <a:pPr indent="0" marL="0">
@@ -8814,7 +9306,7 @@
               <a:buNone/>
             </a:pPr>
             <a:r>
-              <a:rPr lang="en-US" sz="1800" b="1" dirty="0">
+              <a:rPr lang="en-US" sz="2400" b="1" dirty="0">
                 <a:solidFill>
                   <a:srgbClr val="F7A23B"/>
                 </a:solidFill>
@@ -8824,7 +9316,55 @@
               </a:rPr>
               <a:t>Gestora: R$ 6.120/mês · Produtor: R$ 26.520/mês</a:t>
             </a:r>
-            <a:endParaRPr lang="en-US" sz="1800" dirty="0"/>
+            <a:endParaRPr lang="en-US" sz="2400" dirty="0"/>
+          </a:p>
+        </p:txBody>
+      </p:sp>
+      <p:sp>
+        <p:nvSpPr>
+          <p:cNvPr id="25" name="Slide Number Placeholder 0"/>
+          <p:cNvSpPr>
+            <a:spLocks noGrp="1"/>
+          </p:cNvSpPr>
+          <p:nvPr>
+            <p:ph type="sldNum" sz="quarter" idx="4294967295"/>
+          </p:nvPr>
+        </p:nvSpPr>
+        <p:spPr>
+          <a:xfrm>
+            <a:off x="11292840" y="6556248"/>
+            <a:ext cx="548640" cy="256032"/>
+          </a:xfrm>
+          <a:prstGeom prst="rect">
+            <a:avLst/>
+          </a:prstGeom>
+          <a:extLst>
+            <a:ext uri="{C572A759-6A51-4108-AA02-DFA0A04FC94B}">
+              <ma14:wrappingTextBoxFlag xmlns:ma14="http://schemas.microsoft.com/office/mac/drawingml/2011/main" val="0"/>
+            </a:ext>
+          </a:extLst>
+        </p:spPr>
+        <p:txBody>
+          <a:bodyPr/>
+          <a:lstStyle>
+            <a:lvl1pPr>
+              <a:defRPr sz="900">
+                <a:solidFill>
+                  <a:srgbClr val="1B3A6B"/>
+                </a:solidFill>
+                <a:latin typeface="Arial"/>
+                <a:ea typeface="Arial"/>
+                <a:cs typeface="Arial"/>
+              </a:defRPr>
+            </a:lvl1pPr>
+          </a:lstStyle>
+          <a:p>
+            <a:pPr algn="r"/>
+            <a:fld id="{F7021451-1387-4CA6-816F-3879F97B5CBC}" type="slidenum">
+              <a:rPr b="1" lang="en-US"/>
+              <a:t>17</a:t>
+            </a:fld>
+            <a:endParaRPr lang="en-US"/>
           </a:p>
         </p:txBody>
       </p:sp>
@@ -8901,7 +9441,7 @@
         </p:blipFill>
         <p:spPr>
           <a:xfrm>
-            <a:off x="411480" y="6547104"/>
+            <a:off x="548640" y="6547104"/>
             <a:ext cx="274320" cy="274320"/>
           </a:xfrm>
           <a:prstGeom prst="rect">
@@ -8917,7 +9457,7 @@
         </p:nvSpPr>
         <p:spPr>
           <a:xfrm>
-            <a:off x="749808" y="6528816"/>
+            <a:off x="886968" y="6528816"/>
             <a:ext cx="6400800" cy="310896"/>
           </a:xfrm>
           <a:prstGeom prst="rect">
@@ -8957,7 +9497,7 @@
         <p:spPr>
           <a:xfrm>
             <a:off x="7132320" y="6528816"/>
-            <a:ext cx="4663440" cy="310896"/>
+            <a:ext cx="4023360" cy="310896"/>
           </a:xfrm>
           <a:prstGeom prst="rect">
             <a:avLst/>
@@ -8995,7 +9535,7 @@
         </p:nvSpPr>
         <p:spPr>
           <a:xfrm>
-            <a:off x="411480" y="384048"/>
+            <a:off x="548640" y="384048"/>
             <a:ext cx="82296" cy="658368"/>
           </a:xfrm>
           <a:prstGeom prst="rect">
@@ -9015,7 +9555,7 @@
         </p:nvSpPr>
         <p:spPr>
           <a:xfrm>
-            <a:off x="640080" y="292608"/>
+            <a:off x="777240" y="292608"/>
             <a:ext cx="10972800" cy="274320"/>
           </a:xfrm>
           <a:prstGeom prst="rect">
@@ -9054,8 +9594,8 @@
         </p:nvSpPr>
         <p:spPr>
           <a:xfrm>
-            <a:off x="640080" y="530352"/>
-            <a:ext cx="11155680" cy="566928"/>
+            <a:off x="777240" y="530352"/>
+            <a:ext cx="10881360" cy="566928"/>
           </a:xfrm>
           <a:prstGeom prst="rect">
             <a:avLst/>
@@ -9095,8 +9635,8 @@
         </p:nvSpPr>
         <p:spPr>
           <a:xfrm>
-            <a:off x="411480" y="1325880"/>
-            <a:ext cx="11384280" cy="4937760"/>
+            <a:off x="548640" y="1325880"/>
+            <a:ext cx="11091672" cy="4937760"/>
           </a:xfrm>
           <a:prstGeom prst="roundRect">
             <a:avLst>
@@ -9117,8 +9657,8 @@
         </p:nvSpPr>
         <p:spPr>
           <a:xfrm>
-            <a:off x="777240" y="1554480"/>
-            <a:ext cx="10652760" cy="4480560"/>
+            <a:off x="914400" y="1554480"/>
+            <a:ext cx="10360152" cy="4480560"/>
           </a:xfrm>
           <a:prstGeom prst="rect">
             <a:avLst/>
@@ -9139,7 +9679,7 @@
               <a:buNone/>
             </a:pPr>
             <a:r>
-              <a:rPr lang="en-US" sz="1800" b="1" dirty="0">
+              <a:rPr lang="en-US" sz="2400" b="1" dirty="0">
                 <a:solidFill>
                   <a:srgbClr val="FFFFFF"/>
                 </a:solidFill>
@@ -9149,7 +9689,7 @@
               </a:rPr>
               <a:t>Investimento (ex.): 500 kWp × R$ 3,50/Wp ≈ R$ 1,75 milhão</a:t>
             </a:r>
-            <a:endParaRPr lang="en-US" sz="1800" dirty="0"/>
+            <a:endParaRPr lang="en-US" sz="2400" dirty="0"/>
           </a:p>
           <a:p>
             <a:pPr indent="0" marL="0">
@@ -9159,7 +9699,7 @@
               <a:buNone/>
             </a:pPr>
             <a:r>
-              <a:rPr lang="en-US" sz="1800" dirty="0">
+              <a:rPr lang="en-US" sz="2400" dirty="0">
                 <a:solidFill>
                   <a:srgbClr val="FFFFFF"/>
                 </a:solidFill>
@@ -9169,7 +9709,7 @@
               </a:rPr>
               <a:t>Receita: ~R$ 318 mil/ano − O&amp;M e seguro (~R$ 25 mil/ano)</a:t>
             </a:r>
-            <a:endParaRPr lang="en-US" sz="1800" dirty="0"/>
+            <a:endParaRPr lang="en-US" sz="2400" dirty="0"/>
           </a:p>
           <a:p>
             <a:pPr indent="0" marL="0">
@@ -9179,7 +9719,7 @@
               <a:buNone/>
             </a:pPr>
             <a:r>
-              <a:rPr lang="en-US" sz="1800" b="1" dirty="0">
+              <a:rPr lang="en-US" sz="2400" b="1" dirty="0">
                 <a:solidFill>
                   <a:srgbClr val="F7A23B"/>
                 </a:solidFill>
@@ -9189,7 +9729,55 @@
               </a:rPr>
               <a:t>Retorno simples ≈ 6 anos</a:t>
             </a:r>
-            <a:endParaRPr lang="en-US" sz="1800" dirty="0"/>
+            <a:endParaRPr lang="en-US" sz="2400" dirty="0"/>
+          </a:p>
+        </p:txBody>
+      </p:sp>
+      <p:sp>
+        <p:nvSpPr>
+          <p:cNvPr id="25" name="Slide Number Placeholder 0"/>
+          <p:cNvSpPr>
+            <a:spLocks noGrp="1"/>
+          </p:cNvSpPr>
+          <p:nvPr>
+            <p:ph type="sldNum" sz="quarter" idx="4294967295"/>
+          </p:nvPr>
+        </p:nvSpPr>
+        <p:spPr>
+          <a:xfrm>
+            <a:off x="11292840" y="6556248"/>
+            <a:ext cx="548640" cy="256032"/>
+          </a:xfrm>
+          <a:prstGeom prst="rect">
+            <a:avLst/>
+          </a:prstGeom>
+          <a:extLst>
+            <a:ext uri="{C572A759-6A51-4108-AA02-DFA0A04FC94B}">
+              <ma14:wrappingTextBoxFlag xmlns:ma14="http://schemas.microsoft.com/office/mac/drawingml/2011/main" val="0"/>
+            </a:ext>
+          </a:extLst>
+        </p:spPr>
+        <p:txBody>
+          <a:bodyPr/>
+          <a:lstStyle>
+            <a:lvl1pPr>
+              <a:defRPr sz="900">
+                <a:solidFill>
+                  <a:srgbClr val="1B3A6B"/>
+                </a:solidFill>
+                <a:latin typeface="Arial"/>
+                <a:ea typeface="Arial"/>
+                <a:cs typeface="Arial"/>
+              </a:defRPr>
+            </a:lvl1pPr>
+          </a:lstStyle>
+          <a:p>
+            <a:pPr algn="r"/>
+            <a:fld id="{F7021451-1387-4CA6-816F-3879F97B5CBC}" type="slidenum">
+              <a:rPr b="1" lang="en-US"/>
+              <a:t>18</a:t>
+            </a:fld>
+            <a:endParaRPr lang="en-US"/>
           </a:p>
         </p:txBody>
       </p:sp>
@@ -9266,7 +9854,7 @@
         </p:blipFill>
         <p:spPr>
           <a:xfrm>
-            <a:off x="411480" y="6547104"/>
+            <a:off x="548640" y="6547104"/>
             <a:ext cx="274320" cy="274320"/>
           </a:xfrm>
           <a:prstGeom prst="rect">
@@ -9282,7 +9870,7 @@
         </p:nvSpPr>
         <p:spPr>
           <a:xfrm>
-            <a:off x="749808" y="6528816"/>
+            <a:off x="886968" y="6528816"/>
             <a:ext cx="6400800" cy="310896"/>
           </a:xfrm>
           <a:prstGeom prst="rect">
@@ -9322,7 +9910,7 @@
         <p:spPr>
           <a:xfrm>
             <a:off x="7132320" y="6528816"/>
-            <a:ext cx="4663440" cy="310896"/>
+            <a:ext cx="4023360" cy="310896"/>
           </a:xfrm>
           <a:prstGeom prst="rect">
             <a:avLst/>
@@ -9360,7 +9948,7 @@
         </p:nvSpPr>
         <p:spPr>
           <a:xfrm>
-            <a:off x="411480" y="384048"/>
+            <a:off x="548640" y="384048"/>
             <a:ext cx="82296" cy="658368"/>
           </a:xfrm>
           <a:prstGeom prst="rect">
@@ -9380,7 +9968,7 @@
         </p:nvSpPr>
         <p:spPr>
           <a:xfrm>
-            <a:off x="640080" y="292608"/>
+            <a:off x="777240" y="292608"/>
             <a:ext cx="10972800" cy="274320"/>
           </a:xfrm>
           <a:prstGeom prst="rect">
@@ -9419,8 +10007,8 @@
         </p:nvSpPr>
         <p:spPr>
           <a:xfrm>
-            <a:off x="640080" y="530352"/>
-            <a:ext cx="11155680" cy="566928"/>
+            <a:off x="777240" y="530352"/>
+            <a:ext cx="10881360" cy="566928"/>
           </a:xfrm>
           <a:prstGeom prst="rect">
             <a:avLst/>
@@ -9460,8 +10048,8 @@
         </p:nvSpPr>
         <p:spPr>
           <a:xfrm>
-            <a:off x="411480" y="1325880"/>
-            <a:ext cx="11384280" cy="4937760"/>
+            <a:off x="548640" y="1325880"/>
+            <a:ext cx="11091672" cy="4937760"/>
           </a:xfrm>
           <a:prstGeom prst="roundRect">
             <a:avLst>
@@ -9482,8 +10070,8 @@
         </p:nvSpPr>
         <p:spPr>
           <a:xfrm>
-            <a:off x="777240" y="1554480"/>
-            <a:ext cx="10652760" cy="4480560"/>
+            <a:off x="914400" y="1554480"/>
+            <a:ext cx="10360152" cy="4480560"/>
           </a:xfrm>
           <a:prstGeom prst="rect">
             <a:avLst/>
@@ -9504,7 +10092,7 @@
               <a:buNone/>
             </a:pPr>
             <a:r>
-              <a:rPr lang="en-US" sz="1800" b="1" dirty="0">
+              <a:rPr lang="en-US" sz="2400" b="1" dirty="0">
                 <a:solidFill>
                   <a:srgbClr val="FFFFFF"/>
                 </a:solidFill>
@@ -9514,7 +10102,7 @@
               </a:rPr>
               <a:t>Antes: 2.500 kWh × R$ 1,04 = R$ 2.600</a:t>
             </a:r>
-            <a:endParaRPr lang="en-US" sz="1800" dirty="0"/>
+            <a:endParaRPr lang="en-US" sz="2400" dirty="0"/>
           </a:p>
           <a:p>
             <a:pPr indent="0" marL="0">
@@ -9524,7 +10112,7 @@
               <a:buNone/>
             </a:pPr>
             <a:r>
-              <a:rPr lang="en-US" sz="1800" dirty="0">
+              <a:rPr lang="en-US" sz="2400" dirty="0">
                 <a:solidFill>
                   <a:srgbClr val="FFFFFF"/>
                 </a:solidFill>
@@ -9534,7 +10122,7 @@
               </a:rPr>
               <a:t>Depois: distribuidora ≈ R$ 478 (mínimo + Fio B não compensado) + sua cobrança ≈ R$ 1.695</a:t>
             </a:r>
-            <a:endParaRPr lang="en-US" sz="1800" dirty="0"/>
+            <a:endParaRPr lang="en-US" sz="2400" dirty="0"/>
           </a:p>
           <a:p>
             <a:pPr indent="0" marL="0">
@@ -9544,7 +10132,7 @@
               <a:buNone/>
             </a:pPr>
             <a:r>
-              <a:rPr lang="en-US" sz="1800" b="1" dirty="0">
+              <a:rPr lang="en-US" sz="2400" b="1" dirty="0">
                 <a:solidFill>
                   <a:srgbClr val="F7A23B"/>
                 </a:solidFill>
@@ -9554,7 +10142,55 @@
               </a:rPr>
               <a:t>Total ≈ R$ 2.173 → economia ≈ R$ 427 (≈ 16%)</a:t>
             </a:r>
-            <a:endParaRPr lang="en-US" sz="1800" dirty="0"/>
+            <a:endParaRPr lang="en-US" sz="2400" dirty="0"/>
+          </a:p>
+        </p:txBody>
+      </p:sp>
+      <p:sp>
+        <p:nvSpPr>
+          <p:cNvPr id="25" name="Slide Number Placeholder 0"/>
+          <p:cNvSpPr>
+            <a:spLocks noGrp="1"/>
+          </p:cNvSpPr>
+          <p:nvPr>
+            <p:ph type="sldNum" sz="quarter" idx="4294967295"/>
+          </p:nvPr>
+        </p:nvSpPr>
+        <p:spPr>
+          <a:xfrm>
+            <a:off x="11292840" y="6556248"/>
+            <a:ext cx="548640" cy="256032"/>
+          </a:xfrm>
+          <a:prstGeom prst="rect">
+            <a:avLst/>
+          </a:prstGeom>
+          <a:extLst>
+            <a:ext uri="{C572A759-6A51-4108-AA02-DFA0A04FC94B}">
+              <ma14:wrappingTextBoxFlag xmlns:ma14="http://schemas.microsoft.com/office/mac/drawingml/2011/main" val="0"/>
+            </a:ext>
+          </a:extLst>
+        </p:spPr>
+        <p:txBody>
+          <a:bodyPr/>
+          <a:lstStyle>
+            <a:lvl1pPr>
+              <a:defRPr sz="900">
+                <a:solidFill>
+                  <a:srgbClr val="1B3A6B"/>
+                </a:solidFill>
+                <a:latin typeface="Arial"/>
+                <a:ea typeface="Arial"/>
+                <a:cs typeface="Arial"/>
+              </a:defRPr>
+            </a:lvl1pPr>
+          </a:lstStyle>
+          <a:p>
+            <a:pPr algn="r"/>
+            <a:fld id="{F7021451-1387-4CA6-816F-3879F97B5CBC}" type="slidenum">
+              <a:rPr b="1" lang="en-US"/>
+              <a:t>19</a:t>
+            </a:fld>
+            <a:endParaRPr lang="en-US"/>
           </a:p>
         </p:txBody>
       </p:sp>
@@ -9618,6 +10254,45 @@
         </p:nvSpPr>
         <p:spPr>
           <a:xfrm>
+            <a:off x="457200" y="548640"/>
+            <a:ext cx="3474720" cy="1737360"/>
+          </a:xfrm>
+          <a:prstGeom prst="rect">
+            <a:avLst/>
+          </a:prstGeom>
+          <a:noFill/>
+          <a:ln/>
+        </p:spPr>
+        <p:txBody>
+          <a:bodyPr wrap="square" rtlCol="0" anchor="ctr"/>
+          <a:lstStyle/>
+          <a:p>
+            <a:pPr indent="0" marL="0">
+              <a:buNone/>
+            </a:pPr>
+            <a:r>
+              <a:rPr lang="en-US" sz="11000" b="1" dirty="0">
+                <a:solidFill>
+                  <a:srgbClr val="11396F"/>
+                </a:solidFill>
+                <a:latin typeface="Arial" pitchFamily="34" charset="0"/>
+                <a:ea typeface="Arial" pitchFamily="34" charset="-122"/>
+                <a:cs typeface="Arial" pitchFamily="34" charset="-120"/>
+              </a:rPr>
+              <a:t>01</a:t>
+            </a:r>
+            <a:endParaRPr lang="en-US" sz="11000" dirty="0"/>
+          </a:p>
+        </p:txBody>
+      </p:sp>
+      <p:sp>
+        <p:nvSpPr>
+          <p:cNvPr id="4" name="Text 2"/>
+          <p:cNvSpPr/>
+          <p:nvPr/>
+        </p:nvSpPr>
+        <p:spPr>
+          <a:xfrm>
             <a:off x="548640" y="2194560"/>
             <a:ext cx="3291840" cy="548640"/>
           </a:xfrm>
@@ -9651,7 +10326,46 @@
       </p:sp>
       <p:sp>
         <p:nvSpPr>
-          <p:cNvPr id="4" name="Text 2"/>
+          <p:cNvPr id="5" name="Text 3"/>
+          <p:cNvSpPr/>
+          <p:nvPr/>
+        </p:nvSpPr>
+        <p:spPr>
+          <a:xfrm>
+            <a:off x="548640" y="3200400"/>
+            <a:ext cx="3383280" cy="457200"/>
+          </a:xfrm>
+          <a:prstGeom prst="rect">
+            <a:avLst/>
+          </a:prstGeom>
+          <a:noFill/>
+          <a:ln/>
+        </p:spPr>
+        <p:txBody>
+          <a:bodyPr wrap="square" rtlCol="0" anchor="ctr"/>
+          <a:lstStyle/>
+          <a:p>
+            <a:pPr indent="0" marL="0">
+              <a:buNone/>
+            </a:pPr>
+            <a:r>
+              <a:rPr lang="en-US" sz="1100" dirty="0">
+                <a:solidFill>
+                  <a:srgbClr val="C7D2E3"/>
+                </a:solidFill>
+                <a:latin typeface="Arial" pitchFamily="34" charset="0"/>
+                <a:ea typeface="Arial" pitchFamily="34" charset="-122"/>
+                <a:cs typeface="Arial" pitchFamily="34" charset="-120"/>
+              </a:rPr>
+              <a:t>M3 · Etapa 2 · Regulação e negócio</a:t>
+            </a:r>
+            <a:endParaRPr lang="en-US" sz="1100" dirty="0"/>
+          </a:p>
+        </p:txBody>
+      </p:sp>
+      <p:sp>
+        <p:nvSpPr>
+          <p:cNvPr id="6" name="Text 4"/>
           <p:cNvSpPr/>
           <p:nvPr/>
         </p:nvSpPr>
@@ -9690,7 +10404,7 @@
       </p:sp>
       <p:pic>
         <p:nvPicPr>
-          <p:cNvPr id="5" name="Image 0" descr="/www/wwwroot/rexar/gdsolar/docs/curso/slides/assets/logo-gdsolar.png">    </p:cNvPr>
+          <p:cNvPr id="7" name="Image 0" descr="/www/wwwroot/rexar/gdsolar/docs/curso/slides/assets/logo-gdsolar.png">    </p:cNvPr>
           <p:cNvPicPr>
             <a:picLocks noChangeAspect="1"/>
           </p:cNvPicPr>
@@ -9714,7 +10428,7 @@
       </p:pic>
       <p:sp>
         <p:nvSpPr>
-          <p:cNvPr id="6" name="Text 3"/>
+          <p:cNvPr id="8" name="Text 5"/>
           <p:cNvSpPr/>
           <p:nvPr/>
         </p:nvSpPr>
@@ -9755,7 +10469,7 @@
       </p:sp>
       <p:sp>
         <p:nvSpPr>
-          <p:cNvPr id="7" name="Text 4"/>
+          <p:cNvPr id="9" name="Text 6"/>
           <p:cNvSpPr/>
           <p:nvPr/>
         </p:nvSpPr>
@@ -9796,7 +10510,7 @@
       </p:sp>
       <p:sp>
         <p:nvSpPr>
-          <p:cNvPr id="8" name="Text 5"/>
+          <p:cNvPr id="10" name="Text 7"/>
           <p:cNvSpPr/>
           <p:nvPr/>
         </p:nvSpPr>
@@ -9996,7 +10710,7 @@
         </p:blipFill>
         <p:spPr>
           <a:xfrm>
-            <a:off x="411480" y="6547104"/>
+            <a:off x="548640" y="6547104"/>
             <a:ext cx="274320" cy="274320"/>
           </a:xfrm>
           <a:prstGeom prst="rect">
@@ -10012,7 +10726,7 @@
         </p:nvSpPr>
         <p:spPr>
           <a:xfrm>
-            <a:off x="749808" y="6528816"/>
+            <a:off x="886968" y="6528816"/>
             <a:ext cx="6400800" cy="310896"/>
           </a:xfrm>
           <a:prstGeom prst="rect">
@@ -10052,7 +10766,7 @@
         <p:spPr>
           <a:xfrm>
             <a:off x="7132320" y="6528816"/>
-            <a:ext cx="4663440" cy="310896"/>
+            <a:ext cx="4023360" cy="310896"/>
           </a:xfrm>
           <a:prstGeom prst="rect">
             <a:avLst/>
@@ -10090,7 +10804,7 @@
         </p:nvSpPr>
         <p:spPr>
           <a:xfrm>
-            <a:off x="411480" y="384048"/>
+            <a:off x="548640" y="384048"/>
             <a:ext cx="82296" cy="658368"/>
           </a:xfrm>
           <a:prstGeom prst="rect">
@@ -10110,7 +10824,7 @@
         </p:nvSpPr>
         <p:spPr>
           <a:xfrm>
-            <a:off x="640080" y="292608"/>
+            <a:off x="777240" y="292608"/>
             <a:ext cx="10972800" cy="274320"/>
           </a:xfrm>
           <a:prstGeom prst="rect">
@@ -10149,8 +10863,8 @@
         </p:nvSpPr>
         <p:spPr>
           <a:xfrm>
-            <a:off x="640080" y="530352"/>
-            <a:ext cx="11155680" cy="566928"/>
+            <a:off x="777240" y="530352"/>
+            <a:ext cx="10881360" cy="566928"/>
           </a:xfrm>
           <a:prstGeom prst="rect">
             <a:avLst/>
@@ -10190,8 +10904,8 @@
         </p:nvSpPr>
         <p:spPr>
           <a:xfrm>
-            <a:off x="411480" y="1325880"/>
-            <a:ext cx="11384280" cy="4892040"/>
+            <a:off x="548640" y="1325880"/>
+            <a:ext cx="11091672" cy="4892040"/>
           </a:xfrm>
           <a:prstGeom prst="roundRect">
             <a:avLst>
@@ -10224,7 +10938,7 @@
         </p:nvSpPr>
         <p:spPr>
           <a:xfrm>
-            <a:off x="594360" y="1508760"/>
+            <a:off x="731520" y="1508760"/>
             <a:ext cx="457200" cy="457200"/>
           </a:xfrm>
           <a:prstGeom prst="ellipse">
@@ -10244,7 +10958,7 @@
         </p:nvSpPr>
         <p:spPr>
           <a:xfrm>
-            <a:off x="594360" y="1508760"/>
+            <a:off x="731520" y="1508760"/>
             <a:ext cx="457200" cy="457200"/>
           </a:xfrm>
           <a:prstGeom prst="rect">
@@ -10283,8 +10997,8 @@
         </p:nvSpPr>
         <p:spPr>
           <a:xfrm>
-            <a:off x="1188720" y="1435608"/>
-            <a:ext cx="10469880" cy="4672584"/>
+            <a:off x="1325880" y="1435608"/>
+            <a:ext cx="10177272" cy="4672584"/>
           </a:xfrm>
           <a:prstGeom prst="rect">
             <a:avLst/>
@@ -10313,6 +11027,54 @@
               <a:t>Margem de contribuição por usina ≈ R$ 4.000/mês (≈ R$ 0,067/kWh)</a:t>
             </a:r>
             <a:endParaRPr lang="en-US" sz="1800" dirty="0"/>
+          </a:p>
+        </p:txBody>
+      </p:sp>
+      <p:sp>
+        <p:nvSpPr>
+          <p:cNvPr id="25" name="Slide Number Placeholder 0"/>
+          <p:cNvSpPr>
+            <a:spLocks noGrp="1"/>
+          </p:cNvSpPr>
+          <p:nvPr>
+            <p:ph type="sldNum" sz="quarter" idx="4294967295"/>
+          </p:nvPr>
+        </p:nvSpPr>
+        <p:spPr>
+          <a:xfrm>
+            <a:off x="11292840" y="6556248"/>
+            <a:ext cx="548640" cy="256032"/>
+          </a:xfrm>
+          <a:prstGeom prst="rect">
+            <a:avLst/>
+          </a:prstGeom>
+          <a:extLst>
+            <a:ext uri="{C572A759-6A51-4108-AA02-DFA0A04FC94B}">
+              <ma14:wrappingTextBoxFlag xmlns:ma14="http://schemas.microsoft.com/office/mac/drawingml/2011/main" val="0"/>
+            </a:ext>
+          </a:extLst>
+        </p:spPr>
+        <p:txBody>
+          <a:bodyPr/>
+          <a:lstStyle>
+            <a:lvl1pPr>
+              <a:defRPr sz="900">
+                <a:solidFill>
+                  <a:srgbClr val="1B3A6B"/>
+                </a:solidFill>
+                <a:latin typeface="Arial"/>
+                <a:ea typeface="Arial"/>
+                <a:cs typeface="Arial"/>
+              </a:defRPr>
+            </a:lvl1pPr>
+          </a:lstStyle>
+          <a:p>
+            <a:pPr algn="r"/>
+            <a:fld id="{F7021451-1387-4CA6-816F-3879F97B5CBC}" type="slidenum">
+              <a:rPr b="1" lang="en-US"/>
+              <a:t>20</a:t>
+            </a:fld>
+            <a:endParaRPr lang="en-US"/>
           </a:p>
         </p:txBody>
       </p:sp>
@@ -10389,7 +11151,7 @@
         </p:blipFill>
         <p:spPr>
           <a:xfrm>
-            <a:off x="411480" y="6547104"/>
+            <a:off x="548640" y="6547104"/>
             <a:ext cx="274320" cy="274320"/>
           </a:xfrm>
           <a:prstGeom prst="rect">
@@ -10405,7 +11167,7 @@
         </p:nvSpPr>
         <p:spPr>
           <a:xfrm>
-            <a:off x="749808" y="6528816"/>
+            <a:off x="886968" y="6528816"/>
             <a:ext cx="6400800" cy="310896"/>
           </a:xfrm>
           <a:prstGeom prst="rect">
@@ -10445,7 +11207,7 @@
         <p:spPr>
           <a:xfrm>
             <a:off x="7132320" y="6528816"/>
-            <a:ext cx="4663440" cy="310896"/>
+            <a:ext cx="4023360" cy="310896"/>
           </a:xfrm>
           <a:prstGeom prst="rect">
             <a:avLst/>
@@ -10483,7 +11245,7 @@
         </p:nvSpPr>
         <p:spPr>
           <a:xfrm>
-            <a:off x="411480" y="384048"/>
+            <a:off x="548640" y="384048"/>
             <a:ext cx="82296" cy="658368"/>
           </a:xfrm>
           <a:prstGeom prst="rect">
@@ -10503,7 +11265,7 @@
         </p:nvSpPr>
         <p:spPr>
           <a:xfrm>
-            <a:off x="640080" y="292608"/>
+            <a:off x="777240" y="292608"/>
             <a:ext cx="10972800" cy="274320"/>
           </a:xfrm>
           <a:prstGeom prst="rect">
@@ -10542,8 +11304,8 @@
         </p:nvSpPr>
         <p:spPr>
           <a:xfrm>
-            <a:off x="640080" y="530352"/>
-            <a:ext cx="11155680" cy="566928"/>
+            <a:off x="777240" y="530352"/>
+            <a:ext cx="10881360" cy="566928"/>
           </a:xfrm>
           <a:prstGeom prst="rect">
             <a:avLst/>
@@ -10583,8 +11345,8 @@
         </p:nvSpPr>
         <p:spPr>
           <a:xfrm>
-            <a:off x="411480" y="1325880"/>
-            <a:ext cx="11384280" cy="4937760"/>
+            <a:off x="548640" y="1325880"/>
+            <a:ext cx="11091672" cy="4937760"/>
           </a:xfrm>
           <a:prstGeom prst="roundRect">
             <a:avLst>
@@ -10605,8 +11367,8 @@
         </p:nvSpPr>
         <p:spPr>
           <a:xfrm>
-            <a:off x="777240" y="1554480"/>
-            <a:ext cx="10652760" cy="4480560"/>
+            <a:off x="914400" y="1554480"/>
+            <a:ext cx="10360152" cy="4480560"/>
           </a:xfrm>
           <a:prstGeom prst="rect">
             <a:avLst/>
@@ -10627,7 +11389,7 @@
               <a:buNone/>
             </a:pPr>
             <a:r>
-              <a:rPr lang="en-US" sz="1600" b="1" dirty="0">
+              <a:rPr lang="en-US" sz="2400" b="1" dirty="0">
                 <a:solidFill>
                   <a:srgbClr val="FFFFFF"/>
                 </a:solidFill>
@@ -10637,7 +11399,7 @@
               </a:rPr>
               <a:t>Custos fixos (ex.): R$ 18.000/mês (operação, comercial fixo, plataforma, contador, jurídico, escritório)</a:t>
             </a:r>
-            <a:endParaRPr lang="en-US" sz="1600" dirty="0"/>
+            <a:endParaRPr lang="en-US" sz="2400" dirty="0"/>
           </a:p>
           <a:p>
             <a:pPr indent="0" marL="0">
@@ -10647,7 +11409,7 @@
               <a:buNone/>
             </a:pPr>
             <a:r>
-              <a:rPr lang="en-US" sz="1600" b="1" dirty="0">
+              <a:rPr lang="en-US" sz="2400" b="1" dirty="0">
                 <a:solidFill>
                   <a:srgbClr val="F7A23B"/>
                 </a:solidFill>
@@ -10657,7 +11419,55 @@
               </a:rPr>
               <a:t>Ponto de equilíbrio = 18.000 ÷ 0,067 ≈ 270.000 kWh/mês ≈ 4,5 usinas ≈ 540 clientes de 500 kWh</a:t>
             </a:r>
-            <a:endParaRPr lang="en-US" sz="1600" dirty="0"/>
+            <a:endParaRPr lang="en-US" sz="2400" dirty="0"/>
+          </a:p>
+        </p:txBody>
+      </p:sp>
+      <p:sp>
+        <p:nvSpPr>
+          <p:cNvPr id="25" name="Slide Number Placeholder 0"/>
+          <p:cNvSpPr>
+            <a:spLocks noGrp="1"/>
+          </p:cNvSpPr>
+          <p:nvPr>
+            <p:ph type="sldNum" sz="quarter" idx="4294967295"/>
+          </p:nvPr>
+        </p:nvSpPr>
+        <p:spPr>
+          <a:xfrm>
+            <a:off x="11292840" y="6556248"/>
+            <a:ext cx="548640" cy="256032"/>
+          </a:xfrm>
+          <a:prstGeom prst="rect">
+            <a:avLst/>
+          </a:prstGeom>
+          <a:extLst>
+            <a:ext uri="{C572A759-6A51-4108-AA02-DFA0A04FC94B}">
+              <ma14:wrappingTextBoxFlag xmlns:ma14="http://schemas.microsoft.com/office/mac/drawingml/2011/main" val="0"/>
+            </a:ext>
+          </a:extLst>
+        </p:spPr>
+        <p:txBody>
+          <a:bodyPr/>
+          <a:lstStyle>
+            <a:lvl1pPr>
+              <a:defRPr sz="900">
+                <a:solidFill>
+                  <a:srgbClr val="1B3A6B"/>
+                </a:solidFill>
+                <a:latin typeface="Arial"/>
+                <a:ea typeface="Arial"/>
+                <a:cs typeface="Arial"/>
+              </a:defRPr>
+            </a:lvl1pPr>
+          </a:lstStyle>
+          <a:p>
+            <a:pPr algn="r"/>
+            <a:fld id="{F7021451-1387-4CA6-816F-3879F97B5CBC}" type="slidenum">
+              <a:rPr b="1" lang="en-US"/>
+              <a:t>21</a:t>
+            </a:fld>
+            <a:endParaRPr lang="en-US"/>
           </a:p>
         </p:txBody>
       </p:sp>
@@ -10734,7 +11544,7 @@
         </p:blipFill>
         <p:spPr>
           <a:xfrm>
-            <a:off x="411480" y="6547104"/>
+            <a:off x="548640" y="6547104"/>
             <a:ext cx="274320" cy="274320"/>
           </a:xfrm>
           <a:prstGeom prst="rect">
@@ -10750,7 +11560,7 @@
         </p:nvSpPr>
         <p:spPr>
           <a:xfrm>
-            <a:off x="749808" y="6528816"/>
+            <a:off x="886968" y="6528816"/>
             <a:ext cx="6400800" cy="310896"/>
           </a:xfrm>
           <a:prstGeom prst="rect">
@@ -10790,7 +11600,7 @@
         <p:spPr>
           <a:xfrm>
             <a:off x="7132320" y="6528816"/>
-            <a:ext cx="4663440" cy="310896"/>
+            <a:ext cx="4023360" cy="310896"/>
           </a:xfrm>
           <a:prstGeom prst="rect">
             <a:avLst/>
@@ -10828,7 +11638,7 @@
         </p:nvSpPr>
         <p:spPr>
           <a:xfrm>
-            <a:off x="411480" y="384048"/>
+            <a:off x="548640" y="384048"/>
             <a:ext cx="82296" cy="658368"/>
           </a:xfrm>
           <a:prstGeom prst="rect">
@@ -10848,7 +11658,7 @@
         </p:nvSpPr>
         <p:spPr>
           <a:xfrm>
-            <a:off x="640080" y="292608"/>
+            <a:off x="777240" y="292608"/>
             <a:ext cx="10972800" cy="274320"/>
           </a:xfrm>
           <a:prstGeom prst="rect">
@@ -10887,8 +11697,8 @@
         </p:nvSpPr>
         <p:spPr>
           <a:xfrm>
-            <a:off x="640080" y="530352"/>
-            <a:ext cx="11155680" cy="566928"/>
+            <a:off x="777240" y="530352"/>
+            <a:ext cx="10881360" cy="566928"/>
           </a:xfrm>
           <a:prstGeom prst="rect">
             <a:avLst/>
@@ -10928,12 +11738,12 @@
         </p:nvSpPr>
         <p:spPr>
           <a:xfrm>
-            <a:off x="411480" y="1325880"/>
-            <a:ext cx="3642360" cy="4892040"/>
+            <a:off x="548640" y="1325880"/>
+            <a:ext cx="3544824" cy="4892040"/>
           </a:xfrm>
           <a:prstGeom prst="roundRect">
             <a:avLst>
-              <a:gd name="adj" fmla="val 2008"/>
+              <a:gd name="adj" fmla="val 2064"/>
             </a:avLst>
           </a:prstGeom>
           <a:solidFill>
@@ -10962,7 +11772,7 @@
         </p:nvSpPr>
         <p:spPr>
           <a:xfrm>
-            <a:off x="594360" y="1508760"/>
+            <a:off x="731520" y="1508760"/>
             <a:ext cx="457200" cy="457200"/>
           </a:xfrm>
           <a:prstGeom prst="ellipse">
@@ -10982,7 +11792,7 @@
         </p:nvSpPr>
         <p:spPr>
           <a:xfrm>
-            <a:off x="594360" y="1508760"/>
+            <a:off x="731520" y="1508760"/>
             <a:ext cx="457200" cy="457200"/>
           </a:xfrm>
           <a:prstGeom prst="rect">
@@ -11021,8 +11831,8 @@
         </p:nvSpPr>
         <p:spPr>
           <a:xfrm>
-            <a:off x="1188720" y="1435608"/>
-            <a:ext cx="2727960" cy="4672584"/>
+            <a:off x="1325880" y="1435608"/>
+            <a:ext cx="2630424" cy="4672584"/>
           </a:xfrm>
           <a:prstGeom prst="rect">
             <a:avLst/>
@@ -11062,12 +11872,12 @@
         </p:nvSpPr>
         <p:spPr>
           <a:xfrm>
-            <a:off x="4282440" y="1325880"/>
-            <a:ext cx="3642360" cy="4892040"/>
+            <a:off x="4322064" y="1325880"/>
+            <a:ext cx="3544824" cy="4892040"/>
           </a:xfrm>
           <a:prstGeom prst="roundRect">
             <a:avLst>
-              <a:gd name="adj" fmla="val 2008"/>
+              <a:gd name="adj" fmla="val 2064"/>
             </a:avLst>
           </a:prstGeom>
           <a:solidFill>
@@ -11096,7 +11906,7 @@
         </p:nvSpPr>
         <p:spPr>
           <a:xfrm>
-            <a:off x="4465320" y="1508760"/>
+            <a:off x="4504944" y="1508760"/>
             <a:ext cx="457200" cy="457200"/>
           </a:xfrm>
           <a:prstGeom prst="ellipse">
@@ -11116,7 +11926,7 @@
         </p:nvSpPr>
         <p:spPr>
           <a:xfrm>
-            <a:off x="4465320" y="1508760"/>
+            <a:off x="4504944" y="1508760"/>
             <a:ext cx="457200" cy="457200"/>
           </a:xfrm>
           <a:prstGeom prst="rect">
@@ -11155,8 +11965,8 @@
         </p:nvSpPr>
         <p:spPr>
           <a:xfrm>
-            <a:off x="5059680" y="1435608"/>
-            <a:ext cx="2727960" cy="4672584"/>
+            <a:off x="5099304" y="1435608"/>
+            <a:ext cx="2630424" cy="4672584"/>
           </a:xfrm>
           <a:prstGeom prst="rect">
             <a:avLst/>
@@ -11196,12 +12006,12 @@
         </p:nvSpPr>
         <p:spPr>
           <a:xfrm>
-            <a:off x="8153400" y="1325880"/>
-            <a:ext cx="3642360" cy="4892040"/>
+            <a:off x="8095488" y="1325880"/>
+            <a:ext cx="3544824" cy="4892040"/>
           </a:xfrm>
           <a:prstGeom prst="roundRect">
             <a:avLst>
-              <a:gd name="adj" fmla="val 2008"/>
+              <a:gd name="adj" fmla="val 2064"/>
             </a:avLst>
           </a:prstGeom>
           <a:solidFill>
@@ -11230,7 +12040,7 @@
         </p:nvSpPr>
         <p:spPr>
           <a:xfrm>
-            <a:off x="8336280" y="1508760"/>
+            <a:off x="8278368" y="1508760"/>
             <a:ext cx="457200" cy="457200"/>
           </a:xfrm>
           <a:prstGeom prst="ellipse">
@@ -11250,7 +12060,7 @@
         </p:nvSpPr>
         <p:spPr>
           <a:xfrm>
-            <a:off x="8336280" y="1508760"/>
+            <a:off x="8278368" y="1508760"/>
             <a:ext cx="457200" cy="457200"/>
           </a:xfrm>
           <a:prstGeom prst="rect">
@@ -11289,8 +12099,8 @@
         </p:nvSpPr>
         <p:spPr>
           <a:xfrm>
-            <a:off x="8930640" y="1435608"/>
-            <a:ext cx="2727960" cy="4672584"/>
+            <a:off x="8872728" y="1435608"/>
+            <a:ext cx="2630424" cy="4672584"/>
           </a:xfrm>
           <a:prstGeom prst="rect">
             <a:avLst/>
@@ -11319,6 +12129,54 @@
               <a:t>Ponto de equilíbrio em kWh</a:t>
             </a:r>
             <a:endParaRPr lang="en-US" sz="1800" dirty="0"/>
+          </a:p>
+        </p:txBody>
+      </p:sp>
+      <p:sp>
+        <p:nvSpPr>
+          <p:cNvPr id="25" name="Slide Number Placeholder 0"/>
+          <p:cNvSpPr>
+            <a:spLocks noGrp="1"/>
+          </p:cNvSpPr>
+          <p:nvPr>
+            <p:ph type="sldNum" sz="quarter" idx="4294967295"/>
+          </p:nvPr>
+        </p:nvSpPr>
+        <p:spPr>
+          <a:xfrm>
+            <a:off x="11292840" y="6556248"/>
+            <a:ext cx="548640" cy="256032"/>
+          </a:xfrm>
+          <a:prstGeom prst="rect">
+            <a:avLst/>
+          </a:prstGeom>
+          <a:extLst>
+            <a:ext uri="{C572A759-6A51-4108-AA02-DFA0A04FC94B}">
+              <ma14:wrappingTextBoxFlag xmlns:ma14="http://schemas.microsoft.com/office/mac/drawingml/2011/main" val="0"/>
+            </a:ext>
+          </a:extLst>
+        </p:spPr>
+        <p:txBody>
+          <a:bodyPr/>
+          <a:lstStyle>
+            <a:lvl1pPr>
+              <a:defRPr sz="900">
+                <a:solidFill>
+                  <a:srgbClr val="1B3A6B"/>
+                </a:solidFill>
+                <a:latin typeface="Arial"/>
+                <a:ea typeface="Arial"/>
+                <a:cs typeface="Arial"/>
+              </a:defRPr>
+            </a:lvl1pPr>
+          </a:lstStyle>
+          <a:p>
+            <a:pPr algn="r"/>
+            <a:fld id="{F7021451-1387-4CA6-816F-3879F97B5CBC}" type="slidenum">
+              <a:rPr b="1" lang="en-US"/>
+              <a:t>22</a:t>
+            </a:fld>
+            <a:endParaRPr lang="en-US"/>
           </a:p>
         </p:txBody>
       </p:sp>
@@ -11382,6 +12240,45 @@
         </p:nvSpPr>
         <p:spPr>
           <a:xfrm>
+            <a:off x="457200" y="548640"/>
+            <a:ext cx="3474720" cy="1737360"/>
+          </a:xfrm>
+          <a:prstGeom prst="rect">
+            <a:avLst/>
+          </a:prstGeom>
+          <a:noFill/>
+          <a:ln/>
+        </p:spPr>
+        <p:txBody>
+          <a:bodyPr wrap="square" rtlCol="0" anchor="ctr"/>
+          <a:lstStyle/>
+          <a:p>
+            <a:pPr indent="0" marL="0">
+              <a:buNone/>
+            </a:pPr>
+            <a:r>
+              <a:rPr lang="en-US" sz="11000" b="1" dirty="0">
+                <a:solidFill>
+                  <a:srgbClr val="11396F"/>
+                </a:solidFill>
+                <a:latin typeface="Arial" pitchFamily="34" charset="0"/>
+                <a:ea typeface="Arial" pitchFamily="34" charset="-122"/>
+                <a:cs typeface="Arial" pitchFamily="34" charset="-120"/>
+              </a:rPr>
+              <a:t>05</a:t>
+            </a:r>
+            <a:endParaRPr lang="en-US" sz="11000" dirty="0"/>
+          </a:p>
+        </p:txBody>
+      </p:sp>
+      <p:sp>
+        <p:nvSpPr>
+          <p:cNvPr id="4" name="Text 2"/>
+          <p:cNvSpPr/>
+          <p:nvPr/>
+        </p:nvSpPr>
+        <p:spPr>
+          <a:xfrm>
             <a:off x="548640" y="2194560"/>
             <a:ext cx="3291840" cy="548640"/>
           </a:xfrm>
@@ -11415,7 +12312,46 @@
       </p:sp>
       <p:sp>
         <p:nvSpPr>
-          <p:cNvPr id="4" name="Text 2"/>
+          <p:cNvPr id="5" name="Text 3"/>
+          <p:cNvSpPr/>
+          <p:nvPr/>
+        </p:nvSpPr>
+        <p:spPr>
+          <a:xfrm>
+            <a:off x="548640" y="3200400"/>
+            <a:ext cx="3383280" cy="457200"/>
+          </a:xfrm>
+          <a:prstGeom prst="rect">
+            <a:avLst/>
+          </a:prstGeom>
+          <a:noFill/>
+          <a:ln/>
+        </p:spPr>
+        <p:txBody>
+          <a:bodyPr wrap="square" rtlCol="0" anchor="ctr"/>
+          <a:lstStyle/>
+          <a:p>
+            <a:pPr indent="0" marL="0">
+              <a:buNone/>
+            </a:pPr>
+            <a:r>
+              <a:rPr lang="en-US" sz="1100" dirty="0">
+                <a:solidFill>
+                  <a:srgbClr val="C7D2E3"/>
+                </a:solidFill>
+                <a:latin typeface="Arial" pitchFamily="34" charset="0"/>
+                <a:ea typeface="Arial" pitchFamily="34" charset="-122"/>
+                <a:cs typeface="Arial" pitchFamily="34" charset="-120"/>
+              </a:rPr>
+              <a:t>M3 · Etapa 2 · Regulação e negócio</a:t>
+            </a:r>
+            <a:endParaRPr lang="en-US" sz="1100" dirty="0"/>
+          </a:p>
+        </p:txBody>
+      </p:sp>
+      <p:sp>
+        <p:nvSpPr>
+          <p:cNvPr id="6" name="Text 4"/>
           <p:cNvSpPr/>
           <p:nvPr/>
         </p:nvSpPr>
@@ -11454,7 +12390,7 @@
       </p:sp>
       <p:pic>
         <p:nvPicPr>
-          <p:cNvPr id="5" name="Image 0" descr="/www/wwwroot/rexar/gdsolar/docs/curso/slides/assets/logo-gdsolar.png">    </p:cNvPr>
+          <p:cNvPr id="7" name="Image 0" descr="/www/wwwroot/rexar/gdsolar/docs/curso/slides/assets/logo-gdsolar.png">    </p:cNvPr>
           <p:cNvPicPr>
             <a:picLocks noChangeAspect="1"/>
           </p:cNvPicPr>
@@ -11478,7 +12414,7 @@
       </p:pic>
       <p:sp>
         <p:nvSpPr>
-          <p:cNvPr id="6" name="Text 3"/>
+          <p:cNvPr id="8" name="Text 5"/>
           <p:cNvSpPr/>
           <p:nvPr/>
         </p:nvSpPr>
@@ -11519,7 +12455,7 @@
       </p:sp>
       <p:sp>
         <p:nvSpPr>
-          <p:cNvPr id="7" name="Text 4"/>
+          <p:cNvPr id="9" name="Text 6"/>
           <p:cNvSpPr/>
           <p:nvPr/>
         </p:nvSpPr>
@@ -11560,7 +12496,7 @@
       </p:sp>
       <p:sp>
         <p:nvSpPr>
-          <p:cNvPr id="8" name="Text 5"/>
+          <p:cNvPr id="10" name="Text 7"/>
           <p:cNvSpPr/>
           <p:nvPr/>
         </p:nvSpPr>
@@ -11760,7 +12696,7 @@
         </p:blipFill>
         <p:spPr>
           <a:xfrm>
-            <a:off x="411480" y="6547104"/>
+            <a:off x="548640" y="6547104"/>
             <a:ext cx="274320" cy="274320"/>
           </a:xfrm>
           <a:prstGeom prst="rect">
@@ -11776,7 +12712,7 @@
         </p:nvSpPr>
         <p:spPr>
           <a:xfrm>
-            <a:off x="749808" y="6528816"/>
+            <a:off x="886968" y="6528816"/>
             <a:ext cx="6400800" cy="310896"/>
           </a:xfrm>
           <a:prstGeom prst="rect">
@@ -11816,7 +12752,7 @@
         <p:spPr>
           <a:xfrm>
             <a:off x="7132320" y="6528816"/>
-            <a:ext cx="4663440" cy="310896"/>
+            <a:ext cx="4023360" cy="310896"/>
           </a:xfrm>
           <a:prstGeom prst="rect">
             <a:avLst/>
@@ -11854,7 +12790,7 @@
         </p:nvSpPr>
         <p:spPr>
           <a:xfrm>
-            <a:off x="411480" y="384048"/>
+            <a:off x="548640" y="384048"/>
             <a:ext cx="82296" cy="658368"/>
           </a:xfrm>
           <a:prstGeom prst="rect">
@@ -11874,7 +12810,7 @@
         </p:nvSpPr>
         <p:spPr>
           <a:xfrm>
-            <a:off x="640080" y="292608"/>
+            <a:off x="777240" y="292608"/>
             <a:ext cx="10972800" cy="274320"/>
           </a:xfrm>
           <a:prstGeom prst="rect">
@@ -11913,8 +12849,8 @@
         </p:nvSpPr>
         <p:spPr>
           <a:xfrm>
-            <a:off x="640080" y="530352"/>
-            <a:ext cx="11155680" cy="566928"/>
+            <a:off x="777240" y="530352"/>
+            <a:ext cx="10881360" cy="566928"/>
           </a:xfrm>
           <a:prstGeom prst="rect">
             <a:avLst/>
@@ -11953,8 +12889,8 @@
           <p:nvPr/>
         </p:nvGraphicFramePr>
         <p:xfrm>
-          <a:off x="411480" y="1325880"/>
-          <a:ext cx="5852160" cy="4937760"/>
+          <a:off x="548640" y="1325880"/>
+          <a:ext cx="5669280" cy="4937760"/>
         </p:xfrm>
         <a:graphic xmlns:a="http://schemas.openxmlformats.org/drawingml/2006/main">
           <a:graphicData uri="http://schemas.openxmlformats.org/drawingml/2006/chart">
@@ -11970,8 +12906,8 @@
         </p:nvSpPr>
         <p:spPr>
           <a:xfrm>
-            <a:off x="6492240" y="1325880"/>
-            <a:ext cx="5303520" cy="1463040"/>
+            <a:off x="6446520" y="1325880"/>
+            <a:ext cx="5193792" cy="1463040"/>
           </a:xfrm>
           <a:prstGeom prst="rect">
             <a:avLst/>
@@ -12022,19 +12958,19 @@
           </p:nvPr>
         </p:nvGraphicFramePr>
         <p:xfrm>
-          <a:off x="6492240" y="2880360"/>
-          <a:ext cx="5303520" cy="914400"/>
+          <a:off x="6446520" y="2880360"/>
+          <a:ext cx="5193792" cy="914400"/>
         </p:xfrm>
         <a:graphic>
           <a:graphicData uri="http://schemas.openxmlformats.org/drawingml/2006/table">
             <a:tbl>
               <a:tblPr/>
               <a:tblGrid>
-                <a:gridCol w="1060704"/>
-                <a:gridCol w="1060704"/>
-                <a:gridCol w="1060704"/>
-                <a:gridCol w="1060704"/>
-                <a:gridCol w="1060704"/>
+                <a:gridCol w="1038758"/>
+                <a:gridCol w="1038758"/>
+                <a:gridCol w="1038758"/>
+                <a:gridCol w="1038758"/>
+                <a:gridCol w="1038758"/>
               </a:tblGrid>
               <a:tr h="0">
                 <a:tc>
@@ -13408,6 +14344,54 @@
           </a:graphicData>
         </a:graphic>
       </p:graphicFrame>
+      <p:sp>
+        <p:nvSpPr>
+          <p:cNvPr id="25" name="Slide Number Placeholder 0"/>
+          <p:cNvSpPr>
+            <a:spLocks noGrp="1"/>
+          </p:cNvSpPr>
+          <p:nvPr>
+            <p:ph type="sldNum" sz="quarter" idx="4294967295"/>
+          </p:nvPr>
+        </p:nvSpPr>
+        <p:spPr>
+          <a:xfrm>
+            <a:off x="11292840" y="6556248"/>
+            <a:ext cx="548640" cy="256032"/>
+          </a:xfrm>
+          <a:prstGeom prst="rect">
+            <a:avLst/>
+          </a:prstGeom>
+          <a:extLst>
+            <a:ext uri="{C572A759-6A51-4108-AA02-DFA0A04FC94B}">
+              <ma14:wrappingTextBoxFlag xmlns:ma14="http://schemas.microsoft.com/office/mac/drawingml/2011/main" val="0"/>
+            </a:ext>
+          </a:extLst>
+        </p:spPr>
+        <p:txBody>
+          <a:bodyPr/>
+          <a:lstStyle>
+            <a:lvl1pPr>
+              <a:defRPr sz="900">
+                <a:solidFill>
+                  <a:srgbClr val="1B3A6B"/>
+                </a:solidFill>
+                <a:latin typeface="Arial"/>
+                <a:ea typeface="Arial"/>
+                <a:cs typeface="Arial"/>
+              </a:defRPr>
+            </a:lvl1pPr>
+          </a:lstStyle>
+          <a:p>
+            <a:pPr algn="r"/>
+            <a:fld id="{F7021451-1387-4CA6-816F-3879F97B5CBC}" type="slidenum">
+              <a:rPr b="1" lang="en-US"/>
+              <a:t>24</a:t>
+            </a:fld>
+            <a:endParaRPr lang="en-US"/>
+          </a:p>
+        </p:txBody>
+      </p:sp>
     </p:spTree>
   </p:cSld>
   <p:clrMapOvr>
@@ -13481,7 +14465,7 @@
         </p:blipFill>
         <p:spPr>
           <a:xfrm>
-            <a:off x="411480" y="6547104"/>
+            <a:off x="548640" y="6547104"/>
             <a:ext cx="274320" cy="274320"/>
           </a:xfrm>
           <a:prstGeom prst="rect">
@@ -13497,7 +14481,7 @@
         </p:nvSpPr>
         <p:spPr>
           <a:xfrm>
-            <a:off x="749808" y="6528816"/>
+            <a:off x="886968" y="6528816"/>
             <a:ext cx="6400800" cy="310896"/>
           </a:xfrm>
           <a:prstGeom prst="rect">
@@ -13537,7 +14521,7 @@
         <p:spPr>
           <a:xfrm>
             <a:off x="7132320" y="6528816"/>
-            <a:ext cx="4663440" cy="310896"/>
+            <a:ext cx="4023360" cy="310896"/>
           </a:xfrm>
           <a:prstGeom prst="rect">
             <a:avLst/>
@@ -13575,7 +14559,7 @@
         </p:nvSpPr>
         <p:spPr>
           <a:xfrm>
-            <a:off x="411480" y="384048"/>
+            <a:off x="548640" y="384048"/>
             <a:ext cx="82296" cy="658368"/>
           </a:xfrm>
           <a:prstGeom prst="rect">
@@ -13595,7 +14579,7 @@
         </p:nvSpPr>
         <p:spPr>
           <a:xfrm>
-            <a:off x="640080" y="292608"/>
+            <a:off x="777240" y="292608"/>
             <a:ext cx="10972800" cy="274320"/>
           </a:xfrm>
           <a:prstGeom prst="rect">
@@ -13634,8 +14618,8 @@
         </p:nvSpPr>
         <p:spPr>
           <a:xfrm>
-            <a:off x="640080" y="530352"/>
-            <a:ext cx="11155680" cy="566928"/>
+            <a:off x="777240" y="530352"/>
+            <a:ext cx="10881360" cy="566928"/>
           </a:xfrm>
           <a:prstGeom prst="rect">
             <a:avLst/>
@@ -13675,8 +14659,8 @@
         </p:nvSpPr>
         <p:spPr>
           <a:xfrm>
-            <a:off x="411480" y="1325880"/>
-            <a:ext cx="5554980" cy="4937760"/>
+            <a:off x="548640" y="1325880"/>
+            <a:ext cx="5408676" cy="4937760"/>
           </a:xfrm>
           <a:prstGeom prst="roundRect">
             <a:avLst>
@@ -13709,8 +14693,8 @@
         </p:nvSpPr>
         <p:spPr>
           <a:xfrm>
-            <a:off x="411480" y="1325880"/>
-            <a:ext cx="5554980" cy="109728"/>
+            <a:off x="548640" y="1325880"/>
+            <a:ext cx="5408676" cy="109728"/>
           </a:xfrm>
           <a:prstGeom prst="rect">
             <a:avLst/>
@@ -13729,8 +14713,8 @@
         </p:nvSpPr>
         <p:spPr>
           <a:xfrm>
-            <a:off x="685800" y="1554480"/>
-            <a:ext cx="5006340" cy="685800"/>
+            <a:off x="822960" y="1554480"/>
+            <a:ext cx="4860036" cy="685800"/>
           </a:xfrm>
           <a:prstGeom prst="rect">
             <a:avLst/>
@@ -13770,8 +14754,8 @@
         </p:nvSpPr>
         <p:spPr>
           <a:xfrm>
-            <a:off x="685800" y="2286000"/>
-            <a:ext cx="5006340" cy="3749040"/>
+            <a:off x="822960" y="2286000"/>
+            <a:ext cx="4860036" cy="3749040"/>
           </a:xfrm>
           <a:prstGeom prst="rect">
             <a:avLst/>
@@ -13793,7 +14777,7 @@
               <a:buChar char="●"/>
             </a:pPr>
             <a:r>
-              <a:rPr lang="en-US" sz="1400" dirty="0">
+              <a:rPr lang="en-US" sz="1700" dirty="0">
                 <a:solidFill>
                   <a:srgbClr val="1F2937"/>
                 </a:solidFill>
@@ -13803,7 +14787,7 @@
               </a:rPr>
               <a:t>A) % sobre o crédito — todos dividem o impacto</a:t>
             </a:r>
-            <a:endParaRPr lang="en-US" sz="1400" dirty="0"/>
+            <a:endParaRPr lang="en-US" sz="1700" dirty="0"/>
           </a:p>
           <a:p>
             <a:pPr marL="342900" indent="-342900">
@@ -13814,7 +14798,7 @@
               <a:buChar char="●"/>
             </a:pPr>
             <a:r>
-              <a:rPr lang="en-US" sz="1400" dirty="0">
+              <a:rPr lang="en-US" sz="1700" dirty="0">
                 <a:solidFill>
                   <a:srgbClr val="1F2937"/>
                 </a:solidFill>
@@ -13824,7 +14808,7 @@
               </a:rPr>
               <a:t>B) Preço fixo por kWh ao cliente — cliente perde economia; risco de churn</a:t>
             </a:r>
-            <a:endParaRPr lang="en-US" sz="1400" dirty="0"/>
+            <a:endParaRPr lang="en-US" sz="1700" dirty="0"/>
           </a:p>
           <a:p>
             <a:pPr marL="342900" indent="-342900">
@@ -13835,7 +14819,7 @@
               <a:buChar char="●"/>
             </a:pPr>
             <a:r>
-              <a:rPr lang="en-US" sz="1400" dirty="0">
+              <a:rPr lang="en-US" sz="1700" dirty="0">
                 <a:solidFill>
                   <a:srgbClr val="1F2937"/>
                 </a:solidFill>
@@ -13845,7 +14829,7 @@
               </a:rPr>
               <a:t>C) Economia garantida sobre a conta total — gestora e produtor absorvem tudo</a:t>
             </a:r>
-            <a:endParaRPr lang="en-US" sz="1400" dirty="0"/>
+            <a:endParaRPr lang="en-US" sz="1700" dirty="0"/>
           </a:p>
         </p:txBody>
       </p:sp>
@@ -13857,8 +14841,8 @@
         </p:nvSpPr>
         <p:spPr>
           <a:xfrm>
-            <a:off x="6240780" y="1325880"/>
-            <a:ext cx="5554980" cy="4937760"/>
+            <a:off x="6231636" y="1325880"/>
+            <a:ext cx="5408676" cy="4937760"/>
           </a:xfrm>
           <a:prstGeom prst="roundRect">
             <a:avLst>
@@ -13891,8 +14875,8 @@
         </p:nvSpPr>
         <p:spPr>
           <a:xfrm>
-            <a:off x="6240780" y="1325880"/>
-            <a:ext cx="5554980" cy="109728"/>
+            <a:off x="6231636" y="1325880"/>
+            <a:ext cx="5408676" cy="109728"/>
           </a:xfrm>
           <a:prstGeom prst="rect">
             <a:avLst/>
@@ -13911,8 +14895,8 @@
         </p:nvSpPr>
         <p:spPr>
           <a:xfrm>
-            <a:off x="6515100" y="1554480"/>
-            <a:ext cx="5006340" cy="685800"/>
+            <a:off x="6505956" y="1554480"/>
+            <a:ext cx="4860036" cy="685800"/>
           </a:xfrm>
           <a:prstGeom prst="rect">
             <a:avLst/>
@@ -13952,8 +14936,8 @@
         </p:nvSpPr>
         <p:spPr>
           <a:xfrm>
-            <a:off x="6515100" y="2286000"/>
-            <a:ext cx="5006340" cy="3749040"/>
+            <a:off x="6505956" y="2286000"/>
+            <a:ext cx="4860036" cy="3749040"/>
           </a:xfrm>
           <a:prstGeom prst="rect">
             <a:avLst/>
@@ -13975,7 +14959,7 @@
               <a:buChar char="●"/>
             </a:pPr>
             <a:r>
-              <a:rPr lang="en-US" sz="1600" dirty="0">
+              <a:rPr lang="en-US" sz="1700" dirty="0">
                 <a:solidFill>
                   <a:srgbClr val="1F2937"/>
                 </a:solidFill>
@@ -13985,7 +14969,7 @@
               </a:rPr>
               <a:t>Aluguel fixo (R$/mês): produtor sem risco; gestora assume vacância, inadimplência e Fio B</a:t>
             </a:r>
-            <a:endParaRPr lang="en-US" sz="1600" dirty="0"/>
+            <a:endParaRPr lang="en-US" sz="1700" dirty="0"/>
           </a:p>
           <a:p>
             <a:pPr marL="342900" indent="-342900">
@@ -13996,7 +14980,7 @@
               <a:buChar char="●"/>
             </a:pPr>
             <a:r>
-              <a:rPr lang="en-US" sz="1600" dirty="0">
+              <a:rPr lang="en-US" sz="1700" dirty="0">
                 <a:solidFill>
                   <a:srgbClr val="1F2937"/>
                 </a:solidFill>
@@ -14006,7 +14990,55 @@
               </a:rPr>
               <a:t>Aluguel variável (% do rendimento): risco compartilhado; gestora protegida</a:t>
             </a:r>
-            <a:endParaRPr lang="en-US" sz="1600" dirty="0"/>
+            <a:endParaRPr lang="en-US" sz="1700" dirty="0"/>
+          </a:p>
+        </p:txBody>
+      </p:sp>
+      <p:sp>
+        <p:nvSpPr>
+          <p:cNvPr id="25" name="Slide Number Placeholder 0"/>
+          <p:cNvSpPr>
+            <a:spLocks noGrp="1"/>
+          </p:cNvSpPr>
+          <p:nvPr>
+            <p:ph type="sldNum" sz="quarter" idx="4294967295"/>
+          </p:nvPr>
+        </p:nvSpPr>
+        <p:spPr>
+          <a:xfrm>
+            <a:off x="11292840" y="6556248"/>
+            <a:ext cx="548640" cy="256032"/>
+          </a:xfrm>
+          <a:prstGeom prst="rect">
+            <a:avLst/>
+          </a:prstGeom>
+          <a:extLst>
+            <a:ext uri="{C572A759-6A51-4108-AA02-DFA0A04FC94B}">
+              <ma14:wrappingTextBoxFlag xmlns:ma14="http://schemas.microsoft.com/office/mac/drawingml/2011/main" val="0"/>
+            </a:ext>
+          </a:extLst>
+        </p:spPr>
+        <p:txBody>
+          <a:bodyPr/>
+          <a:lstStyle>
+            <a:lvl1pPr>
+              <a:defRPr sz="900">
+                <a:solidFill>
+                  <a:srgbClr val="1B3A6B"/>
+                </a:solidFill>
+                <a:latin typeface="Arial"/>
+                <a:ea typeface="Arial"/>
+                <a:cs typeface="Arial"/>
+              </a:defRPr>
+            </a:lvl1pPr>
+          </a:lstStyle>
+          <a:p>
+            <a:pPr algn="r"/>
+            <a:fld id="{F7021451-1387-4CA6-816F-3879F97B5CBC}" type="slidenum">
+              <a:rPr b="1" lang="en-US"/>
+              <a:t>25</a:t>
+            </a:fld>
+            <a:endParaRPr lang="en-US"/>
           </a:p>
         </p:txBody>
       </p:sp>
@@ -14083,7 +15115,7 @@
         </p:blipFill>
         <p:spPr>
           <a:xfrm>
-            <a:off x="411480" y="6547104"/>
+            <a:off x="548640" y="6547104"/>
             <a:ext cx="274320" cy="274320"/>
           </a:xfrm>
           <a:prstGeom prst="rect">
@@ -14099,7 +15131,7 @@
         </p:nvSpPr>
         <p:spPr>
           <a:xfrm>
-            <a:off x="749808" y="6528816"/>
+            <a:off x="886968" y="6528816"/>
             <a:ext cx="6400800" cy="310896"/>
           </a:xfrm>
           <a:prstGeom prst="rect">
@@ -14139,7 +15171,7 @@
         <p:spPr>
           <a:xfrm>
             <a:off x="7132320" y="6528816"/>
-            <a:ext cx="4663440" cy="310896"/>
+            <a:ext cx="4023360" cy="310896"/>
           </a:xfrm>
           <a:prstGeom prst="rect">
             <a:avLst/>
@@ -14177,7 +15209,7 @@
         </p:nvSpPr>
         <p:spPr>
           <a:xfrm>
-            <a:off x="411480" y="384048"/>
+            <a:off x="548640" y="384048"/>
             <a:ext cx="82296" cy="658368"/>
           </a:xfrm>
           <a:prstGeom prst="rect">
@@ -14197,7 +15229,7 @@
         </p:nvSpPr>
         <p:spPr>
           <a:xfrm>
-            <a:off x="640080" y="292608"/>
+            <a:off x="777240" y="292608"/>
             <a:ext cx="10972800" cy="274320"/>
           </a:xfrm>
           <a:prstGeom prst="rect">
@@ -14236,8 +15268,8 @@
         </p:nvSpPr>
         <p:spPr>
           <a:xfrm>
-            <a:off x="640080" y="530352"/>
-            <a:ext cx="11155680" cy="566928"/>
+            <a:off x="777240" y="530352"/>
+            <a:ext cx="10881360" cy="566928"/>
           </a:xfrm>
           <a:prstGeom prst="rect">
             <a:avLst/>
@@ -14277,8 +15309,8 @@
         </p:nvSpPr>
         <p:spPr>
           <a:xfrm>
-            <a:off x="411480" y="1325880"/>
-            <a:ext cx="11384280" cy="4937760"/>
+            <a:off x="548640" y="1325880"/>
+            <a:ext cx="11091672" cy="4937760"/>
           </a:xfrm>
           <a:prstGeom prst="roundRect">
             <a:avLst>
@@ -14299,8 +15331,8 @@
         </p:nvSpPr>
         <p:spPr>
           <a:xfrm>
-            <a:off x="777240" y="1554480"/>
-            <a:ext cx="10652760" cy="4480560"/>
+            <a:off x="914400" y="1554480"/>
+            <a:ext cx="10360152" cy="4480560"/>
           </a:xfrm>
           <a:prstGeom prst="rect">
             <a:avLst/>
@@ -14321,7 +15353,7 @@
               <a:buNone/>
             </a:pPr>
             <a:r>
-              <a:rPr lang="en-US" sz="2000" b="1" dirty="0">
+              <a:rPr lang="en-US" sz="2400" b="1" dirty="0">
                 <a:solidFill>
                   <a:srgbClr val="FFFFFF"/>
                 </a:solidFill>
@@ -14331,7 +15363,7 @@
               </a:rPr>
               <a:t>Planeje 2029+ com cenários</a:t>
             </a:r>
-            <a:endParaRPr lang="en-US" sz="2000" dirty="0"/>
+            <a:endParaRPr lang="en-US" sz="2400" dirty="0"/>
           </a:p>
           <a:p>
             <a:pPr indent="0" marL="0">
@@ -14341,7 +15373,7 @@
               <a:buNone/>
             </a:pPr>
             <a:r>
-              <a:rPr lang="en-US" sz="2000" b="1" dirty="0">
+              <a:rPr lang="en-US" sz="2400" b="1" dirty="0">
                 <a:solidFill>
                   <a:srgbClr val="F7A23B"/>
                 </a:solidFill>
@@ -14351,7 +15383,55 @@
               </a:rPr>
               <a:t>Cláusula de reequilíbrio regulatório nos contratos</a:t>
             </a:r>
-            <a:endParaRPr lang="en-US" sz="2000" dirty="0"/>
+            <a:endParaRPr lang="en-US" sz="2400" dirty="0"/>
+          </a:p>
+        </p:txBody>
+      </p:sp>
+      <p:sp>
+        <p:nvSpPr>
+          <p:cNvPr id="25" name="Slide Number Placeholder 0"/>
+          <p:cNvSpPr>
+            <a:spLocks noGrp="1"/>
+          </p:cNvSpPr>
+          <p:nvPr>
+            <p:ph type="sldNum" sz="quarter" idx="4294967295"/>
+          </p:nvPr>
+        </p:nvSpPr>
+        <p:spPr>
+          <a:xfrm>
+            <a:off x="11292840" y="6556248"/>
+            <a:ext cx="548640" cy="256032"/>
+          </a:xfrm>
+          <a:prstGeom prst="rect">
+            <a:avLst/>
+          </a:prstGeom>
+          <a:extLst>
+            <a:ext uri="{C572A759-6A51-4108-AA02-DFA0A04FC94B}">
+              <ma14:wrappingTextBoxFlag xmlns:ma14="http://schemas.microsoft.com/office/mac/drawingml/2011/main" val="0"/>
+            </a:ext>
+          </a:extLst>
+        </p:spPr>
+        <p:txBody>
+          <a:bodyPr/>
+          <a:lstStyle>
+            <a:lvl1pPr>
+              <a:defRPr sz="900">
+                <a:solidFill>
+                  <a:srgbClr val="1B3A6B"/>
+                </a:solidFill>
+                <a:latin typeface="Arial"/>
+                <a:ea typeface="Arial"/>
+                <a:cs typeface="Arial"/>
+              </a:defRPr>
+            </a:lvl1pPr>
+          </a:lstStyle>
+          <a:p>
+            <a:pPr algn="r"/>
+            <a:fld id="{F7021451-1387-4CA6-816F-3879F97B5CBC}" type="slidenum">
+              <a:rPr b="1" lang="en-US"/>
+              <a:t>26</a:t>
+            </a:fld>
+            <a:endParaRPr lang="en-US"/>
           </a:p>
         </p:txBody>
       </p:sp>
@@ -14428,7 +15508,7 @@
         </p:blipFill>
         <p:spPr>
           <a:xfrm>
-            <a:off x="411480" y="6547104"/>
+            <a:off x="548640" y="6547104"/>
             <a:ext cx="274320" cy="274320"/>
           </a:xfrm>
           <a:prstGeom prst="rect">
@@ -14444,7 +15524,7 @@
         </p:nvSpPr>
         <p:spPr>
           <a:xfrm>
-            <a:off x="749808" y="6528816"/>
+            <a:off x="886968" y="6528816"/>
             <a:ext cx="6400800" cy="310896"/>
           </a:xfrm>
           <a:prstGeom prst="rect">
@@ -14484,7 +15564,7 @@
         <p:spPr>
           <a:xfrm>
             <a:off x="7132320" y="6528816"/>
-            <a:ext cx="4663440" cy="310896"/>
+            <a:ext cx="4023360" cy="310896"/>
           </a:xfrm>
           <a:prstGeom prst="rect">
             <a:avLst/>
@@ -14522,7 +15602,7 @@
         </p:nvSpPr>
         <p:spPr>
           <a:xfrm>
-            <a:off x="411480" y="384048"/>
+            <a:off x="548640" y="384048"/>
             <a:ext cx="82296" cy="658368"/>
           </a:xfrm>
           <a:prstGeom prst="rect">
@@ -14542,7 +15622,7 @@
         </p:nvSpPr>
         <p:spPr>
           <a:xfrm>
-            <a:off x="640080" y="292608"/>
+            <a:off x="777240" y="292608"/>
             <a:ext cx="10972800" cy="274320"/>
           </a:xfrm>
           <a:prstGeom prst="rect">
@@ -14581,8 +15661,8 @@
         </p:nvSpPr>
         <p:spPr>
           <a:xfrm>
-            <a:off x="640080" y="530352"/>
-            <a:ext cx="11155680" cy="566928"/>
+            <a:off x="777240" y="530352"/>
+            <a:ext cx="10881360" cy="566928"/>
           </a:xfrm>
           <a:prstGeom prst="rect">
             <a:avLst/>
@@ -14622,8 +15702,8 @@
         </p:nvSpPr>
         <p:spPr>
           <a:xfrm>
-            <a:off x="411480" y="1325880"/>
-            <a:ext cx="5577840" cy="4892040"/>
+            <a:off x="548640" y="1325880"/>
+            <a:ext cx="5431536" cy="4892040"/>
           </a:xfrm>
           <a:prstGeom prst="roundRect">
             <a:avLst>
@@ -14656,7 +15736,7 @@
         </p:nvSpPr>
         <p:spPr>
           <a:xfrm>
-            <a:off x="594360" y="1508760"/>
+            <a:off x="731520" y="1508760"/>
             <a:ext cx="457200" cy="457200"/>
           </a:xfrm>
           <a:prstGeom prst="ellipse">
@@ -14676,7 +15756,7 @@
         </p:nvSpPr>
         <p:spPr>
           <a:xfrm>
-            <a:off x="594360" y="1508760"/>
+            <a:off x="731520" y="1508760"/>
             <a:ext cx="457200" cy="457200"/>
           </a:xfrm>
           <a:prstGeom prst="rect">
@@ -14715,8 +15795,8 @@
         </p:nvSpPr>
         <p:spPr>
           <a:xfrm>
-            <a:off x="1188720" y="1435608"/>
-            <a:ext cx="4663440" cy="4672584"/>
+            <a:off x="1325880" y="1435608"/>
+            <a:ext cx="4517136" cy="4672584"/>
           </a:xfrm>
           <a:prstGeom prst="rect">
             <a:avLst/>
@@ -14756,8 +15836,8 @@
         </p:nvSpPr>
         <p:spPr>
           <a:xfrm>
-            <a:off x="6217920" y="1325880"/>
-            <a:ext cx="5577840" cy="4892040"/>
+            <a:off x="6208776" y="1325880"/>
+            <a:ext cx="5431536" cy="4892040"/>
           </a:xfrm>
           <a:prstGeom prst="roundRect">
             <a:avLst>
@@ -14790,7 +15870,7 @@
         </p:nvSpPr>
         <p:spPr>
           <a:xfrm>
-            <a:off x="6400800" y="1508760"/>
+            <a:off x="6391656" y="1508760"/>
             <a:ext cx="457200" cy="457200"/>
           </a:xfrm>
           <a:prstGeom prst="ellipse">
@@ -14810,7 +15890,7 @@
         </p:nvSpPr>
         <p:spPr>
           <a:xfrm>
-            <a:off x="6400800" y="1508760"/>
+            <a:off x="6391656" y="1508760"/>
             <a:ext cx="457200" cy="457200"/>
           </a:xfrm>
           <a:prstGeom prst="rect">
@@ -14849,8 +15929,8 @@
         </p:nvSpPr>
         <p:spPr>
           <a:xfrm>
-            <a:off x="6995160" y="1435608"/>
-            <a:ext cx="4663440" cy="4672584"/>
+            <a:off x="6986016" y="1435608"/>
+            <a:ext cx="4517136" cy="4672584"/>
           </a:xfrm>
           <a:prstGeom prst="rect">
             <a:avLst/>
@@ -14879,6 +15959,54 @@
               <a:t>atenção às condições do direito adquirido</a:t>
             </a:r>
             <a:endParaRPr lang="en-US" sz="1800" dirty="0"/>
+          </a:p>
+        </p:txBody>
+      </p:sp>
+      <p:sp>
+        <p:nvSpPr>
+          <p:cNvPr id="25" name="Slide Number Placeholder 0"/>
+          <p:cNvSpPr>
+            <a:spLocks noGrp="1"/>
+          </p:cNvSpPr>
+          <p:nvPr>
+            <p:ph type="sldNum" sz="quarter" idx="4294967295"/>
+          </p:nvPr>
+        </p:nvSpPr>
+        <p:spPr>
+          <a:xfrm>
+            <a:off x="11292840" y="6556248"/>
+            <a:ext cx="548640" cy="256032"/>
+          </a:xfrm>
+          <a:prstGeom prst="rect">
+            <a:avLst/>
+          </a:prstGeom>
+          <a:extLst>
+            <a:ext uri="{C572A759-6A51-4108-AA02-DFA0A04FC94B}">
+              <ma14:wrappingTextBoxFlag xmlns:ma14="http://schemas.microsoft.com/office/mac/drawingml/2011/main" val="0"/>
+            </a:ext>
+          </a:extLst>
+        </p:spPr>
+        <p:txBody>
+          <a:bodyPr/>
+          <a:lstStyle>
+            <a:lvl1pPr>
+              <a:defRPr sz="900">
+                <a:solidFill>
+                  <a:srgbClr val="1B3A6B"/>
+                </a:solidFill>
+                <a:latin typeface="Arial"/>
+                <a:ea typeface="Arial"/>
+                <a:cs typeface="Arial"/>
+              </a:defRPr>
+            </a:lvl1pPr>
+          </a:lstStyle>
+          <a:p>
+            <a:pPr algn="r"/>
+            <a:fld id="{F7021451-1387-4CA6-816F-3879F97B5CBC}" type="slidenum">
+              <a:rPr b="1" lang="en-US"/>
+              <a:t>27</a:t>
+            </a:fld>
+            <a:endParaRPr lang="en-US"/>
           </a:p>
         </p:txBody>
       </p:sp>
@@ -14955,7 +16083,7 @@
         </p:blipFill>
         <p:spPr>
           <a:xfrm>
-            <a:off x="411480" y="6547104"/>
+            <a:off x="548640" y="6547104"/>
             <a:ext cx="274320" cy="274320"/>
           </a:xfrm>
           <a:prstGeom prst="rect">
@@ -14971,7 +16099,7 @@
         </p:nvSpPr>
         <p:spPr>
           <a:xfrm>
-            <a:off x="749808" y="6528816"/>
+            <a:off x="886968" y="6528816"/>
             <a:ext cx="6400800" cy="310896"/>
           </a:xfrm>
           <a:prstGeom prst="rect">
@@ -15011,7 +16139,7 @@
         <p:spPr>
           <a:xfrm>
             <a:off x="7132320" y="6528816"/>
-            <a:ext cx="4663440" cy="310896"/>
+            <a:ext cx="4023360" cy="310896"/>
           </a:xfrm>
           <a:prstGeom prst="rect">
             <a:avLst/>
@@ -15049,7 +16177,7 @@
         </p:nvSpPr>
         <p:spPr>
           <a:xfrm>
-            <a:off x="411480" y="384048"/>
+            <a:off x="548640" y="384048"/>
             <a:ext cx="82296" cy="658368"/>
           </a:xfrm>
           <a:prstGeom prst="rect">
@@ -15069,7 +16197,7 @@
         </p:nvSpPr>
         <p:spPr>
           <a:xfrm>
-            <a:off x="640080" y="292608"/>
+            <a:off x="777240" y="292608"/>
             <a:ext cx="10972800" cy="274320"/>
           </a:xfrm>
           <a:prstGeom prst="rect">
@@ -15108,8 +16236,8 @@
         </p:nvSpPr>
         <p:spPr>
           <a:xfrm>
-            <a:off x="640080" y="530352"/>
-            <a:ext cx="11155680" cy="566928"/>
+            <a:off x="777240" y="530352"/>
+            <a:ext cx="10881360" cy="566928"/>
           </a:xfrm>
           <a:prstGeom prst="rect">
             <a:avLst/>
@@ -15149,8 +16277,8 @@
         </p:nvSpPr>
         <p:spPr>
           <a:xfrm>
-            <a:off x="411480" y="1325880"/>
-            <a:ext cx="5577840" cy="2331720"/>
+            <a:off x="548640" y="1325880"/>
+            <a:ext cx="5431536" cy="2331720"/>
           </a:xfrm>
           <a:prstGeom prst="roundRect">
             <a:avLst>
@@ -15183,7 +16311,7 @@
         </p:nvSpPr>
         <p:spPr>
           <a:xfrm>
-            <a:off x="594360" y="1508760"/>
+            <a:off x="731520" y="1508760"/>
             <a:ext cx="457200" cy="457200"/>
           </a:xfrm>
           <a:prstGeom prst="ellipse">
@@ -15203,7 +16331,7 @@
         </p:nvSpPr>
         <p:spPr>
           <a:xfrm>
-            <a:off x="594360" y="1508760"/>
+            <a:off x="731520" y="1508760"/>
             <a:ext cx="457200" cy="457200"/>
           </a:xfrm>
           <a:prstGeom prst="rect">
@@ -15242,8 +16370,8 @@
         </p:nvSpPr>
         <p:spPr>
           <a:xfrm>
-            <a:off x="1188720" y="1435608"/>
-            <a:ext cx="4663440" cy="2112264"/>
+            <a:off x="1325880" y="1435608"/>
+            <a:ext cx="4517136" cy="2112264"/>
           </a:xfrm>
           <a:prstGeom prst="rect">
             <a:avLst/>
@@ -15283,8 +16411,8 @@
         </p:nvSpPr>
         <p:spPr>
           <a:xfrm>
-            <a:off x="6217920" y="1325880"/>
-            <a:ext cx="5577840" cy="2331720"/>
+            <a:off x="6208776" y="1325880"/>
+            <a:ext cx="5431536" cy="2331720"/>
           </a:xfrm>
           <a:prstGeom prst="roundRect">
             <a:avLst>
@@ -15317,7 +16445,7 @@
         </p:nvSpPr>
         <p:spPr>
           <a:xfrm>
-            <a:off x="6400800" y="1508760"/>
+            <a:off x="6391656" y="1508760"/>
             <a:ext cx="457200" cy="457200"/>
           </a:xfrm>
           <a:prstGeom prst="ellipse">
@@ -15337,7 +16465,7 @@
         </p:nvSpPr>
         <p:spPr>
           <a:xfrm>
-            <a:off x="6400800" y="1508760"/>
+            <a:off x="6391656" y="1508760"/>
             <a:ext cx="457200" cy="457200"/>
           </a:xfrm>
           <a:prstGeom prst="rect">
@@ -15376,8 +16504,8 @@
         </p:nvSpPr>
         <p:spPr>
           <a:xfrm>
-            <a:off x="6995160" y="1435608"/>
-            <a:ext cx="4663440" cy="2112264"/>
+            <a:off x="6986016" y="1435608"/>
+            <a:ext cx="4517136" cy="2112264"/>
           </a:xfrm>
           <a:prstGeom prst="rect">
             <a:avLst/>
@@ -15417,8 +16545,8 @@
         </p:nvSpPr>
         <p:spPr>
           <a:xfrm>
-            <a:off x="411480" y="3886200"/>
-            <a:ext cx="5577840" cy="2331720"/>
+            <a:off x="548640" y="3886200"/>
+            <a:ext cx="5431536" cy="2331720"/>
           </a:xfrm>
           <a:prstGeom prst="roundRect">
             <a:avLst>
@@ -15451,7 +16579,7 @@
         </p:nvSpPr>
         <p:spPr>
           <a:xfrm>
-            <a:off x="594360" y="4069080"/>
+            <a:off x="731520" y="4069080"/>
             <a:ext cx="457200" cy="457200"/>
           </a:xfrm>
           <a:prstGeom prst="ellipse">
@@ -15471,7 +16599,7 @@
         </p:nvSpPr>
         <p:spPr>
           <a:xfrm>
-            <a:off x="594360" y="4069080"/>
+            <a:off x="731520" y="4069080"/>
             <a:ext cx="457200" cy="457200"/>
           </a:xfrm>
           <a:prstGeom prst="rect">
@@ -15510,8 +16638,8 @@
         </p:nvSpPr>
         <p:spPr>
           <a:xfrm>
-            <a:off x="1188720" y="3995928"/>
-            <a:ext cx="4663440" cy="2112264"/>
+            <a:off x="1325880" y="3995928"/>
+            <a:ext cx="4517136" cy="2112264"/>
           </a:xfrm>
           <a:prstGeom prst="rect">
             <a:avLst/>
@@ -15551,8 +16679,8 @@
         </p:nvSpPr>
         <p:spPr>
           <a:xfrm>
-            <a:off x="6217920" y="3886200"/>
-            <a:ext cx="5577840" cy="2331720"/>
+            <a:off x="6208776" y="3886200"/>
+            <a:ext cx="5431536" cy="2331720"/>
           </a:xfrm>
           <a:prstGeom prst="roundRect">
             <a:avLst>
@@ -15585,7 +16713,7 @@
         </p:nvSpPr>
         <p:spPr>
           <a:xfrm>
-            <a:off x="6400800" y="4069080"/>
+            <a:off x="6391656" y="4069080"/>
             <a:ext cx="457200" cy="457200"/>
           </a:xfrm>
           <a:prstGeom prst="ellipse">
@@ -15605,7 +16733,7 @@
         </p:nvSpPr>
         <p:spPr>
           <a:xfrm>
-            <a:off x="6400800" y="4069080"/>
+            <a:off x="6391656" y="4069080"/>
             <a:ext cx="457200" cy="457200"/>
           </a:xfrm>
           <a:prstGeom prst="rect">
@@ -15644,8 +16772,8 @@
         </p:nvSpPr>
         <p:spPr>
           <a:xfrm>
-            <a:off x="6995160" y="3995928"/>
-            <a:ext cx="4663440" cy="2112264"/>
+            <a:off x="6986016" y="3995928"/>
+            <a:ext cx="4517136" cy="2112264"/>
           </a:xfrm>
           <a:prstGeom prst="rect">
             <a:avLst/>
@@ -15674,6 +16802,54 @@
               <a:t>cláusula de reequilíbrio</a:t>
             </a:r>
             <a:endParaRPr lang="en-US" sz="1800" dirty="0"/>
+          </a:p>
+        </p:txBody>
+      </p:sp>
+      <p:sp>
+        <p:nvSpPr>
+          <p:cNvPr id="25" name="Slide Number Placeholder 0"/>
+          <p:cNvSpPr>
+            <a:spLocks noGrp="1"/>
+          </p:cNvSpPr>
+          <p:nvPr>
+            <p:ph type="sldNum" sz="quarter" idx="4294967295"/>
+          </p:nvPr>
+        </p:nvSpPr>
+        <p:spPr>
+          <a:xfrm>
+            <a:off x="11292840" y="6556248"/>
+            <a:ext cx="548640" cy="256032"/>
+          </a:xfrm>
+          <a:prstGeom prst="rect">
+            <a:avLst/>
+          </a:prstGeom>
+          <a:extLst>
+            <a:ext uri="{C572A759-6A51-4108-AA02-DFA0A04FC94B}">
+              <ma14:wrappingTextBoxFlag xmlns:ma14="http://schemas.microsoft.com/office/mac/drawingml/2011/main" val="0"/>
+            </a:ext>
+          </a:extLst>
+        </p:spPr>
+        <p:txBody>
+          <a:bodyPr/>
+          <a:lstStyle>
+            <a:lvl1pPr>
+              <a:defRPr sz="900">
+                <a:solidFill>
+                  <a:srgbClr val="1B3A6B"/>
+                </a:solidFill>
+                <a:latin typeface="Arial"/>
+                <a:ea typeface="Arial"/>
+                <a:cs typeface="Arial"/>
+              </a:defRPr>
+            </a:lvl1pPr>
+          </a:lstStyle>
+          <a:p>
+            <a:pPr algn="r"/>
+            <a:fld id="{F7021451-1387-4CA6-816F-3879F97B5CBC}" type="slidenum">
+              <a:rPr b="1" lang="en-US"/>
+              <a:t>28</a:t>
+            </a:fld>
+            <a:endParaRPr lang="en-US"/>
           </a:p>
         </p:txBody>
       </p:sp>
@@ -15737,6 +16913,45 @@
         </p:nvSpPr>
         <p:spPr>
           <a:xfrm>
+            <a:off x="457200" y="548640"/>
+            <a:ext cx="3474720" cy="1737360"/>
+          </a:xfrm>
+          <a:prstGeom prst="rect">
+            <a:avLst/>
+          </a:prstGeom>
+          <a:noFill/>
+          <a:ln/>
+        </p:spPr>
+        <p:txBody>
+          <a:bodyPr wrap="square" rtlCol="0" anchor="ctr"/>
+          <a:lstStyle/>
+          <a:p>
+            <a:pPr indent="0" marL="0">
+              <a:buNone/>
+            </a:pPr>
+            <a:r>
+              <a:rPr lang="en-US" sz="11000" b="1" dirty="0">
+                <a:solidFill>
+                  <a:srgbClr val="11396F"/>
+                </a:solidFill>
+                <a:latin typeface="Arial" pitchFamily="34" charset="0"/>
+                <a:ea typeface="Arial" pitchFamily="34" charset="-122"/>
+                <a:cs typeface="Arial" pitchFamily="34" charset="-120"/>
+              </a:rPr>
+              <a:t>06</a:t>
+            </a:r>
+            <a:endParaRPr lang="en-US" sz="11000" dirty="0"/>
+          </a:p>
+        </p:txBody>
+      </p:sp>
+      <p:sp>
+        <p:nvSpPr>
+          <p:cNvPr id="4" name="Text 2"/>
+          <p:cNvSpPr/>
+          <p:nvPr/>
+        </p:nvSpPr>
+        <p:spPr>
+          <a:xfrm>
             <a:off x="548640" y="2194560"/>
             <a:ext cx="3291840" cy="548640"/>
           </a:xfrm>
@@ -15770,7 +16985,46 @@
       </p:sp>
       <p:sp>
         <p:nvSpPr>
-          <p:cNvPr id="4" name="Text 2"/>
+          <p:cNvPr id="5" name="Text 3"/>
+          <p:cNvSpPr/>
+          <p:nvPr/>
+        </p:nvSpPr>
+        <p:spPr>
+          <a:xfrm>
+            <a:off x="548640" y="3200400"/>
+            <a:ext cx="3383280" cy="457200"/>
+          </a:xfrm>
+          <a:prstGeom prst="rect">
+            <a:avLst/>
+          </a:prstGeom>
+          <a:noFill/>
+          <a:ln/>
+        </p:spPr>
+        <p:txBody>
+          <a:bodyPr wrap="square" rtlCol="0" anchor="ctr"/>
+          <a:lstStyle/>
+          <a:p>
+            <a:pPr indent="0" marL="0">
+              <a:buNone/>
+            </a:pPr>
+            <a:r>
+              <a:rPr lang="en-US" sz="1100" dirty="0">
+                <a:solidFill>
+                  <a:srgbClr val="C7D2E3"/>
+                </a:solidFill>
+                <a:latin typeface="Arial" pitchFamily="34" charset="0"/>
+                <a:ea typeface="Arial" pitchFamily="34" charset="-122"/>
+                <a:cs typeface="Arial" pitchFamily="34" charset="-120"/>
+              </a:rPr>
+              <a:t>M3 · Etapa 2 · Regulação e negócio</a:t>
+            </a:r>
+            <a:endParaRPr lang="en-US" sz="1100" dirty="0"/>
+          </a:p>
+        </p:txBody>
+      </p:sp>
+      <p:sp>
+        <p:nvSpPr>
+          <p:cNvPr id="6" name="Text 4"/>
           <p:cNvSpPr/>
           <p:nvPr/>
         </p:nvSpPr>
@@ -15809,7 +17063,7 @@
       </p:sp>
       <p:pic>
         <p:nvPicPr>
-          <p:cNvPr id="5" name="Image 0" descr="/www/wwwroot/rexar/gdsolar/docs/curso/slides/assets/logo-gdsolar.png">    </p:cNvPr>
+          <p:cNvPr id="7" name="Image 0" descr="/www/wwwroot/rexar/gdsolar/docs/curso/slides/assets/logo-gdsolar.png">    </p:cNvPr>
           <p:cNvPicPr>
             <a:picLocks noChangeAspect="1"/>
           </p:cNvPicPr>
@@ -15833,7 +17087,7 @@
       </p:pic>
       <p:sp>
         <p:nvSpPr>
-          <p:cNvPr id="6" name="Text 3"/>
+          <p:cNvPr id="8" name="Text 5"/>
           <p:cNvSpPr/>
           <p:nvPr/>
         </p:nvSpPr>
@@ -15874,7 +17128,7 @@
       </p:sp>
       <p:sp>
         <p:nvSpPr>
-          <p:cNvPr id="7" name="Text 4"/>
+          <p:cNvPr id="9" name="Text 6"/>
           <p:cNvSpPr/>
           <p:nvPr/>
         </p:nvSpPr>
@@ -15915,7 +17169,7 @@
       </p:sp>
       <p:sp>
         <p:nvSpPr>
-          <p:cNvPr id="8" name="Text 5"/>
+          <p:cNvPr id="10" name="Text 7"/>
           <p:cNvSpPr/>
           <p:nvPr/>
         </p:nvSpPr>
@@ -16052,7 +17306,7 @@
         </p:blipFill>
         <p:spPr>
           <a:xfrm>
-            <a:off x="411480" y="6547104"/>
+            <a:off x="548640" y="6547104"/>
             <a:ext cx="274320" cy="274320"/>
           </a:xfrm>
           <a:prstGeom prst="rect">
@@ -16068,7 +17322,7 @@
         </p:nvSpPr>
         <p:spPr>
           <a:xfrm>
-            <a:off x="749808" y="6528816"/>
+            <a:off x="886968" y="6528816"/>
             <a:ext cx="6400800" cy="310896"/>
           </a:xfrm>
           <a:prstGeom prst="rect">
@@ -16108,7 +17362,7 @@
         <p:spPr>
           <a:xfrm>
             <a:off x="7132320" y="6528816"/>
-            <a:ext cx="4663440" cy="310896"/>
+            <a:ext cx="4023360" cy="310896"/>
           </a:xfrm>
           <a:prstGeom prst="rect">
             <a:avLst/>
@@ -16146,7 +17400,7 @@
         </p:nvSpPr>
         <p:spPr>
           <a:xfrm>
-            <a:off x="411480" y="384048"/>
+            <a:off x="548640" y="384048"/>
             <a:ext cx="82296" cy="658368"/>
           </a:xfrm>
           <a:prstGeom prst="rect">
@@ -16166,7 +17420,7 @@
         </p:nvSpPr>
         <p:spPr>
           <a:xfrm>
-            <a:off x="640080" y="292608"/>
+            <a:off x="777240" y="292608"/>
             <a:ext cx="10972800" cy="274320"/>
           </a:xfrm>
           <a:prstGeom prst="rect">
@@ -16205,8 +17459,8 @@
         </p:nvSpPr>
         <p:spPr>
           <a:xfrm>
-            <a:off x="640080" y="530352"/>
-            <a:ext cx="11155680" cy="566928"/>
+            <a:off x="777240" y="530352"/>
+            <a:ext cx="10881360" cy="566928"/>
           </a:xfrm>
           <a:prstGeom prst="rect">
             <a:avLst/>
@@ -16246,12 +17500,12 @@
         </p:nvSpPr>
         <p:spPr>
           <a:xfrm>
-            <a:off x="411480" y="1325880"/>
-            <a:ext cx="3611880" cy="4937760"/>
+            <a:off x="548640" y="1325880"/>
+            <a:ext cx="3514344" cy="4937760"/>
           </a:xfrm>
           <a:prstGeom prst="roundRect">
             <a:avLst>
-              <a:gd name="adj" fmla="val 2025"/>
+              <a:gd name="adj" fmla="val 2082"/>
             </a:avLst>
           </a:prstGeom>
           <a:solidFill>
@@ -16280,8 +17534,8 @@
         </p:nvSpPr>
         <p:spPr>
           <a:xfrm>
-            <a:off x="411480" y="1325880"/>
-            <a:ext cx="3611880" cy="109728"/>
+            <a:off x="548640" y="1325880"/>
+            <a:ext cx="3514344" cy="109728"/>
           </a:xfrm>
           <a:prstGeom prst="rect">
             <a:avLst/>
@@ -16300,8 +17554,8 @@
         </p:nvSpPr>
         <p:spPr>
           <a:xfrm>
-            <a:off x="685800" y="1554480"/>
-            <a:ext cx="3063240" cy="685800"/>
+            <a:off x="822960" y="1554480"/>
+            <a:ext cx="2965704" cy="685800"/>
           </a:xfrm>
           <a:prstGeom prst="rect">
             <a:avLst/>
@@ -16341,8 +17595,8 @@
         </p:nvSpPr>
         <p:spPr>
           <a:xfrm>
-            <a:off x="685800" y="2286000"/>
-            <a:ext cx="3063240" cy="3749040"/>
+            <a:off x="822960" y="2286000"/>
+            <a:ext cx="2965704" cy="3749040"/>
           </a:xfrm>
           <a:prstGeom prst="rect">
             <a:avLst/>
@@ -16470,12 +17724,12 @@
         </p:nvSpPr>
         <p:spPr>
           <a:xfrm>
-            <a:off x="4297680" y="1325880"/>
-            <a:ext cx="3611880" cy="4937760"/>
+            <a:off x="4337304" y="1325880"/>
+            <a:ext cx="3514344" cy="4937760"/>
           </a:xfrm>
           <a:prstGeom prst="roundRect">
             <a:avLst>
-              <a:gd name="adj" fmla="val 2025"/>
+              <a:gd name="adj" fmla="val 2082"/>
             </a:avLst>
           </a:prstGeom>
           <a:solidFill>
@@ -16504,8 +17758,8 @@
         </p:nvSpPr>
         <p:spPr>
           <a:xfrm>
-            <a:off x="4297680" y="1325880"/>
-            <a:ext cx="3611880" cy="109728"/>
+            <a:off x="4337304" y="1325880"/>
+            <a:ext cx="3514344" cy="109728"/>
           </a:xfrm>
           <a:prstGeom prst="rect">
             <a:avLst/>
@@ -16524,8 +17778,8 @@
         </p:nvSpPr>
         <p:spPr>
           <a:xfrm>
-            <a:off x="4572000" y="1554480"/>
-            <a:ext cx="3063240" cy="685800"/>
+            <a:off x="4611624" y="1554480"/>
+            <a:ext cx="2965704" cy="685800"/>
           </a:xfrm>
           <a:prstGeom prst="rect">
             <a:avLst/>
@@ -16565,8 +17819,8 @@
         </p:nvSpPr>
         <p:spPr>
           <a:xfrm>
-            <a:off x="4572000" y="2286000"/>
-            <a:ext cx="3063240" cy="3749040"/>
+            <a:off x="4611624" y="2286000"/>
+            <a:ext cx="2965704" cy="3749040"/>
           </a:xfrm>
           <a:prstGeom prst="rect">
             <a:avLst/>
@@ -16588,7 +17842,7 @@
               <a:buChar char="●"/>
             </a:pPr>
             <a:r>
-              <a:rPr lang="en-US" sz="1400" dirty="0">
+              <a:rPr lang="en-US" sz="1700" dirty="0">
                 <a:solidFill>
                   <a:srgbClr val="1F2937"/>
                 </a:solidFill>
@@ -16598,7 +17852,7 @@
               </a:rPr>
               <a:t>Asset-light: a usina é de terceiros; você capta clientes e gere</a:t>
             </a:r>
-            <a:endParaRPr lang="en-US" sz="1400" dirty="0"/>
+            <a:endParaRPr lang="en-US" sz="1700" dirty="0"/>
           </a:p>
           <a:p>
             <a:pPr marL="342900" indent="-342900">
@@ -16609,7 +17863,7 @@
               <a:buChar char="●"/>
             </a:pPr>
             <a:r>
-              <a:rPr lang="en-US" sz="1400" dirty="0">
+              <a:rPr lang="en-US" sz="1700" dirty="0">
                 <a:solidFill>
                   <a:srgbClr val="1F2937"/>
                 </a:solidFill>
@@ -16619,7 +17873,7 @@
               </a:rPr>
               <a:t>+ pouco capital · + escala rápida · − margem menor · − depende de conseguir usinas</a:t>
             </a:r>
-            <a:endParaRPr lang="en-US" sz="1400" dirty="0"/>
+            <a:endParaRPr lang="en-US" sz="1700" dirty="0"/>
           </a:p>
         </p:txBody>
       </p:sp>
@@ -16631,12 +17885,12 @@
         </p:nvSpPr>
         <p:spPr>
           <a:xfrm>
-            <a:off x="8183880" y="1325880"/>
-            <a:ext cx="3611880" cy="4937760"/>
+            <a:off x="8125968" y="1325880"/>
+            <a:ext cx="3514344" cy="4937760"/>
           </a:xfrm>
           <a:prstGeom prst="roundRect">
             <a:avLst>
-              <a:gd name="adj" fmla="val 2025"/>
+              <a:gd name="adj" fmla="val 2082"/>
             </a:avLst>
           </a:prstGeom>
           <a:solidFill>
@@ -16665,8 +17919,8 @@
         </p:nvSpPr>
         <p:spPr>
           <a:xfrm>
-            <a:off x="8183880" y="1325880"/>
-            <a:ext cx="3611880" cy="109728"/>
+            <a:off x="8125968" y="1325880"/>
+            <a:ext cx="3514344" cy="109728"/>
           </a:xfrm>
           <a:prstGeom prst="rect">
             <a:avLst/>
@@ -16685,8 +17939,8 @@
         </p:nvSpPr>
         <p:spPr>
           <a:xfrm>
-            <a:off x="8458200" y="1554480"/>
-            <a:ext cx="3063240" cy="685800"/>
+            <a:off x="8400288" y="1554480"/>
+            <a:ext cx="2965704" cy="685800"/>
           </a:xfrm>
           <a:prstGeom prst="rect">
             <a:avLst/>
@@ -16726,8 +17980,8 @@
         </p:nvSpPr>
         <p:spPr>
           <a:xfrm>
-            <a:off x="8458200" y="2286000"/>
-            <a:ext cx="3063240" cy="3749040"/>
+            <a:off x="8400288" y="2286000"/>
+            <a:ext cx="2965704" cy="3749040"/>
           </a:xfrm>
           <a:prstGeom prst="rect">
             <a:avLst/>
@@ -16749,7 +18003,7 @@
               <a:buChar char="●"/>
             </a:pPr>
             <a:r>
-              <a:rPr lang="en-US" sz="1400" dirty="0">
+              <a:rPr lang="en-US" sz="1700" dirty="0">
                 <a:solidFill>
                   <a:srgbClr val="1F2937"/>
                 </a:solidFill>
@@ -16759,7 +18013,7 @@
               </a:rPr>
               <a:t>Asset-heavy: você investe na usina e opera</a:t>
             </a:r>
-            <a:endParaRPr lang="en-US" sz="1400" dirty="0"/>
+            <a:endParaRPr lang="en-US" sz="1700" dirty="0"/>
           </a:p>
           <a:p>
             <a:pPr marL="342900" indent="-342900">
@@ -16770,7 +18024,7 @@
               <a:buChar char="●"/>
             </a:pPr>
             <a:r>
-              <a:rPr lang="en-US" sz="1400" dirty="0">
+              <a:rPr lang="en-US" sz="1700" dirty="0">
                 <a:solidFill>
                   <a:srgbClr val="1F2937"/>
                 </a:solidFill>
@@ -16780,7 +18034,55 @@
               </a:rPr>
               <a:t>+ fica com toda a margem · + ativo de longo prazo · − capital alto · − risco concentrado</a:t>
             </a:r>
-            <a:endParaRPr lang="en-US" sz="1400" dirty="0"/>
+            <a:endParaRPr lang="en-US" sz="1700" dirty="0"/>
+          </a:p>
+        </p:txBody>
+      </p:sp>
+      <p:sp>
+        <p:nvSpPr>
+          <p:cNvPr id="25" name="Slide Number Placeholder 0"/>
+          <p:cNvSpPr>
+            <a:spLocks noGrp="1"/>
+          </p:cNvSpPr>
+          <p:nvPr>
+            <p:ph type="sldNum" sz="quarter" idx="4294967295"/>
+          </p:nvPr>
+        </p:nvSpPr>
+        <p:spPr>
+          <a:xfrm>
+            <a:off x="11292840" y="6556248"/>
+            <a:ext cx="548640" cy="256032"/>
+          </a:xfrm>
+          <a:prstGeom prst="rect">
+            <a:avLst/>
+          </a:prstGeom>
+          <a:extLst>
+            <a:ext uri="{C572A759-6A51-4108-AA02-DFA0A04FC94B}">
+              <ma14:wrappingTextBoxFlag xmlns:ma14="http://schemas.microsoft.com/office/mac/drawingml/2011/main" val="0"/>
+            </a:ext>
+          </a:extLst>
+        </p:spPr>
+        <p:txBody>
+          <a:bodyPr/>
+          <a:lstStyle>
+            <a:lvl1pPr>
+              <a:defRPr sz="900">
+                <a:solidFill>
+                  <a:srgbClr val="1B3A6B"/>
+                </a:solidFill>
+                <a:latin typeface="Arial"/>
+                <a:ea typeface="Arial"/>
+                <a:cs typeface="Arial"/>
+              </a:defRPr>
+            </a:lvl1pPr>
+          </a:lstStyle>
+          <a:p>
+            <a:pPr algn="r"/>
+            <a:fld id="{F7021451-1387-4CA6-816F-3879F97B5CBC}" type="slidenum">
+              <a:rPr b="1" lang="en-US"/>
+              <a:t>3</a:t>
+            </a:fld>
+            <a:endParaRPr lang="en-US"/>
           </a:p>
         </p:txBody>
       </p:sp>
@@ -16857,7 +18159,7 @@
         </p:blipFill>
         <p:spPr>
           <a:xfrm>
-            <a:off x="411480" y="6547104"/>
+            <a:off x="548640" y="6547104"/>
             <a:ext cx="274320" cy="274320"/>
           </a:xfrm>
           <a:prstGeom prst="rect">
@@ -16873,7 +18175,7 @@
         </p:nvSpPr>
         <p:spPr>
           <a:xfrm>
-            <a:off x="749808" y="6528816"/>
+            <a:off x="886968" y="6528816"/>
             <a:ext cx="6400800" cy="310896"/>
           </a:xfrm>
           <a:prstGeom prst="rect">
@@ -16913,7 +18215,7 @@
         <p:spPr>
           <a:xfrm>
             <a:off x="7132320" y="6528816"/>
-            <a:ext cx="4663440" cy="310896"/>
+            <a:ext cx="4023360" cy="310896"/>
           </a:xfrm>
           <a:prstGeom prst="rect">
             <a:avLst/>
@@ -16951,7 +18253,7 @@
         </p:nvSpPr>
         <p:spPr>
           <a:xfrm>
-            <a:off x="411480" y="384048"/>
+            <a:off x="548640" y="384048"/>
             <a:ext cx="82296" cy="658368"/>
           </a:xfrm>
           <a:prstGeom prst="rect">
@@ -16971,7 +18273,7 @@
         </p:nvSpPr>
         <p:spPr>
           <a:xfrm>
-            <a:off x="640080" y="292608"/>
+            <a:off x="777240" y="292608"/>
             <a:ext cx="10972800" cy="274320"/>
           </a:xfrm>
           <a:prstGeom prst="rect">
@@ -17010,8 +18312,8 @@
         </p:nvSpPr>
         <p:spPr>
           <a:xfrm>
-            <a:off x="640080" y="530352"/>
-            <a:ext cx="11155680" cy="566928"/>
+            <a:off x="777240" y="530352"/>
+            <a:ext cx="10881360" cy="566928"/>
           </a:xfrm>
           <a:prstGeom prst="rect">
             <a:avLst/>
@@ -17051,12 +18353,12 @@
         </p:nvSpPr>
         <p:spPr>
           <a:xfrm>
-            <a:off x="411480" y="1325880"/>
-            <a:ext cx="3642360" cy="4892040"/>
+            <a:off x="548640" y="1325880"/>
+            <a:ext cx="3544824" cy="4892040"/>
           </a:xfrm>
           <a:prstGeom prst="roundRect">
             <a:avLst>
-              <a:gd name="adj" fmla="val 2008"/>
+              <a:gd name="adj" fmla="val 2064"/>
             </a:avLst>
           </a:prstGeom>
           <a:solidFill>
@@ -17085,7 +18387,7 @@
         </p:nvSpPr>
         <p:spPr>
           <a:xfrm>
-            <a:off x="594360" y="1508760"/>
+            <a:off x="731520" y="1508760"/>
             <a:ext cx="457200" cy="457200"/>
           </a:xfrm>
           <a:prstGeom prst="ellipse">
@@ -17105,7 +18407,7 @@
         </p:nvSpPr>
         <p:spPr>
           <a:xfrm>
-            <a:off x="594360" y="1508760"/>
+            <a:off x="731520" y="1508760"/>
             <a:ext cx="457200" cy="457200"/>
           </a:xfrm>
           <a:prstGeom prst="rect">
@@ -17144,8 +18446,8 @@
         </p:nvSpPr>
         <p:spPr>
           <a:xfrm>
-            <a:off x="1188720" y="1435608"/>
-            <a:ext cx="2727960" cy="4672584"/>
+            <a:off x="1325880" y="1435608"/>
+            <a:ext cx="2630424" cy="4672584"/>
           </a:xfrm>
           <a:prstGeom prst="rect">
             <a:avLst/>
@@ -17185,12 +18487,12 @@
         </p:nvSpPr>
         <p:spPr>
           <a:xfrm>
-            <a:off x="4282440" y="1325880"/>
-            <a:ext cx="3642360" cy="4892040"/>
+            <a:off x="4322064" y="1325880"/>
+            <a:ext cx="3544824" cy="4892040"/>
           </a:xfrm>
           <a:prstGeom prst="roundRect">
             <a:avLst>
-              <a:gd name="adj" fmla="val 2008"/>
+              <a:gd name="adj" fmla="val 2064"/>
             </a:avLst>
           </a:prstGeom>
           <a:solidFill>
@@ -17219,7 +18521,7 @@
         </p:nvSpPr>
         <p:spPr>
           <a:xfrm>
-            <a:off x="4465320" y="1508760"/>
+            <a:off x="4504944" y="1508760"/>
             <a:ext cx="457200" cy="457200"/>
           </a:xfrm>
           <a:prstGeom prst="ellipse">
@@ -17239,7 +18541,7 @@
         </p:nvSpPr>
         <p:spPr>
           <a:xfrm>
-            <a:off x="4465320" y="1508760"/>
+            <a:off x="4504944" y="1508760"/>
             <a:ext cx="457200" cy="457200"/>
           </a:xfrm>
           <a:prstGeom prst="rect">
@@ -17278,8 +18580,8 @@
         </p:nvSpPr>
         <p:spPr>
           <a:xfrm>
-            <a:off x="5059680" y="1435608"/>
-            <a:ext cx="2727960" cy="4672584"/>
+            <a:off x="5099304" y="1435608"/>
+            <a:ext cx="2630424" cy="4672584"/>
           </a:xfrm>
           <a:prstGeom prst="rect">
             <a:avLst/>
@@ -17319,12 +18621,12 @@
         </p:nvSpPr>
         <p:spPr>
           <a:xfrm>
-            <a:off x="8153400" y="1325880"/>
-            <a:ext cx="3642360" cy="4892040"/>
+            <a:off x="8095488" y="1325880"/>
+            <a:ext cx="3544824" cy="4892040"/>
           </a:xfrm>
           <a:prstGeom prst="roundRect">
             <a:avLst>
-              <a:gd name="adj" fmla="val 2008"/>
+              <a:gd name="adj" fmla="val 2064"/>
             </a:avLst>
           </a:prstGeom>
           <a:solidFill>
@@ -17353,7 +18655,7 @@
         </p:nvSpPr>
         <p:spPr>
           <a:xfrm>
-            <a:off x="8336280" y="1508760"/>
+            <a:off x="8278368" y="1508760"/>
             <a:ext cx="457200" cy="457200"/>
           </a:xfrm>
           <a:prstGeom prst="ellipse">
@@ -17373,7 +18675,7 @@
         </p:nvSpPr>
         <p:spPr>
           <a:xfrm>
-            <a:off x="8336280" y="1508760"/>
+            <a:off x="8278368" y="1508760"/>
             <a:ext cx="457200" cy="457200"/>
           </a:xfrm>
           <a:prstGeom prst="rect">
@@ -17412,8 +18714,8 @@
         </p:nvSpPr>
         <p:spPr>
           <a:xfrm>
-            <a:off x="8930640" y="1435608"/>
-            <a:ext cx="2727960" cy="4672584"/>
+            <a:off x="8872728" y="1435608"/>
+            <a:ext cx="2630424" cy="4672584"/>
           </a:xfrm>
           <a:prstGeom prst="rect">
             <a:avLst/>
@@ -17442,6 +18744,54 @@
               <a:t>Em 2028 (e no cenário pessimista de 2029) a empresa ainda dá lucro?</a:t>
             </a:r>
             <a:endParaRPr lang="en-US" sz="1800" dirty="0"/>
+          </a:p>
+        </p:txBody>
+      </p:sp>
+      <p:sp>
+        <p:nvSpPr>
+          <p:cNvPr id="25" name="Slide Number Placeholder 0"/>
+          <p:cNvSpPr>
+            <a:spLocks noGrp="1"/>
+          </p:cNvSpPr>
+          <p:nvPr>
+            <p:ph type="sldNum" sz="quarter" idx="4294967295"/>
+          </p:nvPr>
+        </p:nvSpPr>
+        <p:spPr>
+          <a:xfrm>
+            <a:off x="11292840" y="6556248"/>
+            <a:ext cx="548640" cy="256032"/>
+          </a:xfrm>
+          <a:prstGeom prst="rect">
+            <a:avLst/>
+          </a:prstGeom>
+          <a:extLst>
+            <a:ext uri="{C572A759-6A51-4108-AA02-DFA0A04FC94B}">
+              <ma14:wrappingTextBoxFlag xmlns:ma14="http://schemas.microsoft.com/office/mac/drawingml/2011/main" val="0"/>
+            </a:ext>
+          </a:extLst>
+        </p:spPr>
+        <p:txBody>
+          <a:bodyPr/>
+          <a:lstStyle>
+            <a:lvl1pPr>
+              <a:defRPr sz="900">
+                <a:solidFill>
+                  <a:srgbClr val="1B3A6B"/>
+                </a:solidFill>
+                <a:latin typeface="Arial"/>
+                <a:ea typeface="Arial"/>
+                <a:cs typeface="Arial"/>
+              </a:defRPr>
+            </a:lvl1pPr>
+          </a:lstStyle>
+          <a:p>
+            <a:pPr algn="r"/>
+            <a:fld id="{F7021451-1387-4CA6-816F-3879F97B5CBC}" type="slidenum">
+              <a:rPr b="1" lang="en-US"/>
+              <a:t>30</a:t>
+            </a:fld>
+            <a:endParaRPr lang="en-US"/>
           </a:p>
         </p:txBody>
       </p:sp>
@@ -17518,7 +18868,7 @@
         </p:blipFill>
         <p:spPr>
           <a:xfrm>
-            <a:off x="411480" y="6547104"/>
+            <a:off x="548640" y="6547104"/>
             <a:ext cx="274320" cy="274320"/>
           </a:xfrm>
           <a:prstGeom prst="rect">
@@ -17534,7 +18884,7 @@
         </p:nvSpPr>
         <p:spPr>
           <a:xfrm>
-            <a:off x="749808" y="6528816"/>
+            <a:off x="886968" y="6528816"/>
             <a:ext cx="6400800" cy="310896"/>
           </a:xfrm>
           <a:prstGeom prst="rect">
@@ -17574,7 +18924,7 @@
         <p:spPr>
           <a:xfrm>
             <a:off x="7132320" y="6528816"/>
-            <a:ext cx="4663440" cy="310896"/>
+            <a:ext cx="4023360" cy="310896"/>
           </a:xfrm>
           <a:prstGeom prst="rect">
             <a:avLst/>
@@ -17612,7 +18962,7 @@
         </p:nvSpPr>
         <p:spPr>
           <a:xfrm>
-            <a:off x="411480" y="384048"/>
+            <a:off x="548640" y="384048"/>
             <a:ext cx="82296" cy="658368"/>
           </a:xfrm>
           <a:prstGeom prst="rect">
@@ -17632,7 +18982,7 @@
         </p:nvSpPr>
         <p:spPr>
           <a:xfrm>
-            <a:off x="640080" y="292608"/>
+            <a:off x="777240" y="292608"/>
             <a:ext cx="10972800" cy="274320"/>
           </a:xfrm>
           <a:prstGeom prst="rect">
@@ -17671,8 +19021,8 @@
         </p:nvSpPr>
         <p:spPr>
           <a:xfrm>
-            <a:off x="640080" y="530352"/>
-            <a:ext cx="11155680" cy="566928"/>
+            <a:off x="777240" y="530352"/>
+            <a:ext cx="10881360" cy="566928"/>
           </a:xfrm>
           <a:prstGeom prst="rect">
             <a:avLst/>
@@ -17975,6 +19325,54 @@
               <a:t>Entradas: crédito · % desconto · % taxa · custos variáveis · custos fixos · comissão · Saídas: margem/kWh · ponto de equilíbrio · resultado por ano</a:t>
             </a:r>
             <a:endParaRPr lang="en-US" sz="1500" dirty="0"/>
+          </a:p>
+        </p:txBody>
+      </p:sp>
+      <p:sp>
+        <p:nvSpPr>
+          <p:cNvPr id="25" name="Slide Number Placeholder 0"/>
+          <p:cNvSpPr>
+            <a:spLocks noGrp="1"/>
+          </p:cNvSpPr>
+          <p:nvPr>
+            <p:ph type="sldNum" sz="quarter" idx="4294967295"/>
+          </p:nvPr>
+        </p:nvSpPr>
+        <p:spPr>
+          <a:xfrm>
+            <a:off x="11292840" y="6556248"/>
+            <a:ext cx="548640" cy="256032"/>
+          </a:xfrm>
+          <a:prstGeom prst="rect">
+            <a:avLst/>
+          </a:prstGeom>
+          <a:extLst>
+            <a:ext uri="{C572A759-6A51-4108-AA02-DFA0A04FC94B}">
+              <ma14:wrappingTextBoxFlag xmlns:ma14="http://schemas.microsoft.com/office/mac/drawingml/2011/main" val="0"/>
+            </a:ext>
+          </a:extLst>
+        </p:spPr>
+        <p:txBody>
+          <a:bodyPr/>
+          <a:lstStyle>
+            <a:lvl1pPr>
+              <a:defRPr sz="900">
+                <a:solidFill>
+                  <a:srgbClr val="1B3A6B"/>
+                </a:solidFill>
+                <a:latin typeface="Arial"/>
+                <a:ea typeface="Arial"/>
+                <a:cs typeface="Arial"/>
+              </a:defRPr>
+            </a:lvl1pPr>
+          </a:lstStyle>
+          <a:p>
+            <a:pPr algn="r"/>
+            <a:fld id="{F7021451-1387-4CA6-816F-3879F97B5CBC}" type="slidenum">
+              <a:rPr b="1" lang="en-US"/>
+              <a:t>31</a:t>
+            </a:fld>
+            <a:endParaRPr lang="en-US"/>
           </a:p>
         </p:txBody>
       </p:sp>
@@ -18051,7 +19449,7 @@
         </p:blipFill>
         <p:spPr>
           <a:xfrm>
-            <a:off x="411480" y="6547104"/>
+            <a:off x="548640" y="6547104"/>
             <a:ext cx="274320" cy="274320"/>
           </a:xfrm>
           <a:prstGeom prst="rect">
@@ -18067,7 +19465,7 @@
         </p:nvSpPr>
         <p:spPr>
           <a:xfrm>
-            <a:off x="749808" y="6528816"/>
+            <a:off x="886968" y="6528816"/>
             <a:ext cx="6400800" cy="310896"/>
           </a:xfrm>
           <a:prstGeom prst="rect">
@@ -18107,7 +19505,7 @@
         <p:spPr>
           <a:xfrm>
             <a:off x="7132320" y="6528816"/>
-            <a:ext cx="4663440" cy="310896"/>
+            <a:ext cx="4023360" cy="310896"/>
           </a:xfrm>
           <a:prstGeom prst="rect">
             <a:avLst/>
@@ -18145,7 +19543,7 @@
         </p:nvSpPr>
         <p:spPr>
           <a:xfrm>
-            <a:off x="411480" y="384048"/>
+            <a:off x="548640" y="384048"/>
             <a:ext cx="82296" cy="658368"/>
           </a:xfrm>
           <a:prstGeom prst="rect">
@@ -18165,7 +19563,7 @@
         </p:nvSpPr>
         <p:spPr>
           <a:xfrm>
-            <a:off x="640080" y="292608"/>
+            <a:off x="777240" y="292608"/>
             <a:ext cx="10972800" cy="274320"/>
           </a:xfrm>
           <a:prstGeom prst="rect">
@@ -18204,8 +19602,8 @@
         </p:nvSpPr>
         <p:spPr>
           <a:xfrm>
-            <a:off x="640080" y="530352"/>
-            <a:ext cx="11155680" cy="566928"/>
+            <a:off x="777240" y="530352"/>
+            <a:ext cx="10881360" cy="566928"/>
           </a:xfrm>
           <a:prstGeom prst="rect">
             <a:avLst/>
@@ -18245,8 +19643,8 @@
         </p:nvSpPr>
         <p:spPr>
           <a:xfrm>
-            <a:off x="411480" y="1325880"/>
-            <a:ext cx="5577840" cy="411480"/>
+            <a:off x="548640" y="1325880"/>
+            <a:ext cx="5394960" cy="411480"/>
           </a:xfrm>
           <a:prstGeom prst="rect">
             <a:avLst/>
@@ -18284,8 +19682,8 @@
         </p:nvSpPr>
         <p:spPr>
           <a:xfrm>
-            <a:off x="411480" y="1783080"/>
-            <a:ext cx="5577840" cy="4480560"/>
+            <a:off x="548640" y="1783080"/>
+            <a:ext cx="5394960" cy="4480560"/>
           </a:xfrm>
           <a:prstGeom prst="rect">
             <a:avLst/>
@@ -18306,7 +19704,7 @@
               <a:buNone/>
             </a:pPr>
             <a:r>
-              <a:rPr lang="en-US" sz="1400" dirty="0">
+              <a:rPr lang="en-US" sz="1600" dirty="0">
                 <a:solidFill>
                   <a:srgbClr val="1F2937"/>
                 </a:solidFill>
@@ -18316,7 +19714,7 @@
               </a:rPr>
               <a:t>1. Crédito R$ 0,68; desconto 20%; taxa 15%. Quanto o cliente paga, a empresa retém e o produtor recebe por kWh?</a:t>
             </a:r>
-            <a:endParaRPr lang="en-US" sz="1400" dirty="0"/>
+            <a:endParaRPr lang="en-US" sz="1600" dirty="0"/>
           </a:p>
           <a:p>
             <a:pPr indent="0" marL="0">
@@ -18326,7 +19724,7 @@
               <a:buNone/>
             </a:pPr>
             <a:r>
-              <a:rPr lang="en-US" sz="1400" dirty="0">
+              <a:rPr lang="en-US" sz="1600" dirty="0">
                 <a:solidFill>
                   <a:srgbClr val="1F2937"/>
                 </a:solidFill>
@@ -18336,7 +19734,7 @@
               </a:rPr>
               <a:t>2. Custos fixos de R$ 18.000/mês e margem de contribuição de R$ 0,08/kWh: ponto de equilíbrio?</a:t>
             </a:r>
-            <a:endParaRPr lang="en-US" sz="1400" dirty="0"/>
+            <a:endParaRPr lang="en-US" sz="1600" dirty="0"/>
           </a:p>
           <a:p>
             <a:pPr indent="0" marL="0">
@@ -18346,7 +19744,7 @@
               <a:buNone/>
             </a:pPr>
             <a:r>
-              <a:rPr lang="en-US" sz="1400" dirty="0">
+              <a:rPr lang="en-US" sz="1600" dirty="0">
                 <a:solidFill>
                   <a:srgbClr val="1F2937"/>
                 </a:solidFill>
@@ -18356,7 +19754,7 @@
               </a:rPr>
               <a:t>3. Com o crédito caindo de 0,68 para 0,62, quanto cai a receita da taxa de administração por kWh?</a:t>
             </a:r>
-            <a:endParaRPr lang="en-US" sz="1400" dirty="0"/>
+            <a:endParaRPr lang="en-US" sz="1600" dirty="0"/>
           </a:p>
         </p:txBody>
       </p:sp>
@@ -18368,8 +19766,8 @@
         </p:nvSpPr>
         <p:spPr>
           <a:xfrm>
-            <a:off x="6309360" y="1325880"/>
-            <a:ext cx="5486400" cy="4937760"/>
+            <a:off x="6172200" y="1325880"/>
+            <a:ext cx="5468112" cy="4937760"/>
           </a:xfrm>
           <a:prstGeom prst="roundRect">
             <a:avLst>
@@ -18390,8 +19788,8 @@
         </p:nvSpPr>
         <p:spPr>
           <a:xfrm>
-            <a:off x="6629400" y="1554480"/>
-            <a:ext cx="4846320" cy="4480560"/>
+            <a:off x="6492240" y="1554480"/>
+            <a:ext cx="4828032" cy="4480560"/>
           </a:xfrm>
           <a:prstGeom prst="rect">
             <a:avLst/>
@@ -18435,6 +19833,54 @@
               <a:t>A conta do meu negócio (aba "Meu modelo" da calculadora): modelo escolhido (asset-light/heavy/híbrido), estrutura jurídica pretendida, desconto ao cliente, taxa de administração, repasse ao produtor, custos fixos mensais, ponto de equilíbrio em kWh e em número de clientes, cenário 2026/2027/2028.</a:t>
             </a:r>
             <a:endParaRPr lang="en-US" sz="1300" dirty="0"/>
+          </a:p>
+        </p:txBody>
+      </p:sp>
+      <p:sp>
+        <p:nvSpPr>
+          <p:cNvPr id="25" name="Slide Number Placeholder 0"/>
+          <p:cNvSpPr>
+            <a:spLocks noGrp="1"/>
+          </p:cNvSpPr>
+          <p:nvPr>
+            <p:ph type="sldNum" sz="quarter" idx="4294967295"/>
+          </p:nvPr>
+        </p:nvSpPr>
+        <p:spPr>
+          <a:xfrm>
+            <a:off x="11292840" y="6556248"/>
+            <a:ext cx="548640" cy="256032"/>
+          </a:xfrm>
+          <a:prstGeom prst="rect">
+            <a:avLst/>
+          </a:prstGeom>
+          <a:extLst>
+            <a:ext uri="{C572A759-6A51-4108-AA02-DFA0A04FC94B}">
+              <ma14:wrappingTextBoxFlag xmlns:ma14="http://schemas.microsoft.com/office/mac/drawingml/2011/main" val="0"/>
+            </a:ext>
+          </a:extLst>
+        </p:spPr>
+        <p:txBody>
+          <a:bodyPr/>
+          <a:lstStyle>
+            <a:lvl1pPr>
+              <a:defRPr sz="900">
+                <a:solidFill>
+                  <a:srgbClr val="1B3A6B"/>
+                </a:solidFill>
+                <a:latin typeface="Arial"/>
+                <a:ea typeface="Arial"/>
+                <a:cs typeface="Arial"/>
+              </a:defRPr>
+            </a:lvl1pPr>
+          </a:lstStyle>
+          <a:p>
+            <a:pPr algn="r"/>
+            <a:fld id="{F7021451-1387-4CA6-816F-3879F97B5CBC}" type="slidenum">
+              <a:rPr b="1" lang="en-US"/>
+              <a:t>32</a:t>
+            </a:fld>
+            <a:endParaRPr lang="en-US"/>
           </a:p>
         </p:txBody>
       </p:sp>
@@ -18511,7 +19957,7 @@
         </p:blipFill>
         <p:spPr>
           <a:xfrm>
-            <a:off x="411480" y="6547104"/>
+            <a:off x="548640" y="6547104"/>
             <a:ext cx="274320" cy="274320"/>
           </a:xfrm>
           <a:prstGeom prst="rect">
@@ -18527,7 +19973,7 @@
         </p:nvSpPr>
         <p:spPr>
           <a:xfrm>
-            <a:off x="749808" y="6528816"/>
+            <a:off x="886968" y="6528816"/>
             <a:ext cx="6400800" cy="310896"/>
           </a:xfrm>
           <a:prstGeom prst="rect">
@@ -18567,7 +20013,7 @@
         <p:spPr>
           <a:xfrm>
             <a:off x="7132320" y="6528816"/>
-            <a:ext cx="4663440" cy="310896"/>
+            <a:ext cx="4023360" cy="310896"/>
           </a:xfrm>
           <a:prstGeom prst="rect">
             <a:avLst/>
@@ -18605,7 +20051,7 @@
         </p:nvSpPr>
         <p:spPr>
           <a:xfrm>
-            <a:off x="411480" y="384048"/>
+            <a:off x="548640" y="384048"/>
             <a:ext cx="82296" cy="658368"/>
           </a:xfrm>
           <a:prstGeom prst="rect">
@@ -18625,7 +20071,7 @@
         </p:nvSpPr>
         <p:spPr>
           <a:xfrm>
-            <a:off x="640080" y="292608"/>
+            <a:off x="777240" y="292608"/>
             <a:ext cx="10972800" cy="274320"/>
           </a:xfrm>
           <a:prstGeom prst="rect">
@@ -18664,8 +20110,8 @@
         </p:nvSpPr>
         <p:spPr>
           <a:xfrm>
-            <a:off x="640080" y="530352"/>
-            <a:ext cx="11155680" cy="566928"/>
+            <a:off x="777240" y="530352"/>
+            <a:ext cx="10881360" cy="566928"/>
           </a:xfrm>
           <a:prstGeom prst="rect">
             <a:avLst/>
@@ -18705,8 +20151,8 @@
         </p:nvSpPr>
         <p:spPr>
           <a:xfrm>
-            <a:off x="411480" y="1325880"/>
-            <a:ext cx="5554980" cy="4937760"/>
+            <a:off x="548640" y="1325880"/>
+            <a:ext cx="5408676" cy="4937760"/>
           </a:xfrm>
           <a:prstGeom prst="roundRect">
             <a:avLst>
@@ -18739,8 +20185,8 @@
         </p:nvSpPr>
         <p:spPr>
           <a:xfrm>
-            <a:off x="411480" y="1325880"/>
-            <a:ext cx="5554980" cy="109728"/>
+            <a:off x="548640" y="1325880"/>
+            <a:ext cx="5408676" cy="109728"/>
           </a:xfrm>
           <a:prstGeom prst="rect">
             <a:avLst/>
@@ -18759,8 +20205,8 @@
         </p:nvSpPr>
         <p:spPr>
           <a:xfrm>
-            <a:off x="685800" y="1554480"/>
-            <a:ext cx="5006340" cy="685800"/>
+            <a:off x="822960" y="1554480"/>
+            <a:ext cx="4860036" cy="685800"/>
           </a:xfrm>
           <a:prstGeom prst="rect">
             <a:avLst/>
@@ -18800,8 +20246,8 @@
         </p:nvSpPr>
         <p:spPr>
           <a:xfrm>
-            <a:off x="685800" y="2286000"/>
-            <a:ext cx="5006340" cy="3749040"/>
+            <a:off x="822960" y="2286000"/>
+            <a:ext cx="4860036" cy="3749040"/>
           </a:xfrm>
           <a:prstGeom prst="rect">
             <a:avLst/>
@@ -18819,7 +20265,7 @@
               <a:buNone/>
             </a:pPr>
             <a:r>
-              <a:rPr lang="en-US" sz="1800" dirty="0">
+              <a:rPr lang="en-US" sz="2200" dirty="0">
                 <a:solidFill>
                   <a:srgbClr val="1F2937"/>
                 </a:solidFill>
@@ -18829,7 +20275,7 @@
               </a:rPr>
               <a:t>Híbrido para empresas solares: constrói (EPC) + gere (assinatura) + mantém (O&amp;M) = três receitas na mesma usina</a:t>
             </a:r>
-            <a:endParaRPr lang="en-US" sz="1800" dirty="0"/>
+            <a:endParaRPr lang="en-US" sz="2200" dirty="0"/>
           </a:p>
         </p:txBody>
       </p:sp>
@@ -18841,8 +20287,8 @@
         </p:nvSpPr>
         <p:spPr>
           <a:xfrm>
-            <a:off x="6240780" y="1325880"/>
-            <a:ext cx="5554980" cy="4937760"/>
+            <a:off x="6231636" y="1325880"/>
+            <a:ext cx="5408676" cy="4937760"/>
           </a:xfrm>
           <a:prstGeom prst="roundRect">
             <a:avLst>
@@ -18875,8 +20321,8 @@
         </p:nvSpPr>
         <p:spPr>
           <a:xfrm>
-            <a:off x="6240780" y="1325880"/>
-            <a:ext cx="5554980" cy="109728"/>
+            <a:off x="6231636" y="1325880"/>
+            <a:ext cx="5408676" cy="109728"/>
           </a:xfrm>
           <a:prstGeom prst="rect">
             <a:avLst/>
@@ -18895,8 +20341,8 @@
         </p:nvSpPr>
         <p:spPr>
           <a:xfrm>
-            <a:off x="6515100" y="1554480"/>
-            <a:ext cx="5006340" cy="685800"/>
+            <a:off x="6505956" y="1554480"/>
+            <a:ext cx="4860036" cy="685800"/>
           </a:xfrm>
           <a:prstGeom prst="rect">
             <a:avLst/>
@@ -18936,8 +20382,8 @@
         </p:nvSpPr>
         <p:spPr>
           <a:xfrm>
-            <a:off x="6515100" y="2286000"/>
-            <a:ext cx="5006340" cy="3749040"/>
+            <a:off x="6505956" y="2286000"/>
+            <a:ext cx="4860036" cy="3749040"/>
           </a:xfrm>
           <a:prstGeom prst="rect">
             <a:avLst/>
@@ -19009,6 +20455,54 @@
               <a:t>3. Quanto risco aceita?</a:t>
             </a:r>
             <a:endParaRPr lang="en-US" sz="1700" dirty="0"/>
+          </a:p>
+        </p:txBody>
+      </p:sp>
+      <p:sp>
+        <p:nvSpPr>
+          <p:cNvPr id="25" name="Slide Number Placeholder 0"/>
+          <p:cNvSpPr>
+            <a:spLocks noGrp="1"/>
+          </p:cNvSpPr>
+          <p:nvPr>
+            <p:ph type="sldNum" sz="quarter" idx="4294967295"/>
+          </p:nvPr>
+        </p:nvSpPr>
+        <p:spPr>
+          <a:xfrm>
+            <a:off x="11292840" y="6556248"/>
+            <a:ext cx="548640" cy="256032"/>
+          </a:xfrm>
+          <a:prstGeom prst="rect">
+            <a:avLst/>
+          </a:prstGeom>
+          <a:extLst>
+            <a:ext uri="{C572A759-6A51-4108-AA02-DFA0A04FC94B}">
+              <ma14:wrappingTextBoxFlag xmlns:ma14="http://schemas.microsoft.com/office/mac/drawingml/2011/main" val="0"/>
+            </a:ext>
+          </a:extLst>
+        </p:spPr>
+        <p:txBody>
+          <a:bodyPr/>
+          <a:lstStyle>
+            <a:lvl1pPr>
+              <a:defRPr sz="900">
+                <a:solidFill>
+                  <a:srgbClr val="1B3A6B"/>
+                </a:solidFill>
+                <a:latin typeface="Arial"/>
+                <a:ea typeface="Arial"/>
+                <a:cs typeface="Arial"/>
+              </a:defRPr>
+            </a:lvl1pPr>
+          </a:lstStyle>
+          <a:p>
+            <a:pPr algn="r"/>
+            <a:fld id="{F7021451-1387-4CA6-816F-3879F97B5CBC}" type="slidenum">
+              <a:rPr b="1" lang="en-US"/>
+              <a:t>4</a:t>
+            </a:fld>
+            <a:endParaRPr lang="en-US"/>
           </a:p>
         </p:txBody>
       </p:sp>
@@ -19085,7 +20579,7 @@
         </p:blipFill>
         <p:spPr>
           <a:xfrm>
-            <a:off x="411480" y="6547104"/>
+            <a:off x="548640" y="6547104"/>
             <a:ext cx="274320" cy="274320"/>
           </a:xfrm>
           <a:prstGeom prst="rect">
@@ -19101,7 +20595,7 @@
         </p:nvSpPr>
         <p:spPr>
           <a:xfrm>
-            <a:off x="749808" y="6528816"/>
+            <a:off x="886968" y="6528816"/>
             <a:ext cx="6400800" cy="310896"/>
           </a:xfrm>
           <a:prstGeom prst="rect">
@@ -19141,7 +20635,7 @@
         <p:spPr>
           <a:xfrm>
             <a:off x="7132320" y="6528816"/>
-            <a:ext cx="4663440" cy="310896"/>
+            <a:ext cx="4023360" cy="310896"/>
           </a:xfrm>
           <a:prstGeom prst="rect">
             <a:avLst/>
@@ -19179,7 +20673,7 @@
         </p:nvSpPr>
         <p:spPr>
           <a:xfrm>
-            <a:off x="411480" y="384048"/>
+            <a:off x="548640" y="384048"/>
             <a:ext cx="82296" cy="658368"/>
           </a:xfrm>
           <a:prstGeom prst="rect">
@@ -19199,7 +20693,7 @@
         </p:nvSpPr>
         <p:spPr>
           <a:xfrm>
-            <a:off x="640080" y="292608"/>
+            <a:off x="777240" y="292608"/>
             <a:ext cx="10972800" cy="274320"/>
           </a:xfrm>
           <a:prstGeom prst="rect">
@@ -19238,8 +20732,8 @@
         </p:nvSpPr>
         <p:spPr>
           <a:xfrm>
-            <a:off x="640080" y="530352"/>
-            <a:ext cx="11155680" cy="566928"/>
+            <a:off x="777240" y="530352"/>
+            <a:ext cx="10881360" cy="566928"/>
           </a:xfrm>
           <a:prstGeom prst="rect">
             <a:avLst/>
@@ -19279,8 +20773,8 @@
         </p:nvSpPr>
         <p:spPr>
           <a:xfrm>
-            <a:off x="411480" y="1325880"/>
-            <a:ext cx="5577840" cy="4892040"/>
+            <a:off x="548640" y="1325880"/>
+            <a:ext cx="5431536" cy="4892040"/>
           </a:xfrm>
           <a:prstGeom prst="roundRect">
             <a:avLst>
@@ -19313,7 +20807,7 @@
         </p:nvSpPr>
         <p:spPr>
           <a:xfrm>
-            <a:off x="594360" y="1508760"/>
+            <a:off x="731520" y="1508760"/>
             <a:ext cx="457200" cy="457200"/>
           </a:xfrm>
           <a:prstGeom prst="ellipse">
@@ -19333,7 +20827,7 @@
         </p:nvSpPr>
         <p:spPr>
           <a:xfrm>
-            <a:off x="594360" y="1508760"/>
+            <a:off x="731520" y="1508760"/>
             <a:ext cx="457200" cy="457200"/>
           </a:xfrm>
           <a:prstGeom prst="rect">
@@ -19372,8 +20866,8 @@
         </p:nvSpPr>
         <p:spPr>
           <a:xfrm>
-            <a:off x="1188720" y="1435608"/>
-            <a:ext cx="4663440" cy="4672584"/>
+            <a:off x="1325880" y="1435608"/>
+            <a:ext cx="4517136" cy="4672584"/>
           </a:xfrm>
           <a:prstGeom prst="rect">
             <a:avLst/>
@@ -19413,8 +20907,8 @@
         </p:nvSpPr>
         <p:spPr>
           <a:xfrm>
-            <a:off x="6217920" y="1325880"/>
-            <a:ext cx="5577840" cy="4892040"/>
+            <a:off x="6208776" y="1325880"/>
+            <a:ext cx="5431536" cy="4892040"/>
           </a:xfrm>
           <a:prstGeom prst="roundRect">
             <a:avLst>
@@ -19447,7 +20941,7 @@
         </p:nvSpPr>
         <p:spPr>
           <a:xfrm>
-            <a:off x="6400800" y="1508760"/>
+            <a:off x="6391656" y="1508760"/>
             <a:ext cx="457200" cy="457200"/>
           </a:xfrm>
           <a:prstGeom prst="ellipse">
@@ -19467,7 +20961,7 @@
         </p:nvSpPr>
         <p:spPr>
           <a:xfrm>
-            <a:off x="6400800" y="1508760"/>
+            <a:off x="6391656" y="1508760"/>
             <a:ext cx="457200" cy="457200"/>
           </a:xfrm>
           <a:prstGeom prst="rect">
@@ -19506,8 +21000,8 @@
         </p:nvSpPr>
         <p:spPr>
           <a:xfrm>
-            <a:off x="6995160" y="1435608"/>
-            <a:ext cx="4663440" cy="4672584"/>
+            <a:off x="6986016" y="1435608"/>
+            <a:ext cx="4517136" cy="4672584"/>
           </a:xfrm>
           <a:prstGeom prst="rect">
             <a:avLst/>
@@ -19536,6 +21030,54 @@
               <a:t>Asset-light, asset-heavy ou híbrido</a:t>
             </a:r>
             <a:endParaRPr lang="en-US" sz="1800" dirty="0"/>
+          </a:p>
+        </p:txBody>
+      </p:sp>
+      <p:sp>
+        <p:nvSpPr>
+          <p:cNvPr id="25" name="Slide Number Placeholder 0"/>
+          <p:cNvSpPr>
+            <a:spLocks noGrp="1"/>
+          </p:cNvSpPr>
+          <p:nvPr>
+            <p:ph type="sldNum" sz="quarter" idx="4294967295"/>
+          </p:nvPr>
+        </p:nvSpPr>
+        <p:spPr>
+          <a:xfrm>
+            <a:off x="11292840" y="6556248"/>
+            <a:ext cx="548640" cy="256032"/>
+          </a:xfrm>
+          <a:prstGeom prst="rect">
+            <a:avLst/>
+          </a:prstGeom>
+          <a:extLst>
+            <a:ext uri="{C572A759-6A51-4108-AA02-DFA0A04FC94B}">
+              <ma14:wrappingTextBoxFlag xmlns:ma14="http://schemas.microsoft.com/office/mac/drawingml/2011/main" val="0"/>
+            </a:ext>
+          </a:extLst>
+        </p:spPr>
+        <p:txBody>
+          <a:bodyPr/>
+          <a:lstStyle>
+            <a:lvl1pPr>
+              <a:defRPr sz="900">
+                <a:solidFill>
+                  <a:srgbClr val="1B3A6B"/>
+                </a:solidFill>
+                <a:latin typeface="Arial"/>
+                <a:ea typeface="Arial"/>
+                <a:cs typeface="Arial"/>
+              </a:defRPr>
+            </a:lvl1pPr>
+          </a:lstStyle>
+          <a:p>
+            <a:pPr algn="r"/>
+            <a:fld id="{F7021451-1387-4CA6-816F-3879F97B5CBC}" type="slidenum">
+              <a:rPr b="1" lang="en-US"/>
+              <a:t>5</a:t>
+            </a:fld>
+            <a:endParaRPr lang="en-US"/>
           </a:p>
         </p:txBody>
       </p:sp>
@@ -19599,6 +21141,45 @@
         </p:nvSpPr>
         <p:spPr>
           <a:xfrm>
+            <a:off x="457200" y="548640"/>
+            <a:ext cx="3474720" cy="1737360"/>
+          </a:xfrm>
+          <a:prstGeom prst="rect">
+            <a:avLst/>
+          </a:prstGeom>
+          <a:noFill/>
+          <a:ln/>
+        </p:spPr>
+        <p:txBody>
+          <a:bodyPr wrap="square" rtlCol="0" anchor="ctr"/>
+          <a:lstStyle/>
+          <a:p>
+            <a:pPr indent="0" marL="0">
+              <a:buNone/>
+            </a:pPr>
+            <a:r>
+              <a:rPr lang="en-US" sz="11000" b="1" dirty="0">
+                <a:solidFill>
+                  <a:srgbClr val="11396F"/>
+                </a:solidFill>
+                <a:latin typeface="Arial" pitchFamily="34" charset="0"/>
+                <a:ea typeface="Arial" pitchFamily="34" charset="-122"/>
+                <a:cs typeface="Arial" pitchFamily="34" charset="-120"/>
+              </a:rPr>
+              <a:t>02</a:t>
+            </a:r>
+            <a:endParaRPr lang="en-US" sz="11000" dirty="0"/>
+          </a:p>
+        </p:txBody>
+      </p:sp>
+      <p:sp>
+        <p:nvSpPr>
+          <p:cNvPr id="4" name="Text 2"/>
+          <p:cNvSpPr/>
+          <p:nvPr/>
+        </p:nvSpPr>
+        <p:spPr>
+          <a:xfrm>
             <a:off x="548640" y="2194560"/>
             <a:ext cx="3291840" cy="548640"/>
           </a:xfrm>
@@ -19632,7 +21213,46 @@
       </p:sp>
       <p:sp>
         <p:nvSpPr>
-          <p:cNvPr id="4" name="Text 2"/>
+          <p:cNvPr id="5" name="Text 3"/>
+          <p:cNvSpPr/>
+          <p:nvPr/>
+        </p:nvSpPr>
+        <p:spPr>
+          <a:xfrm>
+            <a:off x="548640" y="3200400"/>
+            <a:ext cx="3383280" cy="457200"/>
+          </a:xfrm>
+          <a:prstGeom prst="rect">
+            <a:avLst/>
+          </a:prstGeom>
+          <a:noFill/>
+          <a:ln/>
+        </p:spPr>
+        <p:txBody>
+          <a:bodyPr wrap="square" rtlCol="0" anchor="ctr"/>
+          <a:lstStyle/>
+          <a:p>
+            <a:pPr indent="0" marL="0">
+              <a:buNone/>
+            </a:pPr>
+            <a:r>
+              <a:rPr lang="en-US" sz="1100" dirty="0">
+                <a:solidFill>
+                  <a:srgbClr val="C7D2E3"/>
+                </a:solidFill>
+                <a:latin typeface="Arial" pitchFamily="34" charset="0"/>
+                <a:ea typeface="Arial" pitchFamily="34" charset="-122"/>
+                <a:cs typeface="Arial" pitchFamily="34" charset="-120"/>
+              </a:rPr>
+              <a:t>M3 · Etapa 2 · Regulação e negócio</a:t>
+            </a:r>
+            <a:endParaRPr lang="en-US" sz="1100" dirty="0"/>
+          </a:p>
+        </p:txBody>
+      </p:sp>
+      <p:sp>
+        <p:nvSpPr>
+          <p:cNvPr id="6" name="Text 4"/>
           <p:cNvSpPr/>
           <p:nvPr/>
         </p:nvSpPr>
@@ -19671,7 +21291,7 @@
       </p:sp>
       <p:pic>
         <p:nvPicPr>
-          <p:cNvPr id="5" name="Image 0" descr="/www/wwwroot/rexar/gdsolar/docs/curso/slides/assets/logo-gdsolar.png">    </p:cNvPr>
+          <p:cNvPr id="7" name="Image 0" descr="/www/wwwroot/rexar/gdsolar/docs/curso/slides/assets/logo-gdsolar.png">    </p:cNvPr>
           <p:cNvPicPr>
             <a:picLocks noChangeAspect="1"/>
           </p:cNvPicPr>
@@ -19695,7 +21315,7 @@
       </p:pic>
       <p:sp>
         <p:nvSpPr>
-          <p:cNvPr id="6" name="Text 3"/>
+          <p:cNvPr id="8" name="Text 5"/>
           <p:cNvSpPr/>
           <p:nvPr/>
         </p:nvSpPr>
@@ -19736,7 +21356,7 @@
       </p:sp>
       <p:sp>
         <p:nvSpPr>
-          <p:cNvPr id="7" name="Text 4"/>
+          <p:cNvPr id="9" name="Text 6"/>
           <p:cNvSpPr/>
           <p:nvPr/>
         </p:nvSpPr>
@@ -19777,7 +21397,7 @@
       </p:sp>
       <p:sp>
         <p:nvSpPr>
-          <p:cNvPr id="8" name="Text 5"/>
+          <p:cNvPr id="10" name="Text 7"/>
           <p:cNvSpPr/>
           <p:nvPr/>
         </p:nvSpPr>
@@ -19977,7 +21597,7 @@
         </p:blipFill>
         <p:spPr>
           <a:xfrm>
-            <a:off x="411480" y="6547104"/>
+            <a:off x="548640" y="6547104"/>
             <a:ext cx="274320" cy="274320"/>
           </a:xfrm>
           <a:prstGeom prst="rect">
@@ -19993,7 +21613,7 @@
         </p:nvSpPr>
         <p:spPr>
           <a:xfrm>
-            <a:off x="749808" y="6528816"/>
+            <a:off x="886968" y="6528816"/>
             <a:ext cx="6400800" cy="310896"/>
           </a:xfrm>
           <a:prstGeom prst="rect">
@@ -20033,7 +21653,7 @@
         <p:spPr>
           <a:xfrm>
             <a:off x="7132320" y="6528816"/>
-            <a:ext cx="4663440" cy="310896"/>
+            <a:ext cx="4023360" cy="310896"/>
           </a:xfrm>
           <a:prstGeom prst="rect">
             <a:avLst/>
@@ -20071,7 +21691,7 @@
         </p:nvSpPr>
         <p:spPr>
           <a:xfrm>
-            <a:off x="411480" y="384048"/>
+            <a:off x="548640" y="384048"/>
             <a:ext cx="82296" cy="658368"/>
           </a:xfrm>
           <a:prstGeom prst="rect">
@@ -20091,7 +21711,7 @@
         </p:nvSpPr>
         <p:spPr>
           <a:xfrm>
-            <a:off x="640080" y="292608"/>
+            <a:off x="777240" y="292608"/>
             <a:ext cx="10972800" cy="274320"/>
           </a:xfrm>
           <a:prstGeom prst="rect">
@@ -20130,8 +21750,8 @@
         </p:nvSpPr>
         <p:spPr>
           <a:xfrm>
-            <a:off x="640080" y="530352"/>
-            <a:ext cx="11155680" cy="566928"/>
+            <a:off x="777240" y="530352"/>
+            <a:ext cx="10881360" cy="566928"/>
           </a:xfrm>
           <a:prstGeom prst="rect">
             <a:avLst/>
@@ -20171,12 +21791,12 @@
         </p:nvSpPr>
         <p:spPr>
           <a:xfrm>
-            <a:off x="411480" y="1325880"/>
-            <a:ext cx="3611880" cy="4937760"/>
+            <a:off x="548640" y="1325880"/>
+            <a:ext cx="3514344" cy="4937760"/>
           </a:xfrm>
           <a:prstGeom prst="roundRect">
             <a:avLst>
-              <a:gd name="adj" fmla="val 2025"/>
+              <a:gd name="adj" fmla="val 2082"/>
             </a:avLst>
           </a:prstGeom>
           <a:solidFill>
@@ -20205,8 +21825,8 @@
         </p:nvSpPr>
         <p:spPr>
           <a:xfrm>
-            <a:off x="411480" y="1325880"/>
-            <a:ext cx="3611880" cy="109728"/>
+            <a:off x="548640" y="1325880"/>
+            <a:ext cx="3514344" cy="109728"/>
           </a:xfrm>
           <a:prstGeom prst="rect">
             <a:avLst/>
@@ -20225,8 +21845,8 @@
         </p:nvSpPr>
         <p:spPr>
           <a:xfrm>
-            <a:off x="685800" y="1554480"/>
-            <a:ext cx="3063240" cy="685800"/>
+            <a:off x="822960" y="1554480"/>
+            <a:ext cx="2965704" cy="685800"/>
           </a:xfrm>
           <a:prstGeom prst="rect">
             <a:avLst/>
@@ -20266,8 +21886,8 @@
         </p:nvSpPr>
         <p:spPr>
           <a:xfrm>
-            <a:off x="685800" y="2286000"/>
-            <a:ext cx="3063240" cy="3749040"/>
+            <a:off x="822960" y="2286000"/>
+            <a:ext cx="2965704" cy="3749040"/>
           </a:xfrm>
           <a:prstGeom prst="rect">
             <a:avLst/>
@@ -20289,7 +21909,7 @@
               <a:buChar char="●"/>
             </a:pPr>
             <a:r>
-              <a:rPr lang="en-US" sz="1400" dirty="0">
+              <a:rPr lang="en-US" sz="1700" dirty="0">
                 <a:solidFill>
                   <a:srgbClr val="1F2937"/>
                 </a:solidFill>
@@ -20299,7 +21919,7 @@
               </a:rPr>
               <a:t>Consórcio (Lei 6.404, arts. 278–279): reúne pessoas jurídicas</a:t>
             </a:r>
-            <a:endParaRPr lang="en-US" sz="1400" dirty="0"/>
+            <a:endParaRPr lang="en-US" sz="1700" dirty="0"/>
           </a:p>
           <a:p>
             <a:pPr marL="342900" indent="-342900">
@@ -20310,7 +21930,7 @@
               <a:buChar char="●"/>
             </a:pPr>
             <a:r>
-              <a:rPr lang="en-US" sz="1400" dirty="0">
+              <a:rPr lang="en-US" sz="1700" dirty="0">
                 <a:solidFill>
                   <a:srgbClr val="1F2937"/>
                 </a:solidFill>
@@ -20320,7 +21940,7 @@
               </a:rPr>
               <a:t>contrato registrado na Junta</a:t>
             </a:r>
-            <a:endParaRPr lang="en-US" sz="1400" dirty="0"/>
+            <a:endParaRPr lang="en-US" sz="1700" dirty="0"/>
           </a:p>
           <a:p>
             <a:pPr marL="342900" indent="-342900">
@@ -20331,7 +21951,7 @@
               <a:buChar char="●"/>
             </a:pPr>
             <a:r>
-              <a:rPr lang="en-US" sz="1400" dirty="0">
+              <a:rPr lang="en-US" sz="1700" dirty="0">
                 <a:solidFill>
                   <a:srgbClr val="1F2937"/>
                 </a:solidFill>
@@ -20341,7 +21961,7 @@
               </a:rPr>
               <a:t>cada consorciada mantém sua personalidade</a:t>
             </a:r>
-            <a:endParaRPr lang="en-US" sz="1400" dirty="0"/>
+            <a:endParaRPr lang="en-US" sz="1700" dirty="0"/>
           </a:p>
           <a:p>
             <a:pPr marL="342900" indent="-342900">
@@ -20352,7 +21972,7 @@
               <a:buChar char="●"/>
             </a:pPr>
             <a:r>
-              <a:rPr lang="en-US" sz="1400" dirty="0">
+              <a:rPr lang="en-US" sz="1700" dirty="0">
                 <a:solidFill>
                   <a:srgbClr val="1F2937"/>
                 </a:solidFill>
@@ -20362,7 +21982,7 @@
               </a:rPr>
               <a:t>simples de entrar e sair</a:t>
             </a:r>
-            <a:endParaRPr lang="en-US" sz="1400" dirty="0"/>
+            <a:endParaRPr lang="en-US" sz="1700" dirty="0"/>
           </a:p>
         </p:txBody>
       </p:sp>
@@ -20374,12 +21994,12 @@
         </p:nvSpPr>
         <p:spPr>
           <a:xfrm>
-            <a:off x="4297680" y="1325880"/>
-            <a:ext cx="3611880" cy="4937760"/>
+            <a:off x="4337304" y="1325880"/>
+            <a:ext cx="3514344" cy="4937760"/>
           </a:xfrm>
           <a:prstGeom prst="roundRect">
             <a:avLst>
-              <a:gd name="adj" fmla="val 2025"/>
+              <a:gd name="adj" fmla="val 2082"/>
             </a:avLst>
           </a:prstGeom>
           <a:solidFill>
@@ -20408,8 +22028,8 @@
         </p:nvSpPr>
         <p:spPr>
           <a:xfrm>
-            <a:off x="4297680" y="1325880"/>
-            <a:ext cx="3611880" cy="109728"/>
+            <a:off x="4337304" y="1325880"/>
+            <a:ext cx="3514344" cy="109728"/>
           </a:xfrm>
           <a:prstGeom prst="rect">
             <a:avLst/>
@@ -20428,8 +22048,8 @@
         </p:nvSpPr>
         <p:spPr>
           <a:xfrm>
-            <a:off x="4572000" y="1554480"/>
-            <a:ext cx="3063240" cy="685800"/>
+            <a:off x="4611624" y="1554480"/>
+            <a:ext cx="2965704" cy="685800"/>
           </a:xfrm>
           <a:prstGeom prst="rect">
             <a:avLst/>
@@ -20469,8 +22089,8 @@
         </p:nvSpPr>
         <p:spPr>
           <a:xfrm>
-            <a:off x="4572000" y="2286000"/>
-            <a:ext cx="3063240" cy="3749040"/>
+            <a:off x="4611624" y="2286000"/>
+            <a:ext cx="2965704" cy="3749040"/>
           </a:xfrm>
           <a:prstGeom prst="rect">
             <a:avLst/>
@@ -20492,7 +22112,7 @@
               <a:buChar char="●"/>
             </a:pPr>
             <a:r>
-              <a:rPr lang="en-US" sz="1400" dirty="0">
+              <a:rPr lang="en-US" sz="1700" dirty="0">
                 <a:solidFill>
                   <a:srgbClr val="1F2937"/>
                 </a:solidFill>
@@ -20502,7 +22122,7 @@
               </a:rPr>
               <a:t>Cooperativa (Lei 5.764/1971): pessoas físicas e jurídicas</a:t>
             </a:r>
-            <a:endParaRPr lang="en-US" sz="1400" dirty="0"/>
+            <a:endParaRPr lang="en-US" sz="1700" dirty="0"/>
           </a:p>
           <a:p>
             <a:pPr marL="342900" indent="-342900">
@@ -20513,7 +22133,7 @@
               <a:buChar char="●"/>
             </a:pPr>
             <a:r>
-              <a:rPr lang="en-US" sz="1400" dirty="0">
+              <a:rPr lang="en-US" sz="1700" dirty="0">
                 <a:solidFill>
                   <a:srgbClr val="1F2937"/>
                 </a:solidFill>
@@ -20523,7 +22143,7 @@
               </a:rPr>
               <a:t>número mínimo de cooperados</a:t>
             </a:r>
-            <a:endParaRPr lang="en-US" sz="1400" dirty="0"/>
+            <a:endParaRPr lang="en-US" sz="1700" dirty="0"/>
           </a:p>
           <a:p>
             <a:pPr marL="342900" indent="-342900">
@@ -20534,7 +22154,7 @@
               <a:buChar char="●"/>
             </a:pPr>
             <a:r>
-              <a:rPr lang="en-US" sz="1400" dirty="0">
+              <a:rPr lang="en-US" sz="1700" dirty="0">
                 <a:solidFill>
                   <a:srgbClr val="1F2937"/>
                 </a:solidFill>
@@ -20544,7 +22164,7 @@
               </a:rPr>
               <a:t>assembleia, conselho, estatuto</a:t>
             </a:r>
-            <a:endParaRPr lang="en-US" sz="1400" dirty="0"/>
+            <a:endParaRPr lang="en-US" sz="1700" dirty="0"/>
           </a:p>
           <a:p>
             <a:pPr marL="342900" indent="-342900">
@@ -20555,7 +22175,7 @@
               <a:buChar char="●"/>
             </a:pPr>
             <a:r>
-              <a:rPr lang="en-US" sz="1400" dirty="0">
+              <a:rPr lang="en-US" sz="1700" dirty="0">
                 <a:solidFill>
                   <a:srgbClr val="1F2937"/>
                 </a:solidFill>
@@ -20565,7 +22185,7 @@
               </a:rPr>
               <a:t>cotas-parte</a:t>
             </a:r>
-            <a:endParaRPr lang="en-US" sz="1400" dirty="0"/>
+            <a:endParaRPr lang="en-US" sz="1700" dirty="0"/>
           </a:p>
           <a:p>
             <a:pPr marL="342900" indent="-342900">
@@ -20576,7 +22196,7 @@
               <a:buChar char="●"/>
             </a:pPr>
             <a:r>
-              <a:rPr lang="en-US" sz="1400" dirty="0">
+              <a:rPr lang="en-US" sz="1700" dirty="0">
                 <a:solidFill>
                   <a:srgbClr val="1F2937"/>
                 </a:solidFill>
@@ -20586,7 +22206,7 @@
               </a:rPr>
               <a:t>governança democrática</a:t>
             </a:r>
-            <a:endParaRPr lang="en-US" sz="1400" dirty="0"/>
+            <a:endParaRPr lang="en-US" sz="1700" dirty="0"/>
           </a:p>
         </p:txBody>
       </p:sp>
@@ -20598,12 +22218,12 @@
         </p:nvSpPr>
         <p:spPr>
           <a:xfrm>
-            <a:off x="8183880" y="1325880"/>
-            <a:ext cx="3611880" cy="4937760"/>
+            <a:off x="8125968" y="1325880"/>
+            <a:ext cx="3514344" cy="4937760"/>
           </a:xfrm>
           <a:prstGeom prst="roundRect">
             <a:avLst>
-              <a:gd name="adj" fmla="val 2025"/>
+              <a:gd name="adj" fmla="val 2082"/>
             </a:avLst>
           </a:prstGeom>
           <a:solidFill>
@@ -20632,8 +22252,8 @@
         </p:nvSpPr>
         <p:spPr>
           <a:xfrm>
-            <a:off x="8183880" y="1325880"/>
-            <a:ext cx="3611880" cy="109728"/>
+            <a:off x="8125968" y="1325880"/>
+            <a:ext cx="3514344" cy="109728"/>
           </a:xfrm>
           <a:prstGeom prst="rect">
             <a:avLst/>
@@ -20652,8 +22272,8 @@
         </p:nvSpPr>
         <p:spPr>
           <a:xfrm>
-            <a:off x="8458200" y="1554480"/>
-            <a:ext cx="3063240" cy="685800"/>
+            <a:off x="8400288" y="1554480"/>
+            <a:ext cx="2965704" cy="685800"/>
           </a:xfrm>
           <a:prstGeom prst="rect">
             <a:avLst/>
@@ -20693,8 +22313,8 @@
         </p:nvSpPr>
         <p:spPr>
           <a:xfrm>
-            <a:off x="8458200" y="2286000"/>
-            <a:ext cx="3063240" cy="3749040"/>
+            <a:off x="8400288" y="2286000"/>
+            <a:ext cx="2965704" cy="3749040"/>
           </a:xfrm>
           <a:prstGeom prst="rect">
             <a:avLst/>
@@ -20716,7 +22336,7 @@
               <a:buChar char="●"/>
             </a:pPr>
             <a:r>
-              <a:rPr lang="en-US" sz="1400" dirty="0">
+              <a:rPr lang="en-US" sz="1700" dirty="0">
                 <a:solidFill>
                   <a:srgbClr val="1F2937"/>
                 </a:solidFill>
@@ -20726,7 +22346,7 @@
               </a:rPr>
               <a:t>Associação civil (Código Civil): pessoas físicas e jurídicas</a:t>
             </a:r>
-            <a:endParaRPr lang="en-US" sz="1400" dirty="0"/>
+            <a:endParaRPr lang="en-US" sz="1700" dirty="0"/>
           </a:p>
           <a:p>
             <a:pPr marL="342900" indent="-342900">
@@ -20737,7 +22357,7 @@
               <a:buChar char="●"/>
             </a:pPr>
             <a:r>
-              <a:rPr lang="en-US" sz="1400" dirty="0">
+              <a:rPr lang="en-US" sz="1700" dirty="0">
                 <a:solidFill>
                   <a:srgbClr val="1F2937"/>
                 </a:solidFill>
@@ -20747,7 +22367,7 @@
               </a:rPr>
               <a:t>sem fins lucrativos</a:t>
             </a:r>
-            <a:endParaRPr lang="en-US" sz="1400" dirty="0"/>
+            <a:endParaRPr lang="en-US" sz="1700" dirty="0"/>
           </a:p>
           <a:p>
             <a:pPr marL="342900" indent="-342900">
@@ -20758,7 +22378,7 @@
               <a:buChar char="●"/>
             </a:pPr>
             <a:r>
-              <a:rPr lang="en-US" sz="1400" dirty="0">
+              <a:rPr lang="en-US" sz="1700" dirty="0">
                 <a:solidFill>
                   <a:srgbClr val="1F2937"/>
                 </a:solidFill>
@@ -20768,7 +22388,7 @@
               </a:rPr>
               <a:t>estatuto e assembleia</a:t>
             </a:r>
-            <a:endParaRPr lang="en-US" sz="1400" dirty="0"/>
+            <a:endParaRPr lang="en-US" sz="1700" dirty="0"/>
           </a:p>
           <a:p>
             <a:pPr marL="342900" indent="-342900">
@@ -20779,7 +22399,7 @@
               <a:buChar char="●"/>
             </a:pPr>
             <a:r>
-              <a:rPr lang="en-US" sz="1400" dirty="0">
+              <a:rPr lang="en-US" sz="1700" dirty="0">
                 <a:solidFill>
                   <a:srgbClr val="1F2937"/>
                 </a:solidFill>
@@ -20789,7 +22409,55 @@
               </a:rPr>
               <a:t>mais simples que cooperativa</a:t>
             </a:r>
-            <a:endParaRPr lang="en-US" sz="1400" dirty="0"/>
+            <a:endParaRPr lang="en-US" sz="1700" dirty="0"/>
+          </a:p>
+        </p:txBody>
+      </p:sp>
+      <p:sp>
+        <p:nvSpPr>
+          <p:cNvPr id="25" name="Slide Number Placeholder 0"/>
+          <p:cNvSpPr>
+            <a:spLocks noGrp="1"/>
+          </p:cNvSpPr>
+          <p:nvPr>
+            <p:ph type="sldNum" sz="quarter" idx="4294967295"/>
+          </p:nvPr>
+        </p:nvSpPr>
+        <p:spPr>
+          <a:xfrm>
+            <a:off x="11292840" y="6556248"/>
+            <a:ext cx="548640" cy="256032"/>
+          </a:xfrm>
+          <a:prstGeom prst="rect">
+            <a:avLst/>
+          </a:prstGeom>
+          <a:extLst>
+            <a:ext uri="{C572A759-6A51-4108-AA02-DFA0A04FC94B}">
+              <ma14:wrappingTextBoxFlag xmlns:ma14="http://schemas.microsoft.com/office/mac/drawingml/2011/main" val="0"/>
+            </a:ext>
+          </a:extLst>
+        </p:spPr>
+        <p:txBody>
+          <a:bodyPr/>
+          <a:lstStyle>
+            <a:lvl1pPr>
+              <a:defRPr sz="900">
+                <a:solidFill>
+                  <a:srgbClr val="1B3A6B"/>
+                </a:solidFill>
+                <a:latin typeface="Arial"/>
+                <a:ea typeface="Arial"/>
+                <a:cs typeface="Arial"/>
+              </a:defRPr>
+            </a:lvl1pPr>
+          </a:lstStyle>
+          <a:p>
+            <a:pPr algn="r"/>
+            <a:fld id="{F7021451-1387-4CA6-816F-3879F97B5CBC}" type="slidenum">
+              <a:rPr b="1" lang="en-US"/>
+              <a:t>7</a:t>
+            </a:fld>
+            <a:endParaRPr lang="en-US"/>
           </a:p>
         </p:txBody>
       </p:sp>
@@ -20866,7 +22534,7 @@
         </p:blipFill>
         <p:spPr>
           <a:xfrm>
-            <a:off x="411480" y="6547104"/>
+            <a:off x="548640" y="6547104"/>
             <a:ext cx="274320" cy="274320"/>
           </a:xfrm>
           <a:prstGeom prst="rect">
@@ -20882,7 +22550,7 @@
         </p:nvSpPr>
         <p:spPr>
           <a:xfrm>
-            <a:off x="749808" y="6528816"/>
+            <a:off x="886968" y="6528816"/>
             <a:ext cx="6400800" cy="310896"/>
           </a:xfrm>
           <a:prstGeom prst="rect">
@@ -20922,7 +22590,7 @@
         <p:spPr>
           <a:xfrm>
             <a:off x="7132320" y="6528816"/>
-            <a:ext cx="4663440" cy="310896"/>
+            <a:ext cx="4023360" cy="310896"/>
           </a:xfrm>
           <a:prstGeom prst="rect">
             <a:avLst/>
@@ -20960,7 +22628,7 @@
         </p:nvSpPr>
         <p:spPr>
           <a:xfrm>
-            <a:off x="411480" y="384048"/>
+            <a:off x="548640" y="384048"/>
             <a:ext cx="82296" cy="658368"/>
           </a:xfrm>
           <a:prstGeom prst="rect">
@@ -20980,7 +22648,7 @@
         </p:nvSpPr>
         <p:spPr>
           <a:xfrm>
-            <a:off x="640080" y="292608"/>
+            <a:off x="777240" y="292608"/>
             <a:ext cx="10972800" cy="274320"/>
           </a:xfrm>
           <a:prstGeom prst="rect">
@@ -21019,8 +22687,8 @@
         </p:nvSpPr>
         <p:spPr>
           <a:xfrm>
-            <a:off x="640080" y="530352"/>
-            <a:ext cx="11155680" cy="566928"/>
+            <a:off x="777240" y="530352"/>
+            <a:ext cx="10881360" cy="566928"/>
           </a:xfrm>
           <a:prstGeom prst="rect">
             <a:avLst/>
@@ -21060,8 +22728,8 @@
         </p:nvSpPr>
         <p:spPr>
           <a:xfrm>
-            <a:off x="411480" y="1325880"/>
-            <a:ext cx="5577840" cy="4892040"/>
+            <a:off x="548640" y="1325880"/>
+            <a:ext cx="5431536" cy="4892040"/>
           </a:xfrm>
           <a:prstGeom prst="roundRect">
             <a:avLst>
@@ -21094,7 +22762,7 @@
         </p:nvSpPr>
         <p:spPr>
           <a:xfrm>
-            <a:off x="594360" y="1508760"/>
+            <a:off x="731520" y="1508760"/>
             <a:ext cx="457200" cy="457200"/>
           </a:xfrm>
           <a:prstGeom prst="ellipse">
@@ -21114,7 +22782,7 @@
         </p:nvSpPr>
         <p:spPr>
           <a:xfrm>
-            <a:off x="594360" y="1508760"/>
+            <a:off x="731520" y="1508760"/>
             <a:ext cx="457200" cy="457200"/>
           </a:xfrm>
           <a:prstGeom prst="rect">
@@ -21153,8 +22821,8 @@
         </p:nvSpPr>
         <p:spPr>
           <a:xfrm>
-            <a:off x="1188720" y="1435608"/>
-            <a:ext cx="4663440" cy="4672584"/>
+            <a:off x="1325880" y="1435608"/>
+            <a:ext cx="4517136" cy="4672584"/>
           </a:xfrm>
           <a:prstGeom prst="rect">
             <a:avLst/>
@@ -21194,8 +22862,8 @@
         </p:nvSpPr>
         <p:spPr>
           <a:xfrm>
-            <a:off x="6217920" y="1325880"/>
-            <a:ext cx="5577840" cy="4892040"/>
+            <a:off x="6208776" y="1325880"/>
+            <a:ext cx="5431536" cy="4892040"/>
           </a:xfrm>
           <a:prstGeom prst="roundRect">
             <a:avLst>
@@ -21228,7 +22896,7 @@
         </p:nvSpPr>
         <p:spPr>
           <a:xfrm>
-            <a:off x="6400800" y="1508760"/>
+            <a:off x="6391656" y="1508760"/>
             <a:ext cx="457200" cy="457200"/>
           </a:xfrm>
           <a:prstGeom prst="ellipse">
@@ -21248,7 +22916,7 @@
         </p:nvSpPr>
         <p:spPr>
           <a:xfrm>
-            <a:off x="6400800" y="1508760"/>
+            <a:off x="6391656" y="1508760"/>
             <a:ext cx="457200" cy="457200"/>
           </a:xfrm>
           <a:prstGeom prst="rect">
@@ -21287,8 +22955,8 @@
         </p:nvSpPr>
         <p:spPr>
           <a:xfrm>
-            <a:off x="6995160" y="1435608"/>
-            <a:ext cx="4663440" cy="4672584"/>
+            <a:off x="6986016" y="1435608"/>
+            <a:ext cx="4517136" cy="4672584"/>
           </a:xfrm>
           <a:prstGeom prst="rect">
             <a:avLst/>
@@ -21317,6 +22985,54 @@
               <a:t>bom para poucos participantes, ruim para alta rotatividade</a:t>
             </a:r>
             <a:endParaRPr lang="en-US" sz="1800" dirty="0"/>
+          </a:p>
+        </p:txBody>
+      </p:sp>
+      <p:sp>
+        <p:nvSpPr>
+          <p:cNvPr id="25" name="Slide Number Placeholder 0"/>
+          <p:cNvSpPr>
+            <a:spLocks noGrp="1"/>
+          </p:cNvSpPr>
+          <p:nvPr>
+            <p:ph type="sldNum" sz="quarter" idx="4294967295"/>
+          </p:nvPr>
+        </p:nvSpPr>
+        <p:spPr>
+          <a:xfrm>
+            <a:off x="11292840" y="6556248"/>
+            <a:ext cx="548640" cy="256032"/>
+          </a:xfrm>
+          <a:prstGeom prst="rect">
+            <a:avLst/>
+          </a:prstGeom>
+          <a:extLst>
+            <a:ext uri="{C572A759-6A51-4108-AA02-DFA0A04FC94B}">
+              <ma14:wrappingTextBoxFlag xmlns:ma14="http://schemas.microsoft.com/office/mac/drawingml/2011/main" val="0"/>
+            </a:ext>
+          </a:extLst>
+        </p:spPr>
+        <p:txBody>
+          <a:bodyPr/>
+          <a:lstStyle>
+            <a:lvl1pPr>
+              <a:defRPr sz="900">
+                <a:solidFill>
+                  <a:srgbClr val="1B3A6B"/>
+                </a:solidFill>
+                <a:latin typeface="Arial"/>
+                <a:ea typeface="Arial"/>
+                <a:cs typeface="Arial"/>
+              </a:defRPr>
+            </a:lvl1pPr>
+          </a:lstStyle>
+          <a:p>
+            <a:pPr algn="r"/>
+            <a:fld id="{F7021451-1387-4CA6-816F-3879F97B5CBC}" type="slidenum">
+              <a:rPr b="1" lang="en-US"/>
+              <a:t>8</a:t>
+            </a:fld>
+            <a:endParaRPr lang="en-US"/>
           </a:p>
         </p:txBody>
       </p:sp>
@@ -21393,7 +23109,7 @@
         </p:blipFill>
         <p:spPr>
           <a:xfrm>
-            <a:off x="411480" y="6547104"/>
+            <a:off x="548640" y="6547104"/>
             <a:ext cx="274320" cy="274320"/>
           </a:xfrm>
           <a:prstGeom prst="rect">
@@ -21409,7 +23125,7 @@
         </p:nvSpPr>
         <p:spPr>
           <a:xfrm>
-            <a:off x="749808" y="6528816"/>
+            <a:off x="886968" y="6528816"/>
             <a:ext cx="6400800" cy="310896"/>
           </a:xfrm>
           <a:prstGeom prst="rect">
@@ -21449,7 +23165,7 @@
         <p:spPr>
           <a:xfrm>
             <a:off x="7132320" y="6528816"/>
-            <a:ext cx="4663440" cy="310896"/>
+            <a:ext cx="4023360" cy="310896"/>
           </a:xfrm>
           <a:prstGeom prst="rect">
             <a:avLst/>
@@ -21487,7 +23203,7 @@
         </p:nvSpPr>
         <p:spPr>
           <a:xfrm>
-            <a:off x="411480" y="384048"/>
+            <a:off x="548640" y="384048"/>
             <a:ext cx="82296" cy="658368"/>
           </a:xfrm>
           <a:prstGeom prst="rect">
@@ -21507,7 +23223,7 @@
         </p:nvSpPr>
         <p:spPr>
           <a:xfrm>
-            <a:off x="640080" y="292608"/>
+            <a:off x="777240" y="292608"/>
             <a:ext cx="10972800" cy="274320"/>
           </a:xfrm>
           <a:prstGeom prst="rect">
@@ -21546,8 +23262,8 @@
         </p:nvSpPr>
         <p:spPr>
           <a:xfrm>
-            <a:off x="640080" y="530352"/>
-            <a:ext cx="11155680" cy="566928"/>
+            <a:off x="777240" y="530352"/>
+            <a:ext cx="10881360" cy="566928"/>
           </a:xfrm>
           <a:prstGeom prst="rect">
             <a:avLst/>
@@ -21594,19 +23310,19 @@
           </p:nvPr>
         </p:nvGraphicFramePr>
         <p:xfrm>
-          <a:off x="411480" y="1417320"/>
-          <a:ext cx="11384280" cy="914400"/>
+          <a:off x="548640" y="1417320"/>
+          <a:ext cx="11091672" cy="914400"/>
         </p:xfrm>
         <a:graphic>
           <a:graphicData uri="http://schemas.openxmlformats.org/drawingml/2006/table">
             <a:tbl>
               <a:tblPr/>
               <a:tblGrid>
-                <a:gridCol w="2276856"/>
-                <a:gridCol w="2276856"/>
-                <a:gridCol w="2276856"/>
-                <a:gridCol w="2276856"/>
-                <a:gridCol w="2276856"/>
+                <a:gridCol w="2218334"/>
+                <a:gridCol w="2218334"/>
+                <a:gridCol w="2218334"/>
+                <a:gridCol w="2218334"/>
+                <a:gridCol w="2218334"/>
               </a:tblGrid>
               <a:tr h="0">
                 <a:tc>
@@ -23311,6 +25027,54 @@
           </a:graphicData>
         </a:graphic>
       </p:graphicFrame>
+      <p:sp>
+        <p:nvSpPr>
+          <p:cNvPr id="25" name="Slide Number Placeholder 0"/>
+          <p:cNvSpPr>
+            <a:spLocks noGrp="1"/>
+          </p:cNvSpPr>
+          <p:nvPr>
+            <p:ph type="sldNum" sz="quarter" idx="4294967295"/>
+          </p:nvPr>
+        </p:nvSpPr>
+        <p:spPr>
+          <a:xfrm>
+            <a:off x="11292840" y="6556248"/>
+            <a:ext cx="548640" cy="256032"/>
+          </a:xfrm>
+          <a:prstGeom prst="rect">
+            <a:avLst/>
+          </a:prstGeom>
+          <a:extLst>
+            <a:ext uri="{C572A759-6A51-4108-AA02-DFA0A04FC94B}">
+              <ma14:wrappingTextBoxFlag xmlns:ma14="http://schemas.microsoft.com/office/mac/drawingml/2011/main" val="0"/>
+            </a:ext>
+          </a:extLst>
+        </p:spPr>
+        <p:txBody>
+          <a:bodyPr/>
+          <a:lstStyle>
+            <a:lvl1pPr>
+              <a:defRPr sz="900">
+                <a:solidFill>
+                  <a:srgbClr val="1B3A6B"/>
+                </a:solidFill>
+                <a:latin typeface="Arial"/>
+                <a:ea typeface="Arial"/>
+                <a:cs typeface="Arial"/>
+              </a:defRPr>
+            </a:lvl1pPr>
+          </a:lstStyle>
+          <a:p>
+            <a:pPr algn="r"/>
+            <a:fld id="{F7021451-1387-4CA6-816F-3879F97B5CBC}" type="slidenum">
+              <a:rPr b="1" lang="en-US"/>
+              <a:t>9</a:t>
+            </a:fld>
+            <a:endParaRPr lang="en-US"/>
+          </a:p>
+        </p:txBody>
+      </p:sp>
     </p:spTree>
   </p:cSld>
   <p:clrMapOvr>

--- a/docs/curso/slides/m03-modelos-de-negocio.pptx
+++ b/docs/curso/slides/m03-modelos-de-negocio.pptx
@@ -143,7 +143,7 @@
 </p:presentation>
 </file>
 
-<file path=ppt/charts/chart3.xml><?xml version="1.0" encoding="utf-8"?>
+<file path=ppt/charts/chart5.xml><?xml version="1.0" encoding="utf-8"?>
 <c:chartSpace xmlns:c="http://schemas.openxmlformats.org/drawingml/2006/chart" xmlns:a="http://schemas.openxmlformats.org/drawingml/2006/main" xmlns:r="http://schemas.openxmlformats.org/officeDocument/2006/relationships">
   <c:date1904 val="0"/>
   <c:roundedCorners val="1"/>
